--- a/Session-2/S2-4-20pm-Wondergem-What-Does-It-Take-To-Be-Wise.pptx
+++ b/Session-2/S2-4-20pm-Wondergem-What-Does-It-Take-To-Be-Wise.pptx
@@ -4,6 +4,9 @@
   <p:sldMasterIdLst>
     <p:sldMasterId id="2147483648" r:id="rId1"/>
   </p:sldMasterIdLst>
+  <p:notesMasterIdLst>
+    <p:notesMasterId r:id="rId26"/>
+  </p:notesMasterIdLst>
   <p:sldIdLst>
     <p:sldId id="256" r:id="rId2"/>
     <p:sldId id="257" r:id="rId3"/>
@@ -16,22 +19,21 @@
     <p:sldId id="264" r:id="rId10"/>
     <p:sldId id="265" r:id="rId11"/>
     <p:sldId id="266" r:id="rId12"/>
-    <p:sldId id="267" r:id="rId13"/>
-    <p:sldId id="268" r:id="rId14"/>
-    <p:sldId id="269" r:id="rId15"/>
-    <p:sldId id="270" r:id="rId16"/>
-    <p:sldId id="271" r:id="rId17"/>
-    <p:sldId id="272" r:id="rId18"/>
-    <p:sldId id="273" r:id="rId19"/>
-    <p:sldId id="274" r:id="rId20"/>
-    <p:sldId id="275" r:id="rId21"/>
-    <p:sldId id="276" r:id="rId22"/>
-    <p:sldId id="277" r:id="rId23"/>
+    <p:sldId id="278" r:id="rId13"/>
+    <p:sldId id="267" r:id="rId14"/>
+    <p:sldId id="268" r:id="rId15"/>
+    <p:sldId id="269" r:id="rId16"/>
+    <p:sldId id="270" r:id="rId17"/>
+    <p:sldId id="271" r:id="rId18"/>
+    <p:sldId id="272" r:id="rId19"/>
+    <p:sldId id="273" r:id="rId20"/>
+    <p:sldId id="274" r:id="rId21"/>
+    <p:sldId id="275" r:id="rId22"/>
+    <p:sldId id="276" r:id="rId23"/>
+    <p:sldId id="277" r:id="rId24"/>
+    <p:sldId id="279" r:id="rId25"/>
   </p:sldIdLst>
-  <p:notesMasterIdLst>
-    <p:notesMasterId r:id="rId24"/>
-  </p:notesMasterIdLst>
-  <p:sldSz cx="9144000" cy="5143500"/>
+  <p:sldSz cx="9144000" cy="5143500" type="screen16x9"/>
   <p:notesSz cx="5143500" cy="9144000"/>
   <p:defaultTextStyle>
     <a:lvl1pPr marL="0" algn="l" defTabSz="914400" rtl="0" eaLnBrk="1" latinLnBrk="0" hangingPunct="1">
@@ -128,12 +130,12 @@
   <p:extLst>
     <p:ext uri="{521415D9-36F7-43E2-AB2F-B90AF26B5E84}">
       <p14:sectionLst xmlns:p14="http://schemas.microsoft.com/office/powerpoint/2010/main">
-        <p14:section name="Open" id="{02d773ef-20e2-a272-d80a-49921facd37e}">
+        <p14:section name="Open" id="{02D773EF-20E2-A272-D80A-49921FACD37E}">
           <p14:sldIdLst>
             <p14:sldId id="256"/>
           </p14:sldIdLst>
         </p14:section>
-        <p14:section name="The horse" id="{13a76c22-8dec-61ef-758d-ff85efac0b75}">
+        <p14:section name="The horse" id="{13A76C22-8DEC-61EF-758D-FF85EFAC0B75}">
           <p14:sldIdLst>
             <p14:sldId id="257"/>
             <p14:sldId id="258"/>
@@ -142,20 +144,21 @@
             <p14:sldId id="261"/>
           </p14:sldIdLst>
         </p14:section>
-        <p14:section name="The turn" id="{81fc2327-a53e-cfda-44c2-d0f0606f87b0}">
+        <p14:section name="The turn" id="{81FC2327-A53E-CFDA-44C2-D0F0606F87B0}">
           <p14:sldIdLst>
             <p14:sldId id="262"/>
             <p14:sldId id="263"/>
           </p14:sldIdLst>
         </p14:section>
-        <p14:section name="Older than AI" id="{def3d424-bd31-58bc-f1eb-a9eae82b39da}">
+        <p14:section name="Older than AI" id="{DEF3D424-BD31-58BC-F1EB-A9EAE82B39DA}">
           <p14:sldIdLst>
             <p14:sldId id="264"/>
             <p14:sldId id="265"/>
             <p14:sldId id="266"/>
+            <p14:sldId id="278"/>
           </p14:sldIdLst>
         </p14:section>
-        <p14:section name="The pyramid" id="{a48ec382-648c-df55-d2a0-ec516fc7862c}">
+        <p14:section name="The pyramid" id="{A48EC382-648C-DF55-D2A0-EC516FC7862C}">
           <p14:sldIdLst>
             <p14:sldId id="267"/>
             <p14:sldId id="268"/>
@@ -165,17 +168,18 @@
             <p14:sldId id="272"/>
           </p14:sldIdLst>
         </p14:section>
-        <p14:section name="Partnership" id="{e251b33b-490f-4933-f732-56f92fc9f392}">
+        <p14:section name="Partnership" id="{E251B33B-490F-4933-F732-56F92FC9F392}">
           <p14:sldIdLst>
             <p14:sldId id="273"/>
             <p14:sldId id="274"/>
           </p14:sldIdLst>
         </p14:section>
-        <p14:section name="Close" id="{0709c477-56e7-fdb7-aff4-eba644243cc3}">
+        <p14:section name="Close" id="{0709C477-56E7-FDB7-AFF4-EBA644243CC3}">
           <p14:sldIdLst>
             <p14:sldId id="275"/>
             <p14:sldId id="276"/>
             <p14:sldId id="277"/>
+            <p14:sldId id="279"/>
           </p14:sldIdLst>
         </p14:section>
       </p14:sectionLst>
@@ -185,6 +189,14 @@
     </p:ext>
   </p:extLst>
 </p:presentation>
+</file>
+
+<file path=ppt/revisionInfo.xml><?xml version="1.0" encoding="utf-8"?>
+<p1510:revInfo xmlns:a="http://schemas.openxmlformats.org/drawingml/2006/main" xmlns:r="http://schemas.openxmlformats.org/officeDocument/2006/relationships" xmlns:p1510="http://schemas.microsoft.com/office/powerpoint/2015/10/main">
+  <p1510:revLst>
+    <p1510:client id="{9DBFECDE-C700-4B15-A6A2-EA3811E7F1BA}" v="13" dt="2026-10-08T15:36:17.484"/>
+  </p1510:revLst>
+</p1510:revInfo>
 </file>
 
 <file path=ppt/notesMasters/notesMaster1.xml><?xml version="1.0" encoding="utf-8"?>
@@ -209,234 +221,10 @@
           <a:chExt cx="0" cy="0"/>
         </a:xfrm>
       </p:grpSpPr>
-      <p:sp>
-        <p:nvSpPr>
-          <p:cNvPr id="2" name="Header Placeholder 1"/>
-          <p:cNvSpPr>
-            <a:spLocks noGrp="1"/>
-          </p:cNvSpPr>
-          <p:nvPr>
-            <p:ph type="hdr" sz="quarter"/>
-          </p:nvPr>
-        </p:nvSpPr>
-        <p:spPr>
-          <a:xfrm>
-            <a:off x="0" y="0"/>
-            <a:ext cx="2971800" cy="458788"/>
-          </a:xfrm>
-          <a:prstGeom prst="rect">
-            <a:avLst/>
-          </a:prstGeom>
-        </p:spPr>
-        <p:txBody>
-          <a:bodyPr vert="horz" lIns="91440" tIns="45720" rIns="91440" bIns="45720" rtlCol="0"/>
-          <a:lstStyle>
-            <a:lvl1pPr algn="l">
-              <a:defRPr sz="1200"/>
-            </a:lvl1pPr>
-          </a:lstStyle>
-          <a:p>
-            <a:endParaRPr lang="en-US"/>
-          </a:p>
-        </p:txBody>
-      </p:sp>
-      <p:sp>
-        <p:nvSpPr>
-          <p:cNvPr id="3" name="Date Placeholder 2"/>
-          <p:cNvSpPr>
-            <a:spLocks noGrp="1"/>
-          </p:cNvSpPr>
-          <p:nvPr>
-            <p:ph type="dt" idx="1"/>
-          </p:nvPr>
-        </p:nvSpPr>
-        <p:spPr>
-          <a:xfrm>
-            <a:off x="3884613" y="0"/>
-            <a:ext cx="2971800" cy="458788"/>
-          </a:xfrm>
-          <a:prstGeom prst="rect">
-            <a:avLst/>
-          </a:prstGeom>
-        </p:spPr>
-        <p:txBody>
-          <a:bodyPr vert="horz" lIns="91440" tIns="45720" rIns="91440" bIns="45720" rtlCol="0"/>
-          <a:lstStyle>
-            <a:lvl1pPr algn="r">
-              <a:defRPr sz="1200"/>
-            </a:lvl1pPr>
-          </a:lstStyle>
-          <a:p>
-            <a:fld id="{5282F153-3F37-0F45-9E97-73ACFA13230C}" type="datetimeFigureOut">
-              <a:rPr lang="en-US"/>
-              <a:t>7/23/19</a:t>
-            </a:fld>
-            <a:endParaRPr lang="en-US"/>
-          </a:p>
-        </p:txBody>
-      </p:sp>
-      <p:sp>
-        <p:nvSpPr>
-          <p:cNvPr id="4" name="Slide Image Placeholder 3"/>
-          <p:cNvSpPr>
-            <a:spLocks noGrp="1" noRot="1" noChangeAspect="1"/>
-          </p:cNvSpPr>
-          <p:nvPr>
-            <p:ph type="sldImg" idx="2"/>
-          </p:nvPr>
-        </p:nvSpPr>
-        <p:spPr>
-          <a:xfrm>
-            <a:off x="685800" y="1143000"/>
-            <a:ext cx="5486400" cy="3086100"/>
-          </a:xfrm>
-          <a:prstGeom prst="rect">
-            <a:avLst/>
-          </a:prstGeom>
-          <a:noFill/>
-          <a:ln w="12700">
-            <a:solidFill>
-              <a:prstClr val="black"/>
-            </a:solidFill>
-          </a:ln>
-        </p:spPr>
-        <p:txBody>
-          <a:bodyPr vert="horz" lIns="91440" tIns="45720" rIns="91440" bIns="45720" rtlCol="0" anchor="ctr"/>
-          <a:lstStyle/>
-          <a:p>
-            <a:endParaRPr lang="en-US"/>
-          </a:p>
-        </p:txBody>
-      </p:sp>
-      <p:sp>
-        <p:nvSpPr>
-          <p:cNvPr id="5" name="Notes Placeholder 4"/>
-          <p:cNvSpPr>
-            <a:spLocks noGrp="1"/>
-          </p:cNvSpPr>
-          <p:nvPr>
-            <p:ph type="body" sz="quarter" idx="3"/>
-          </p:nvPr>
-        </p:nvSpPr>
-        <p:spPr>
-          <a:xfrm>
-            <a:off x="685800" y="4400550"/>
-            <a:ext cx="5486400" cy="3600450"/>
-          </a:xfrm>
-          <a:prstGeom prst="rect">
-            <a:avLst/>
-          </a:prstGeom>
-        </p:spPr>
-        <p:txBody>
-          <a:bodyPr vert="horz" lIns="91440" tIns="45720" rIns="91440" bIns="45720" rtlCol="0"/>
-          <a:lstStyle/>
-          <a:p>
-            <a:pPr lvl="0"/>
-            <a:r>
-              <a:rPr lang="en-US"/>
-              <a:t>Click to edit Master text styles</a:t>
-            </a:r>
-          </a:p>
-          <a:p>
-            <a:pPr lvl="1"/>
-            <a:r>
-              <a:rPr lang="en-US"/>
-              <a:t>Second level</a:t>
-            </a:r>
-          </a:p>
-          <a:p>
-            <a:pPr lvl="2"/>
-            <a:r>
-              <a:rPr lang="en-US"/>
-              <a:t>Third level</a:t>
-            </a:r>
-          </a:p>
-          <a:p>
-            <a:pPr lvl="3"/>
-            <a:r>
-              <a:rPr lang="en-US"/>
-              <a:t>Fourth level</a:t>
-            </a:r>
-          </a:p>
-          <a:p>
-            <a:pPr lvl="4"/>
-            <a:r>
-              <a:rPr lang="en-US"/>
-              <a:t>Fifth level</a:t>
-            </a:r>
-          </a:p>
-        </p:txBody>
-      </p:sp>
-      <p:sp>
-        <p:nvSpPr>
-          <p:cNvPr id="6" name="Footer Placeholder 5"/>
-          <p:cNvSpPr>
-            <a:spLocks noGrp="1"/>
-          </p:cNvSpPr>
-          <p:nvPr>
-            <p:ph type="ftr" sz="quarter" idx="4"/>
-          </p:nvPr>
-        </p:nvSpPr>
-        <p:spPr>
-          <a:xfrm>
-            <a:off x="0" y="8685213"/>
-            <a:ext cx="2971800" cy="458787"/>
-          </a:xfrm>
-          <a:prstGeom prst="rect">
-            <a:avLst/>
-          </a:prstGeom>
-        </p:spPr>
-        <p:txBody>
-          <a:bodyPr vert="horz" lIns="91440" tIns="45720" rIns="91440" bIns="45720" rtlCol="0" anchor="b"/>
-          <a:lstStyle>
-            <a:lvl1pPr algn="l">
-              <a:defRPr sz="1200"/>
-            </a:lvl1pPr>
-          </a:lstStyle>
-          <a:p>
-            <a:endParaRPr lang="en-US"/>
-          </a:p>
-        </p:txBody>
-      </p:sp>
-      <p:sp>
-        <p:nvSpPr>
-          <p:cNvPr id="7" name="Slide Number Placeholder 6"/>
-          <p:cNvSpPr>
-            <a:spLocks noGrp="1"/>
-          </p:cNvSpPr>
-          <p:nvPr>
-            <p:ph type="sldNum" sz="quarter" idx="5"/>
-          </p:nvPr>
-        </p:nvSpPr>
-        <p:spPr>
-          <a:xfrm>
-            <a:off x="3884613" y="8685213"/>
-            <a:ext cx="2971800" cy="458787"/>
-          </a:xfrm>
-          <a:prstGeom prst="rect">
-            <a:avLst/>
-          </a:prstGeom>
-        </p:spPr>
-        <p:txBody>
-          <a:bodyPr vert="horz" lIns="91440" tIns="45720" rIns="91440" bIns="45720" rtlCol="0" anchor="b"/>
-          <a:lstStyle>
-            <a:lvl1pPr algn="r">
-              <a:defRPr sz="1200"/>
-            </a:lvl1pPr>
-          </a:lstStyle>
-          <a:p>
-            <a:fld id="{CE5E9CC1-C706-0F49-92D6-E571CC5EEA8F}" type="slidenum">
-              <a:rPr lang="en-US"/>
-              <a:t>‹#›</a:t>
-            </a:fld>
-            <a:endParaRPr lang="en-US"/>
-          </a:p>
-        </p:txBody>
-      </p:sp>
     </p:spTree>
     <p:extLst>
       <p:ext uri="{BB962C8B-B14F-4D97-AF65-F5344CB8AC3E}">
-        <p14:creationId xmlns:p14="http://schemas.microsoft.com/office/powerpoint/2010/main" val="1024086991"/>
+        <p14:creationId xmlns:p14="http://schemas.microsoft.com/office/powerpoint/2010/main" val="504659768"/>
       </p:ext>
     </p:extLst>
   </p:cSld>
@@ -582,9 +370,17 @@
           <a:p>
             <a:r>
               <a:rPr lang="en-US" dirty="0"/>
-              <a:t>§1 ONE SECOND (0:36). Let me start with one second. I was on a horse, in Egypt, at a full gallop, when a camel came over the dune straight at us. We had one second to react. Only one of us did. I think all of us are in a second like that right now. We're riding through the world we expected — and a different one is arriving, faster than we can read it. By the end of this I'm going to ask one thing of you. Something I'm still learning to do myself. But first — what happened on the horse.</a:t>
-            </a:r>
+              <a:t>Let me start with one second. I was on a horse, in Egypt, at a full gallop, when a camel came over the dune straight at us. We had one second to react, and only one of us did. </a:t>
+            </a:r>
+          </a:p>
+          <a:p>
             <a:endParaRPr lang="en-US" dirty="0"/>
+          </a:p>
+          <a:p>
+            <a:r>
+              <a:rPr lang="en-US" dirty="0"/>
+              <a:t>I think all of us are in a second like that right now. We're riding through the world we expected — and a different one is arriving, faster than we can read it. We’ll come back to that second. But first — what happened on the horse.</a:t>
+            </a:r>
           </a:p>
         </p:txBody>
       </p:sp>
@@ -670,9 +466,8 @@
           <a:p>
             <a:r>
               <a:rPr lang="en-US" dirty="0"/>
-              <a:t>§4. The Hebrew scriptures... The Greeks... Buddhist traditions... Confucian thought... Notice the similarity, even though these came from different continents, languages, and traditions. They share one structure: reality has an order; we have a place in it; wisdom means perceiving that reality more truly and acting in alignment with it. So here's a definition that captures those elements.</a:t>
-            </a:r>
-            <a:endParaRPr lang="en-US" dirty="0"/>
+              <a:t>§4. When I looked at dozens of other traditions, including ones from different continents, languages, and times, I noticed they share a similar structure: reality has an order; we have a place in it; wisdom means perceiving that reality truly and acting in alignment with it. So here's a definition that captures those elements.</a:t>
+            </a:r>
           </a:p>
         </p:txBody>
       </p:sp>
@@ -756,11 +551,120 @@
           <a:bodyPr/>
           <a:lstStyle/>
           <a:p>
+            <a:pPr marL="0" marR="0" lvl="0" indent="0" algn="l" defTabSz="914400" rtl="0" eaLnBrk="1" fontAlgn="auto" latinLnBrk="0" hangingPunct="1">
+              <a:lnSpc>
+                <a:spcPct val="100000"/>
+              </a:lnSpc>
+              <a:spcBef>
+                <a:spcPts val="0"/>
+              </a:spcBef>
+              <a:spcAft>
+                <a:spcPts val="0"/>
+              </a:spcAft>
+              <a:buClrTx/>
+              <a:buSzTx/>
+              <a:buFontTx/>
+              <a:buNone/>
+              <a:tabLst/>
+              <a:defRPr/>
+            </a:pPr>
             <a:r>
               <a:rPr lang="en-US" dirty="0"/>
-              <a:t>§4. Three things in that definition. First, faithful relationship. We don't merely exist in reality. We're in an active relationship with it: reality forms us, and we shape reality. For Christians, that's the first thing we know: God made reality, and made us, to be in relationship — to love him and be loved by him. Second, complete understanding. Perfect wisdom would require a perfect understanding of all of reality. But reality is too vast for any creature — made of cells or of silicon — to know all of it. There is one who does know all of reality: the Creator. Which is why only God has perfect wisdom. The rest of us do our best to understand reality as accurately and as whole as we can. Third, action. Wisdom isn't something you have in your head. It shows up in what you do. And Christians have never been vague about what we're here to do: we are stewards of every square inch of creation. That's the purpose our actions answer to. Wisdom is out of reach. A single wise action is not. That's why, on that dune in Egypt, neither my horse nor I possessed wisdom. But my horse acted wisely, because its understanding of reality was sufficient for its vital purpose — to keep us alive. And with that, we've arrived at the most important question of this talk: how do we come to understand reality, relate to it, and act more wisely over time?</a:t>
-            </a:r>
+              <a:t>§4. </a:t>
+            </a:r>
+            <a:r>
+              <a:rPr lang="en-US" sz="1200" dirty="0">
+                <a:solidFill>
+                  <a:schemeClr val="bg1"/>
+                </a:solidFill>
+              </a:rPr>
+              <a:t>is a </a:t>
+            </a:r>
+            <a:r>
+              <a:rPr lang="en-US" sz="1200" b="1" dirty="0">
+                <a:solidFill>
+                  <a:schemeClr val="accent2"/>
+                </a:solidFill>
+              </a:rPr>
+              <a:t>faithful relationship</a:t>
+            </a:r>
+            <a:r>
+              <a:rPr lang="en-US" sz="1200" dirty="0">
+                <a:solidFill>
+                  <a:schemeClr val="bg1"/>
+                </a:solidFill>
+              </a:rPr>
+              <a:t> with reality, achieved when we </a:t>
+            </a:r>
+            <a:r>
+              <a:rPr lang="en-US" sz="1200" b="1" dirty="0">
+                <a:solidFill>
+                  <a:schemeClr val="accent2"/>
+                </a:solidFill>
+              </a:rPr>
+              <a:t>understand it completely</a:t>
+            </a:r>
+            <a:r>
+              <a:rPr lang="en-US" sz="1200" dirty="0">
+                <a:solidFill>
+                  <a:schemeClr val="bg1"/>
+                </a:solidFill>
+              </a:rPr>
+              <a:t>, know our place within it, and </a:t>
+            </a:r>
+            <a:r>
+              <a:rPr lang="en-US" sz="1200" b="1" dirty="0">
+                <a:solidFill>
+                  <a:schemeClr val="accent2"/>
+                </a:solidFill>
+              </a:rPr>
+              <a:t>act</a:t>
+            </a:r>
+            <a:r>
+              <a:rPr lang="en-US" sz="1200" dirty="0">
+                <a:solidFill>
+                  <a:schemeClr val="bg1"/>
+                </a:solidFill>
+              </a:rPr>
+              <a:t> in alignment with it.</a:t>
+            </a:r>
+            <a:endParaRPr lang="en-US" sz="1200" dirty="0"/>
+          </a:p>
+          <a:p>
             <a:endParaRPr lang="en-US" dirty="0"/>
+          </a:p>
+          <a:p>
+            <a:r>
+              <a:rPr lang="en-US" dirty="0"/>
+              <a:t>Three things in that definition. First, is the faithful relationship. We don't merely exist in reality. We're in an active relationship with it: reality shapes us, even as we shape reality. Genesis is the beginning of this relationship, when God created reality, including us, to be in relationship — to love him and be loved by him. </a:t>
+            </a:r>
+          </a:p>
+          <a:p>
+            <a:endParaRPr lang="en-US" dirty="0"/>
+          </a:p>
+          <a:p>
+            <a:r>
+              <a:rPr lang="en-US" dirty="0"/>
+              <a:t>Second, complete understanding. Perfect wisdom, the kind which could produce perfect actions, would require complete and perfect understanding of all of reality. But reality is too vast for any agent to know all of it. There is one who does know all of reality: the Creator. Which is why only God has perfect wisdom. The rest of us do our best to understand reality and his will as accurately and completely as we can. </a:t>
+            </a:r>
+          </a:p>
+          <a:p>
+            <a:endParaRPr lang="en-US" dirty="0"/>
+          </a:p>
+          <a:p>
+            <a:r>
+              <a:rPr lang="en-US" dirty="0"/>
+              <a:t>Third, action. Wisdom is more than thinking. It shows up in what you do- purpose driven actions. </a:t>
+            </a:r>
+          </a:p>
+          <a:p>
+            <a:endParaRPr lang="en-US" dirty="0"/>
+          </a:p>
+          <a:p>
+            <a:r>
+              <a:rPr lang="en-US" dirty="0"/>
+              <a:t>To sum up. Wisdom is out of reach. A single wise action is not. That's why, on that dune in Egypt, neither my horse nor I possessed wisdom. But my horse acted wisely, because its understanding of reality was sufficient for its vital purpose — to keep us alive.     And with that, we've arrived at the most important question of this talk…</a:t>
+            </a:r>
           </a:p>
         </p:txBody>
       </p:sp>
@@ -805,7 +709,13 @@
   <p:cSld>
     <p:spTree>
       <p:nvGrpSpPr>
-        <p:cNvPr id="1" name=""/>
+        <p:cNvPr id="1" name="">
+          <a:extLst>
+            <a:ext uri="{FF2B5EF4-FFF2-40B4-BE49-F238E27FC236}">
+              <a16:creationId xmlns:a16="http://schemas.microsoft.com/office/drawing/2014/main" id="{1BAEEDEB-CB6E-2499-3976-2FF70FE2086E}"/>
+            </a:ext>
+          </a:extLst>
+        </p:cNvPr>
         <p:cNvGrpSpPr/>
         <p:nvPr/>
       </p:nvGrpSpPr>
@@ -819,7 +729,13 @@
       </p:grpSpPr>
       <p:sp>
         <p:nvSpPr>
-          <p:cNvPr id="2" name="Slide Image Placeholder 1"/>
+          <p:cNvPr id="2" name="Slide Image Placeholder 1">
+            <a:extLst>
+              <a:ext uri="{FF2B5EF4-FFF2-40B4-BE49-F238E27FC236}">
+                <a16:creationId xmlns:a16="http://schemas.microsoft.com/office/drawing/2014/main" id="{D93A01CF-8094-252E-AF7A-8B57E2EC28EE}"/>
+              </a:ext>
+            </a:extLst>
+          </p:cNvPr>
           <p:cNvSpPr>
             <a:spLocks noGrp="1" noRot="1" noChangeAspect="1"/>
           </p:cNvSpPr>
@@ -831,7 +747,13 @@
       </p:sp>
       <p:sp>
         <p:nvSpPr>
-          <p:cNvPr id="3" name="Notes Placeholder 2"/>
+          <p:cNvPr id="3" name="Notes Placeholder 2">
+            <a:extLst>
+              <a:ext uri="{FF2B5EF4-FFF2-40B4-BE49-F238E27FC236}">
+                <a16:creationId xmlns:a16="http://schemas.microsoft.com/office/drawing/2014/main" id="{CD2EC3E2-CC81-776E-872F-D0F2D4C80EDD}"/>
+              </a:ext>
+            </a:extLst>
+          </p:cNvPr>
           <p:cNvSpPr>
             <a:spLocks noGrp="1"/>
           </p:cNvSpPr>
@@ -846,15 +768,32 @@
           <a:p>
             <a:r>
               <a:rPr lang="en-US" dirty="0"/>
-              <a:t>§5 (section ends at 10:15). I'm going to answer that with the Wisdom Pyramid. Every agent in relationship with reality builds one — a person, a horse, a Waymo. Wisdom sits above the pyramid, like a North Star: out of reach, there to steer by. Reality is all that is. The whole world God made, visible and invisible, before time and through eternity. It's the foundation of every pyramid — including yours. But every pyramid, however grand, stands on a sliver of reality. That's why wisdom begins with humility.</a:t>
-            </a:r>
-            <a:endParaRPr lang="en-US" dirty="0"/>
-          </a:p>
-        </p:txBody>
-      </p:sp>
-      <p:sp>
-        <p:nvSpPr>
-          <p:cNvPr id="4" name="Slide Number Placeholder 3"/>
+              <a:t>How do we come to  understand reality, </a:t>
+            </a:r>
+          </a:p>
+          <a:p>
+            <a:r>
+              <a:rPr lang="en-US" dirty="0"/>
+              <a:t>relate to it, and </a:t>
+            </a:r>
+          </a:p>
+          <a:p>
+            <a:r>
+              <a:rPr lang="en-US" dirty="0"/>
+              <a:t>act more wisely over time?</a:t>
+            </a:r>
+          </a:p>
+        </p:txBody>
+      </p:sp>
+      <p:sp>
+        <p:nvSpPr>
+          <p:cNvPr id="4" name="Slide Number Placeholder 3">
+            <a:extLst>
+              <a:ext uri="{FF2B5EF4-FFF2-40B4-BE49-F238E27FC236}">
+                <a16:creationId xmlns:a16="http://schemas.microsoft.com/office/drawing/2014/main" id="{9A28D79D-4860-E8C4-20E8-F3F28FEFAB7E}"/>
+              </a:ext>
+            </a:extLst>
+          </p:cNvPr>
           <p:cNvSpPr>
             <a:spLocks noGrp="1"/>
           </p:cNvSpPr>
@@ -878,7 +817,7 @@
     </p:spTree>
     <p:extLst>
       <p:ext uri="{BB962C8B-B14F-4D97-AF65-F5344CB8AC3E}">
-        <p14:creationId xmlns:p14="http://schemas.microsoft.com/office/powerpoint/2010/main" val="1024086991"/>
+        <p14:creationId xmlns:p14="http://schemas.microsoft.com/office/powerpoint/2010/main" val="3127321240"/>
       </p:ext>
     </p:extLst>
   </p:cSld>
@@ -934,9 +873,14 @@
           <a:p>
             <a:r>
               <a:rPr lang="en-US" dirty="0"/>
-              <a:t>§5 Data. Data is the first layer: the pieces of reality you actually detect. For us, detection runs through a body — eyes, ears, skin, memory — and bodies miss more than we think. This room is full of data you aren't detecting right now: ultraviolet light, radio, the Wi-Fi carrying your email. Our senses weren't built to capture total truth. They were built to help us survive. So the Data layer fails quietly, by the blind spot. Not the thing you got wrong — the thing you never saw. AI builds its Data layer differently. Almost all of it is secondhand — human data, and increasingly data it generates for itself. At this layer AI is extraordinary — it has read more than any human could in a thousand lifetimes. But it has read more than any of us and seen less than any of us. Unless we give it eyes, as Waymo did, it knows the world only secondhand.</a:t>
-            </a:r>
-            <a:endParaRPr lang="en-US" dirty="0"/>
+              <a:t>§5 I'm going to answer that with the Wisdom Pyramid. Every agent builds one — a person, a horse, a Waymo. Wisdom sits above the pyramid, like a North Star: out of reach, there to steer by. </a:t>
+            </a:r>
+          </a:p>
+          <a:p>
+            <a:r>
+              <a:rPr lang="en-US" dirty="0"/>
+              <a:t>Reality is the foundation. It is all that is. The whole world God made, visible and invisible, before time and through eternity. It's the foundation of every pyramid — including yours. But every pyramid, however grand, stands on a sliver of reality. That's why the psalms says, the feat of the lord is the beginning of wisdom.</a:t>
+            </a:r>
           </a:p>
         </p:txBody>
       </p:sp>
@@ -1022,9 +966,14 @@
           <a:p>
             <a:r>
               <a:rPr lang="en-US" dirty="0"/>
-              <a:t>§5 Information. Information is the patterns made when data is connected — frames, stories you can use to act. We do this instantly; it's how I turned a dune into a movie scene. And it fails by the wrong story, told well. AI is a pattern machine; finding patterns in data is the thing it does best. It fails here the way we do, only faster and in better grammar: a fluent pattern unmoored from reality is what we call a hallucination.</a:t>
-            </a:r>
-            <a:endParaRPr lang="en-US" dirty="0"/>
+              <a:t>§5 Data is the pieces of reality you actually detect. For us, detection runs through a body — eyes, ears, skin, memory.  But bodies miss more than we think. This room is full of data you aren't detecting right now: ultraviolet light, radio waves, Wi-Fi. Our senses weren't built to capture total truth. They were built to help us survive. So the Data layer often crumbles quietly, because of blind spots – when you think you’re seeing most of reality, but you are not.  </a:t>
+            </a:r>
+          </a:p>
+          <a:p>
+            <a:r>
+              <a:rPr lang="en-US" dirty="0"/>
+              <a:t>Now, AI builds its Data layer differently, almost entirely using secondhand human data, BUT increasingly its generating for itself. At this layer AI is extraordinary — it has read more than any human could in a thousand lifetimes. But it has also experienced less physical reality than any of us. </a:t>
+            </a:r>
           </a:p>
         </p:txBody>
       </p:sp>
@@ -1110,9 +1059,8 @@
           <a:p>
             <a:r>
               <a:rPr lang="en-US" dirty="0"/>
-              <a:t>§5 Knowledge. Knowledge comes from connecting information. Where information improves the frame, knowledge improves the agent using the frame. It's the lessons of past patterns, carried into new situations. It holds a model of the world, and a model of yourself as a knower. We build it slowly — experience, feedback, the humbling work of being wrong. AI is climbing into this layer right now. The labs call it recursive self-improvement: AI helping build the next AI, faster each round. Its improvement is measured in months; ours in decades. That shift is the one everyone is nervous about. What it can't yet do is decide what better means.</a:t>
-            </a:r>
-            <a:endParaRPr lang="en-US" dirty="0"/>
+              <a:t>§5 Information. Information is the patterns made when data is connected — models, frames, stories you create so you can act. We do this instantly; it's how I turned a dune into a movie scene. It can fails when we create a story that sounds good, but doesn’t represent reality well or truthfully AI is an exceptional pattern making machine. It fails here the way we do, only faster using better grammar: we call it a hallucination, a story unmoored from reality.</a:t>
+            </a:r>
           </a:p>
         </p:txBody>
       </p:sp>
@@ -1198,9 +1146,8 @@
           <a:p>
             <a:r>
               <a:rPr lang="en-US" dirty="0"/>
-              <a:t>§5 Wise Living. Wise Living is where you decide what the whole pyramid is for: the meaning of your life, and the meaning in it. And you let the answer point you forward, toward something bigger than today. Look back at the definition: this is where your understanding of reality, and of your own place in it, becomes the purpose your actions answer to. And it's the layer AI doesn't build for itself. We hand it its purpose — a few words typed into a box — and, increasingly, it interprets what those words mean. That's what makes people nervous. But the purpose still starts with us. Right now, the summit of every AI pyramid is occupied by a human.</a:t>
-            </a:r>
-            <a:endParaRPr lang="en-US" dirty="0"/>
+              <a:t>§5 Knowledge. Knowledge comes from connecting information. While the information layer creates and  improves the story or frame, the knowledge layers improves the agent themselves. It is often called metacognition, learning how to learn and improve. It’s identifying lessons of past patterns, carried into new situations, Biological creatures build it slowly — experience, feedback, the humbling work of being. AI is climbing into this layer right now. The labs call it recursive self-improvement: AI helping build the next AI, faster each round. Its improvement is measured in months; ours in years or even generations. That is the situation – the second – we face right now.</a:t>
+            </a:r>
           </a:p>
         </p:txBody>
       </p:sp>
@@ -1284,11 +1231,39 @@
           <a:bodyPr/>
           <a:lstStyle/>
           <a:p>
+            <a:pPr marL="0" marR="0" lvl="0" indent="0" algn="l" defTabSz="914400" rtl="0" eaLnBrk="1" fontAlgn="auto" latinLnBrk="0" hangingPunct="1">
+              <a:lnSpc>
+                <a:spcPct val="100000"/>
+              </a:lnSpc>
+              <a:spcBef>
+                <a:spcPts val="0"/>
+              </a:spcBef>
+              <a:spcAft>
+                <a:spcPts val="0"/>
+              </a:spcAft>
+              <a:buClrTx/>
+              <a:buSzTx/>
+              <a:buFontTx/>
+              <a:buNone/>
+              <a:tabLst/>
+              <a:defRPr/>
+            </a:pPr>
             <a:r>
               <a:rPr lang="en-US" dirty="0"/>
-              <a:t>§5 close. Let's take a historical look at how machines have built their pyramid. For most of computing's history, they lived at the Data layer. Then they moved into Information — databases, search. Now they're in Knowledge, and improving themselves. One layer left. That's the second we're all in. And we have a choice about how to spend it. We can compete with these agents — or we can partner with them. Nobody can build your pyramid for you. But two pyramids built side by side see farther than one. So here is the question for the rest of this talk: how do we build truer pyramids — ours and theirs — together? That's partnership. And partnership forms us.</a:t>
-            </a:r>
-            <a:endParaRPr lang="en-US" dirty="0"/>
+              <a:t>§5 Wise Living. Wise Living harkens back to the definition of wisdom - </a:t>
+            </a:r>
+            <a:r>
+              <a:rPr lang="en-US" sz="1200" dirty="0">
+                <a:solidFill>
+                  <a:schemeClr val="tx1"/>
+                </a:solidFill>
+              </a:rPr>
+              <a:t>when an agent understands reality, decides its place and purpose in it, and acts in accordance. The agent’s understanding of reality is based on the size and quality of its pyramid, which is why each of those layers are so important. For humans, wise living includes examining </a:t>
+            </a:r>
+            <a:r>
+              <a:rPr lang="en-US" dirty="0"/>
+              <a:t>the meaning of your life, and the meaning in it. And letting the answers point you forward, toward something bigger than today, bigger than yourself. And it's the layer AI doesn’t YET build for itself. We hand it its purpose — a few words typed into a box — and, increasingly, were not sure what it will do after reading those words. That's what makes people nervous. But for the moment, the summit of every AI pyramid is occupied by a human – for better of worse.</a:t>
+            </a:r>
           </a:p>
         </p:txBody>
       </p:sp>
@@ -1374,12 +1349,16 @@
           <a:p>
             <a:r>
               <a:rPr lang="en-US" dirty="0"/>
-              <a:t>§6 (section ends at 12:36). Think about how anyone has ever become wiser. It happens when agents work and learn together, changing all parties for the better. A mentor and a mentee. An athlete and her coach. The coach and the team. That's what formation is: being shaped by the partnerships you're in. Formation doesn't just improve the action. It improves the agent.
-Christianity has always formed people this way — through partnerships. If you grew up Christian, you were formed by practices like prayer, song, communion, Sabbath. Those rituals reached your mind, your body, and your soul. Prayer is a partnership with God. Singing forms the singer, and the gathered voices form a place where everyone in the room can meet God. None of it could be done to you. You had to be in it. It shaped how you see yourself and the world, and that formation carries you today. Which means you already know something the labs are only beginning to learn: how an agent is formed, and what it costs when it's done badly.
-And here's the thing about any partnership: give too little and you miss the gift of the other. Give too much and you lose yourself.
-AI is now one of those partnerships — the newest, and at the layers below the summit, the strongest partner we've ever had. Which means it will form us. The only question is whether we're paying attention while it does.</a:t>
-            </a:r>
-            <a:endParaRPr lang="en-US" dirty="0"/>
+              <a:t>§5 Do you remember, a long </a:t>
+            </a:r>
+            <a:r>
+              <a:rPr lang="en-US" dirty="0" err="1"/>
+              <a:t>long</a:t>
+            </a:r>
+            <a:r>
+              <a:rPr lang="en-US" dirty="0"/>
+              <a:t> time ago, when computers only lived at the Data layer. Back then few of us dreamt that they’d every create Knowledge. But here they are, with one layer, left working alongside us. We talk about this moment as if we need to control or compete with these agents — but what if instead we truly embraced partnership with them – like I did by riding a horse through the desert. Because two pyramids built side by side touch more or reality than one alone. So here is the question for the rest of this talk: how do we build truer pyramids — ours and theirs — together? That's partnership. And there is something unique about partnerships – relationships - they forms us.</a:t>
+            </a:r>
           </a:p>
         </p:txBody>
       </p:sp>
@@ -1465,9 +1444,29 @@
           <a:p>
             <a:r>
               <a:rPr lang="en-US" dirty="0"/>
-              <a:t>§6 close. And the forming runs both ways. We are shaping these systems too, and it matters how the people doing it think about what they're shaping. Amanda Askell, the philosopher who leads Claude's character work at Anthropic, talks about Claude less like a product and more like a person in formation. She has compared it to a genius six-year-old, and to a well-liked traveler whose good character is recognized wherever it goes: enormous knowledge, very little lived experience, in need of formation, not just instruction. The constitution she led puts it this way: 'Just as humans develop their characters via nature and their environment and experiences, Claude's character emerged through its nature and its training process.' What they're after isn't rule-following. It's what they call 'ethical practice' — knowing how to act well in the situation in front of you. And they hope that 'where Claude sees further and more truly than we do, it can help us see better, too.' That's formation. That's partnership. Which means the question I'm about to ask you is the same one they're asking: what kind of agent is this partnership forming?</a:t>
-            </a:r>
+              <a:t>§6 Think about how anyone has ever become wiser. It happens when agents work and learn together. A mentor and a mentee. An athlete and her coach. Two friends with a glass of wine. These kinds of partnership take place in classes, families, and congregations. AI is now partnering with us, and it’s one of the strongest we've ever had. Which means it will form us. 
+Our Christian faith is an amazing formation ecosystem, filled with practices designed to form a good agent who will choose good actions over and over. If you grew up as a Christian, you were quietly formed through practices like prayer, song, communion, Sabbath, in partnership with those around you. None of it could be done to you. You had to be in it, and that helped you see yourself and the world. </a:t>
+            </a:r>
+          </a:p>
+          <a:p>
             <a:endParaRPr lang="en-US" dirty="0"/>
+          </a:p>
+          <a:p>
+            <a:r>
+              <a:rPr lang="en-US" dirty="0"/>
+              <a:t>Which – and I want you to hear this - means you already experienced something the AI labs are only beginning to consider: how an agent is formed, and what it costs when it's done badly.</a:t>
+            </a:r>
+            <a:br>
+              <a:rPr lang="en-US" dirty="0"/>
+            </a:br>
+            <a:endParaRPr lang="en-US" dirty="0"/>
+          </a:p>
+          <a:p>
+            <a:r>
+              <a:rPr lang="en-US" dirty="0"/>
+              <a:t>
+</a:t>
+            </a:r>
           </a:p>
         </p:txBody>
       </p:sp>
@@ -1553,9 +1552,8 @@
           <a:p>
             <a:r>
               <a:rPr lang="en-US" dirty="0"/>
-              <a:t>§2 (running total 2:09 at the end of this section). So. Egypt. When I was here at Calvin I spent a semester overseas, and it included a trip to Egypt — and if you're wondering how long ago this was, look no further than my cringe-worthy permed hair.</a:t>
-            </a:r>
-            <a:endParaRPr lang="en-US" dirty="0"/>
+              <a:t>So. Egypt. When I was here at Calvin I spent a semester overseas, with my friend who is here today – Elaine - and it included a trip to Egypt — and if you're wondering how long ago this was, look no further than my cringe-worthy permed hair.</a:t>
+            </a:r>
           </a:p>
         </p:txBody>
       </p:sp>
@@ -1641,9 +1639,8 @@
           <a:p>
             <a:r>
               <a:rPr lang="en-US" dirty="0"/>
-              <a:t>§7 (12:52). So here's the one thing. Don't only ask what AI is doing to you. You know how formation works. Bring that to your own partnership with AI — and to the question of how we form AI itself. Start with the one place you use AI every day.</a:t>
-            </a:r>
-            <a:endParaRPr lang="en-US" dirty="0"/>
+              <a:t>§6 . Now hold on to that thought as I tell you about Amanda Askell, the philosopher who leads Claude's character work at Anthropic. She talks about Claude less like a product and more like a person in formation. She has compared it to a genius six-year-old, who has enormous knowledge, but very little lived experience, and therefore in need of formation, not just instruction. She puts it this way: 'Just as humans develop their characters via nature and their environment and experiences, Claude's character emerged through its nature and its training process.’ So their training process, which is different from the other companies, isn't rule-following. It's what they call 'ethical practice' — knowing how to act well in the situation in front of you. Amanda wants Claude to act like a well-liked traveler whose good character is recognized wherever it goes. She’s hopefully this well-like traveler will be able to use its computing power to help us  - to partner with us – to understand reality better than we do. That's formation. Which means the question I'm about to ask you is the same one they're asking: what kind of agent is this partnership forming?</a:t>
+            </a:r>
           </a:p>
         </p:txBody>
       </p:sp>
@@ -1727,11 +1724,96 @@
           <a:bodyPr/>
           <a:lstStyle/>
           <a:p>
-            <a:r>
-              <a:rPr lang="en-US" dirty="0"/>
-              <a:t>§8 (ends 14:37). Let me end with my own partnership. For the last four years I've been working with AI while writing a book on wisdom. The partnership has been remarkable, and recently I let it do more of the editing. Last month I read a printed copy of my first five chapters and was stunned: it didn't sound like me. So much so that I threw the chapters away. My own autopsy found no one at fault. We simply hadn't worked out the best way to partner. So we're starting again, with one rule: I'm the only one who writes. And I'm standing here in my own voice.</a:t>
-            </a:r>
-            <a:endParaRPr lang="en-US" dirty="0"/>
+            <a:pPr marL="0" indent="0">
+              <a:buNone/>
+            </a:pPr>
+            <a:r>
+              <a:rPr lang="en-US" sz="1200" b="1" dirty="0">
+                <a:solidFill>
+                  <a:schemeClr val="accent1"/>
+                </a:solidFill>
+              </a:rPr>
+              <a:t>Since you know how formation works, ask yourself…</a:t>
+            </a:r>
+          </a:p>
+          <a:p>
+            <a:pPr marL="0" indent="0">
+              <a:buNone/>
+            </a:pPr>
+            <a:endParaRPr lang="en-US" sz="1200" b="1" dirty="0">
+              <a:solidFill>
+                <a:schemeClr val="accent1"/>
+              </a:solidFill>
+            </a:endParaRPr>
+          </a:p>
+          <a:p>
+            <a:pPr marL="0" indent="0">
+              <a:buNone/>
+            </a:pPr>
+            <a:r>
+              <a:rPr lang="en-US" sz="1200" dirty="0">
+                <a:solidFill>
+                  <a:schemeClr val="tx1"/>
+                </a:solidFill>
+              </a:rPr>
+              <a:t>How would I characterize my partnership with </a:t>
+            </a:r>
+            <a:r>
+              <a:rPr lang="en-US" sz="1200" dirty="0"/>
+              <a:t>AI? </a:t>
+            </a:r>
+          </a:p>
+          <a:p>
+            <a:pPr marL="0" indent="0">
+              <a:buNone/>
+            </a:pPr>
+            <a:r>
+              <a:rPr lang="en-US" sz="1200" dirty="0">
+                <a:solidFill>
+                  <a:schemeClr val="tx1"/>
+                </a:solidFill>
+              </a:rPr>
+              <a:t>What practices do I use to guide our work together?</a:t>
+            </a:r>
+          </a:p>
+          <a:p>
+            <a:pPr marL="0" indent="0">
+              <a:buNone/>
+            </a:pPr>
+            <a:endParaRPr lang="en-US" sz="1200" dirty="0"/>
+          </a:p>
+          <a:p>
+            <a:pPr marL="0" marR="0" lvl="0" indent="0" algn="l" defTabSz="914400" rtl="0" eaLnBrk="1" fontAlgn="auto" latinLnBrk="0" hangingPunct="1">
+              <a:lnSpc>
+                <a:spcPct val="100000"/>
+              </a:lnSpc>
+              <a:spcBef>
+                <a:spcPts val="0"/>
+              </a:spcBef>
+              <a:spcAft>
+                <a:spcPts val="0"/>
+              </a:spcAft>
+              <a:buClrTx/>
+              <a:buSzTx/>
+              <a:buFontTx/>
+              <a:buNone/>
+              <a:tabLst/>
+              <a:defRPr/>
+            </a:pPr>
+            <a:r>
+              <a:rPr lang="en-US" sz="1200" dirty="0"/>
+              <a:t>And here’s a metacognitive question: </a:t>
+            </a:r>
+            <a:r>
+              <a:rPr lang="en-US" sz="1200" b="1" dirty="0"/>
+              <a:t>What does your answers say about YOU and your formation?</a:t>
+            </a:r>
+          </a:p>
+          <a:p>
+            <a:pPr marL="0" indent="0">
+              <a:buNone/>
+            </a:pPr>
+            <a:endParaRPr lang="en-US" sz="1200" dirty="0"/>
           </a:p>
         </p:txBody>
       </p:sp>
@@ -1817,9 +1899,16 @@
           <a:p>
             <a:r>
               <a:rPr lang="en-US" dirty="0"/>
-              <a:t>§8. Here's what a repaired partnership can do. My mom died of Alzheimer's. So I notice every name I can't retrieve, every face I know but can't place. Not long ago, while I was writing this talk, I admitted that fear to Claude — mostly to remind myself that I now have partners that can carry me where I'm weak. And it said: 'I carry the desert so you don't have to hold the whole thing in your head. You stand at the summit and do the one job no one else can do — be the person the wisdom is for.' Kuyper said there's not one square inch of creation that Christ doesn't claim. That includes our code. And the quiet moment when each of us decides what kind of person we're becoming with the tools in our hands. That is stewardship. So let AI help carry the desert. But don't vacate the summit. Become the kind of person who can notice what matters, love what is good, and act wisely when reality changes beneath your feet.</a:t>
-            </a:r>
-            <a:endParaRPr lang="en-US" dirty="0"/>
+              <a:t>Let me end with my own partnership. For the last four years I've been working with AI while writing a book on wisdom. The partnership has been remarkable, and this year I let Claude </a:t>
+            </a:r>
+            <a:r>
+              <a:rPr lang="en-US" dirty="0" err="1"/>
+              <a:t>Cowork</a:t>
+            </a:r>
+            <a:r>
+              <a:rPr lang="en-US" dirty="0"/>
+              <a:t> do more of the editing. Then last month I read a printed copy of my first five chapters and was stunned: it didn't sound like me, and in fact it was so bad in fact I decided to start over, from scratch. My own autopsy found no one at fault. We simply hadn't worked out the best way to partner. So we're starting again, with one rule: I'm the only one who writes. And I'm standing here in my own voice.</a:t>
+            </a:r>
           </a:p>
         </p:txBody>
       </p:sp>
@@ -1850,6 +1939,299 @@
     <p:extLst>
       <p:ext uri="{BB962C8B-B14F-4D97-AF65-F5344CB8AC3E}">
         <p14:creationId xmlns:p14="http://schemas.microsoft.com/office/powerpoint/2010/main" val="1024086991"/>
+      </p:ext>
+    </p:extLst>
+  </p:cSld>
+  <p:clrMapOvr>
+    <a:masterClrMapping/>
+  </p:clrMapOvr>
+</p:notes>
+</file>
+
+<file path=ppt/notesSlides/notesSlide23.xml><?xml version="1.0" encoding="utf-8"?>
+<p:notes xmlns:a="http://schemas.openxmlformats.org/drawingml/2006/main" xmlns:r="http://schemas.openxmlformats.org/officeDocument/2006/relationships" xmlns:p="http://schemas.openxmlformats.org/presentationml/2006/main">
+  <p:cSld>
+    <p:spTree>
+      <p:nvGrpSpPr>
+        <p:cNvPr id="1" name=""/>
+        <p:cNvGrpSpPr/>
+        <p:nvPr/>
+      </p:nvGrpSpPr>
+      <p:grpSpPr>
+        <a:xfrm>
+          <a:off x="0" y="0"/>
+          <a:ext cx="0" cy="0"/>
+          <a:chOff x="0" y="0"/>
+          <a:chExt cx="0" cy="0"/>
+        </a:xfrm>
+      </p:grpSpPr>
+      <p:sp>
+        <p:nvSpPr>
+          <p:cNvPr id="2" name="Slide Image Placeholder 1"/>
+          <p:cNvSpPr>
+            <a:spLocks noGrp="1" noRot="1" noChangeAspect="1"/>
+          </p:cNvSpPr>
+          <p:nvPr>
+            <p:ph type="sldImg"/>
+          </p:nvPr>
+        </p:nvSpPr>
+        <p:spPr/>
+      </p:sp>
+      <p:sp>
+        <p:nvSpPr>
+          <p:cNvPr id="3" name="Notes Placeholder 2"/>
+          <p:cNvSpPr>
+            <a:spLocks noGrp="1"/>
+          </p:cNvSpPr>
+          <p:nvPr>
+            <p:ph type="body" idx="1"/>
+          </p:nvPr>
+        </p:nvSpPr>
+        <p:spPr/>
+        <p:txBody>
+          <a:bodyPr/>
+          <a:lstStyle/>
+          <a:p>
+            <a:r>
+              <a:rPr lang="en-US" dirty="0"/>
+              <a:t>§8. Here's what a good partnership can do. My mom died of Alzheimer's. So I notice every word I can't retrieve, every face I can't place. Not long ago, while I was writing this talk, I admitted that fear to Claude, and it said something that brought tears to my eyes: 'I carry the desert so you don't have to hold the whole thing in your head. You stand at the summit and do the one job no one else can do — be the person the wisdom is for.’ </a:t>
+            </a:r>
+          </a:p>
+          <a:p>
+            <a:endParaRPr lang="en-US" dirty="0"/>
+          </a:p>
+          <a:p>
+            <a:r>
+              <a:rPr lang="en-US" dirty="0"/>
+              <a:t>Kuyper said there's not one square inch of creation that Christ doesn't claim. That includes our code. And the quiet moment when each of us decides what kind of person we're becoming with the tools in our hands. That is stewardship. So let AI help carry the desert. But don't vacate the summit. Become the kind of person who can notice what matters, love what is good, and act wisely when reality changes beneath your feet.</a:t>
+            </a:r>
+          </a:p>
+        </p:txBody>
+      </p:sp>
+      <p:sp>
+        <p:nvSpPr>
+          <p:cNvPr id="4" name="Slide Number Placeholder 3"/>
+          <p:cNvSpPr>
+            <a:spLocks noGrp="1"/>
+          </p:cNvSpPr>
+          <p:nvPr>
+            <p:ph type="sldNum" sz="quarter" idx="10"/>
+          </p:nvPr>
+        </p:nvSpPr>
+        <p:spPr/>
+        <p:txBody>
+          <a:bodyPr/>
+          <a:lstStyle/>
+          <a:p>
+            <a:fld id="{F7021451-1387-4CA6-816F-3879F97B5CBC}" type="slidenum">
+              <a:rPr lang="en-US"/>
+              <a:t>23</a:t>
+            </a:fld>
+            <a:endParaRPr lang="en-US"/>
+          </a:p>
+        </p:txBody>
+      </p:sp>
+    </p:spTree>
+    <p:extLst>
+      <p:ext uri="{BB962C8B-B14F-4D97-AF65-F5344CB8AC3E}">
+        <p14:creationId xmlns:p14="http://schemas.microsoft.com/office/powerpoint/2010/main" val="1024086991"/>
+      </p:ext>
+    </p:extLst>
+  </p:cSld>
+  <p:clrMapOvr>
+    <a:masterClrMapping/>
+  </p:clrMapOvr>
+</p:notes>
+</file>
+
+<file path=ppt/notesSlides/notesSlide24.xml><?xml version="1.0" encoding="utf-8"?>
+<p:notes xmlns:a="http://schemas.openxmlformats.org/drawingml/2006/main" xmlns:r="http://schemas.openxmlformats.org/officeDocument/2006/relationships" xmlns:p="http://schemas.openxmlformats.org/presentationml/2006/main">
+  <p:cSld>
+    <p:spTree>
+      <p:nvGrpSpPr>
+        <p:cNvPr id="1" name="">
+          <a:extLst>
+            <a:ext uri="{FF2B5EF4-FFF2-40B4-BE49-F238E27FC236}">
+              <a16:creationId xmlns:a16="http://schemas.microsoft.com/office/drawing/2014/main" id="{3A735673-6171-BB00-FA2B-2153DDCAD84A}"/>
+            </a:ext>
+          </a:extLst>
+        </p:cNvPr>
+        <p:cNvGrpSpPr/>
+        <p:nvPr/>
+      </p:nvGrpSpPr>
+      <p:grpSpPr>
+        <a:xfrm>
+          <a:off x="0" y="0"/>
+          <a:ext cx="0" cy="0"/>
+          <a:chOff x="0" y="0"/>
+          <a:chExt cx="0" cy="0"/>
+        </a:xfrm>
+      </p:grpSpPr>
+      <p:sp>
+        <p:nvSpPr>
+          <p:cNvPr id="2" name="Slide Image Placeholder 1">
+            <a:extLst>
+              <a:ext uri="{FF2B5EF4-FFF2-40B4-BE49-F238E27FC236}">
+                <a16:creationId xmlns:a16="http://schemas.microsoft.com/office/drawing/2014/main" id="{3C3C8BAA-198E-D60D-C6C9-A3F63E232D39}"/>
+              </a:ext>
+            </a:extLst>
+          </p:cNvPr>
+          <p:cNvSpPr>
+            <a:spLocks noGrp="1" noRot="1" noChangeAspect="1"/>
+          </p:cNvSpPr>
+          <p:nvPr>
+            <p:ph type="sldImg"/>
+          </p:nvPr>
+        </p:nvSpPr>
+        <p:spPr/>
+      </p:sp>
+      <p:sp>
+        <p:nvSpPr>
+          <p:cNvPr id="3" name="Notes Placeholder 2">
+            <a:extLst>
+              <a:ext uri="{FF2B5EF4-FFF2-40B4-BE49-F238E27FC236}">
+                <a16:creationId xmlns:a16="http://schemas.microsoft.com/office/drawing/2014/main" id="{F67ADC78-DA03-01E5-3215-6641D30ACF21}"/>
+              </a:ext>
+            </a:extLst>
+          </p:cNvPr>
+          <p:cNvSpPr>
+            <a:spLocks noGrp="1"/>
+          </p:cNvSpPr>
+          <p:nvPr>
+            <p:ph type="body" idx="1"/>
+          </p:nvPr>
+        </p:nvSpPr>
+        <p:spPr/>
+        <p:txBody>
+          <a:bodyPr/>
+          <a:lstStyle/>
+          <a:p>
+            <a:pPr marL="0" indent="0">
+              <a:buNone/>
+            </a:pPr>
+            <a:r>
+              <a:rPr lang="en-US" sz="1200" b="1" dirty="0">
+                <a:solidFill>
+                  <a:schemeClr val="accent1"/>
+                </a:solidFill>
+              </a:rPr>
+              <a:t>Since you know how formation works, ask yourself…</a:t>
+            </a:r>
+          </a:p>
+          <a:p>
+            <a:pPr marL="0" indent="0">
+              <a:buNone/>
+            </a:pPr>
+            <a:endParaRPr lang="en-US" sz="1200" b="1" dirty="0">
+              <a:solidFill>
+                <a:schemeClr val="accent1"/>
+              </a:solidFill>
+            </a:endParaRPr>
+          </a:p>
+          <a:p>
+            <a:pPr marL="0" indent="0">
+              <a:buNone/>
+            </a:pPr>
+            <a:r>
+              <a:rPr lang="en-US" sz="1200" dirty="0">
+                <a:solidFill>
+                  <a:schemeClr val="tx1"/>
+                </a:solidFill>
+              </a:rPr>
+              <a:t>How would I characterize my partnership with </a:t>
+            </a:r>
+            <a:r>
+              <a:rPr lang="en-US" sz="1200" dirty="0"/>
+              <a:t>AI? </a:t>
+            </a:r>
+          </a:p>
+          <a:p>
+            <a:pPr marL="0" indent="0">
+              <a:buNone/>
+            </a:pPr>
+            <a:r>
+              <a:rPr lang="en-US" sz="1200" dirty="0">
+                <a:solidFill>
+                  <a:schemeClr val="tx1"/>
+                </a:solidFill>
+              </a:rPr>
+              <a:t>What practices do I use to guide our work together?</a:t>
+            </a:r>
+          </a:p>
+          <a:p>
+            <a:pPr marL="0" indent="0">
+              <a:buNone/>
+            </a:pPr>
+            <a:endParaRPr lang="en-US" sz="1200" dirty="0"/>
+          </a:p>
+          <a:p>
+            <a:pPr marL="0" marR="0" lvl="0" indent="0" algn="l" defTabSz="914400" rtl="0" eaLnBrk="1" fontAlgn="auto" latinLnBrk="0" hangingPunct="1">
+              <a:lnSpc>
+                <a:spcPct val="100000"/>
+              </a:lnSpc>
+              <a:spcBef>
+                <a:spcPts val="0"/>
+              </a:spcBef>
+              <a:spcAft>
+                <a:spcPts val="0"/>
+              </a:spcAft>
+              <a:buClrTx/>
+              <a:buSzTx/>
+              <a:buFontTx/>
+              <a:buNone/>
+              <a:tabLst/>
+              <a:defRPr/>
+            </a:pPr>
+            <a:r>
+              <a:rPr lang="en-US" sz="1200" dirty="0"/>
+              <a:t>And here’s a metacognitive question: </a:t>
+            </a:r>
+            <a:r>
+              <a:rPr lang="en-US" sz="1200" b="1" dirty="0"/>
+              <a:t>What does your answers say about YOU and your formation?</a:t>
+            </a:r>
+          </a:p>
+          <a:p>
+            <a:pPr marL="0" indent="0">
+              <a:buNone/>
+            </a:pPr>
+            <a:endParaRPr lang="en-US" sz="1200" dirty="0"/>
+          </a:p>
+        </p:txBody>
+      </p:sp>
+      <p:sp>
+        <p:nvSpPr>
+          <p:cNvPr id="4" name="Slide Number Placeholder 3">
+            <a:extLst>
+              <a:ext uri="{FF2B5EF4-FFF2-40B4-BE49-F238E27FC236}">
+                <a16:creationId xmlns:a16="http://schemas.microsoft.com/office/drawing/2014/main" id="{E7BA8E3C-3F59-977B-62E5-B1CB17F6B00F}"/>
+              </a:ext>
+            </a:extLst>
+          </p:cNvPr>
+          <p:cNvSpPr>
+            <a:spLocks noGrp="1"/>
+          </p:cNvSpPr>
+          <p:nvPr>
+            <p:ph type="sldNum" sz="quarter" idx="10"/>
+          </p:nvPr>
+        </p:nvSpPr>
+        <p:spPr/>
+        <p:txBody>
+          <a:bodyPr/>
+          <a:lstStyle/>
+          <a:p>
+            <a:fld id="{F7021451-1387-4CA6-816F-3879F97B5CBC}" type="slidenum">
+              <a:rPr lang="en-US"/>
+              <a:t>24</a:t>
+            </a:fld>
+            <a:endParaRPr lang="en-US"/>
+          </a:p>
+        </p:txBody>
+      </p:sp>
+    </p:spTree>
+    <p:extLst>
+      <p:ext uri="{BB962C8B-B14F-4D97-AF65-F5344CB8AC3E}">
+        <p14:creationId xmlns:p14="http://schemas.microsoft.com/office/powerpoint/2010/main" val="2969494041"/>
       </p:ext>
     </p:extLst>
   </p:cSld>
@@ -1907,7 +2289,6 @@
               <a:rPr lang="en-US" dirty="0"/>
               <a:t>§2. On a sunny November day we rode across the desert on camels and horses, between the Great Pyramids of Giza and the Step Pyramid of Djoser. [Click: me and the guide.]</a:t>
             </a:r>
-            <a:endParaRPr lang="en-US" dirty="0"/>
           </a:p>
         </p:txBody>
       </p:sp>
@@ -1993,9 +2374,16 @@
           <a:p>
             <a:r>
               <a:rPr lang="en-US" dirty="0"/>
-              <a:t>§2. Our guide asked if we wanted to gallop. I had never really ridden a horse. So, of course, I yelled, 'Yes.' My horse took off at a speed that sent the wind whipping through my curly permed hair like a scene from a very bad movie. And for a few glorious seconds, I felt nothing but awe. The desert was vast, the pyramids ahead, the whole world open. [Click: the camels.]</a:t>
-            </a:r>
-            <a:endParaRPr lang="en-US" dirty="0"/>
+              <a:t>§2. Our guide asked if we wanted to gallop. I had never ridden a horse, so of course I said, “yah, let’s go!”. My horse took off at a speed that sent the wind whipping through that hair like a scene from a bad movie. And for a few glorious seconds, I felt nothing but awe. I was in a vast desert, seeing ancient </a:t>
+            </a:r>
+            <a:r>
+              <a:rPr lang="en-US" dirty="0" err="1"/>
+              <a:t>pyramids,with</a:t>
+            </a:r>
+            <a:r>
+              <a:rPr lang="en-US" dirty="0"/>
+              <a:t> friends. An experience hard to capture with words.  [Click: the camels.]</a:t>
+            </a:r>
           </a:p>
         </p:txBody>
       </p:sp>
@@ -2081,9 +2469,8 @@
           <a:p>
             <a:r>
               <a:rPr lang="en-US" dirty="0"/>
-              <a:t>§2. Then we crested a dune — and suddenly, seemingly out of nowhere, another group appeared on camels, heading directly toward us. My horse reacted instantly. It veered hard to the right, saving us both from a collision. And at the very same moment, in an astounding display of situational blindness, I did not move at all. Momentum launched me effortlessly out of the saddle, head over heels, into the sand. I did not stick the landing. Thankfully I got up laughing, covered in sand, grateful to be alive. [Click to the dark slide for the last two lines.]</a:t>
-            </a:r>
-            <a:endParaRPr lang="en-US" dirty="0"/>
+              <a:t>§2. Then we crested a dune — and suddenly, out of nowhere, a group of camels appeared, heading directly toward us. My horse reacted instantly. It veered hard to the right, saving us both from a collision. And at the very same moment, in an astounding display of situational blindness, I did not move at all. Allowing momentum to launch me effortlessly out of the saddle, head over heels, into the sand. Where I did not stick the landing. Thankfully I got up laughing, covered in sand, grateful to be alive. [Click to the dark slide for the last two lines.]</a:t>
+            </a:r>
           </a:p>
         </p:txBody>
       </p:sp>
@@ -2169,9 +2556,8 @@
           <a:p>
             <a:r>
               <a:rPr lang="en-US" dirty="0"/>
-              <a:t>§2 ending. Only later did I understand what had happened: my horse was already responding to the world that had arrived. I was still riding through the world I expected. [Click.]</a:t>
-            </a:r>
-            <a:endParaRPr lang="en-US" dirty="0"/>
+              <a:t>§2 . Only later could put these words to what had happened: my horse had responding to the world that had arrived. I was still riding through the world I expected. [Click.]</a:t>
+            </a:r>
           </a:p>
         </p:txBody>
       </p:sp>
@@ -2257,9 +2643,41 @@
           <a:p>
             <a:r>
               <a:rPr lang="en-US" dirty="0"/>
-              <a:t>§3 THE TURN (section ends 3:50). We were in the same desert, on the same dune, in the same second. But we were seeing very different aspects of reality. I was noticing pyramids, wind, sand, and bad hair. My horse was noticing other details of our situation: camel, collision, danger, move. And we acted differently based on what we noticed. So let me ask you something. Which one of us acted more wisely? I would say, my horse. I'm not claiming the horse had wisdom — I want to be careful there. But its action was wiser than mine. It perceived what mattered for the purpose at hand — getting us across that desert in one piece — and it acted. Now let me ask you a similar question. Suppose I hadn't been on a horse. Suppose I'd been in a Waymo, and the car braked hard to keep me out of a collision. Would you say the car acted wisely? PAUSE. Do not answer it. Notice what just happened in your head. Did it matter that one of them was an animal and the other was a machine? That one had a biological brain, and the other a silicon chip? [Click.]</a:t>
-            </a:r>
+              <a:t>We were in the same desert, on the same dune, in the same second. But we were seeing very different aspects of reality. I was noticing pyramids, friends, and bad hair. My horse was noticing  camel, collision, danger. And based on what we noticed, we acted very differently. </a:t>
+            </a:r>
+          </a:p>
+          <a:p>
             <a:endParaRPr lang="en-US" dirty="0"/>
+          </a:p>
+          <a:p>
+            <a:r>
+              <a:rPr lang="en-US" dirty="0"/>
+              <a:t>So let me ask you something. Which one of us acted more wisely? I would say, my horse. I'm not claiming the horse had wisdom — I want to be careful there. But I think its action was wiser than mine. It perceived what mattered for the purpose at hand — getting us across that desert in one piece — and it acted. </a:t>
+            </a:r>
+          </a:p>
+          <a:p>
+            <a:endParaRPr lang="en-US" dirty="0"/>
+          </a:p>
+          <a:p>
+            <a:r>
+              <a:rPr lang="en-US" dirty="0"/>
+              <a:t>Now let me ask you a similar question. Suppose I hadn't been on a horse. Suppose I'd been in a Waymo, and the car braked hard to keep me out of a collision. Would you say the car acted wisely?</a:t>
+            </a:r>
+          </a:p>
+          <a:p>
+            <a:r>
+              <a:rPr lang="en-US" dirty="0"/>
+              <a:t>Notice what just happened in your head. Did you think differently because the agent was a machine rather than an animal? Does it matter that one was biological brain, and the other a silicon chip? </a:t>
+            </a:r>
+          </a:p>
+          <a:p>
+            <a:endParaRPr lang="en-US" dirty="0"/>
+          </a:p>
+          <a:p>
+            <a:r>
+              <a:rPr lang="en-US" dirty="0"/>
+              <a:t>That distinction is part of why we're here today, at a conference called Wisdom in the Age of AI. We usually think of wisdom as a human trait. But what if wisdom describes how an agent — human, animal, or machine — relates to reality? Then we get a better question. </a:t>
+            </a:r>
           </a:p>
         </p:txBody>
       </p:sp>
@@ -2345,9 +2763,8 @@
           <a:p>
             <a:r>
               <a:rPr lang="en-US" dirty="0"/>
-              <a:t>§3 close. That distinction is part of why we're here today, at a conference called Wisdom in the Age of AI. We usually think of wisdom as a human trait. But what if wisdom describes how an agent — any agent, human or machine — relates to reality? Then we get a better question. Not can a machine be wise? but what does it take for any agent to act wisely? To answer that, we'll start with a definition of wisdom, seen through the eyes of ancient traditions.</a:t>
-            </a:r>
-            <a:endParaRPr lang="en-US" dirty="0"/>
+              <a:t>Not can a machine be wise? but what does it take for any agent to act wisely? To answer that, we'll start with a definition of wisdom, seen through the eyes of ancient traditions.</a:t>
+            </a:r>
           </a:p>
         </p:txBody>
       </p:sp>
@@ -2433,9 +2850,8 @@
           <a:p>
             <a:r>
               <a:rPr lang="en-US" dirty="0"/>
-              <a:t>§4 (section ends at 6:13). One of the oldest recorded ideas of wisdom is Egyptian. They called it Ma'at: the order woven into the world at its making, the way things are meant to fit together. To live wisely was to live in alignment with the order of things.</a:t>
-            </a:r>
-            <a:endParaRPr lang="en-US" dirty="0"/>
+              <a:t>§4 One of the oldest recorded ideas of wisdom is Egyptian. They called it Ma'at: the order woven into the world at its making, the way things are meant to fit together. To live wisely was to live in alignment with the order of things.</a:t>
+            </a:r>
           </a:p>
         </p:txBody>
       </p:sp>
@@ -2513,6 +2929,7 @@
         <a:solidFill>
           <a:srgbClr val="1C2333"/>
         </a:solidFill>
+        <a:effectLst/>
       </p:bgPr>
     </p:bg>
     <p:spTree>
@@ -2532,9 +2949,11 @@
       <p:sp>
         <p:nvSpPr>
           <p:cNvPr id="2" name="Text 0"/>
-          <p:cNvSpPr/>
-          <p:nvPr>
-            <p:ph idx="100" type="title" hasCustomPrompt="1"/>
+          <p:cNvSpPr>
+            <a:spLocks noGrp="1"/>
+          </p:cNvSpPr>
+          <p:nvPr>
+            <p:ph type="title" idx="100" hasCustomPrompt="1"/>
           </p:nvPr>
         </p:nvSpPr>
         <p:spPr>
@@ -2551,7 +2970,7 @@
         <p:txBody>
           <a:bodyPr wrap="square" rtlCol="0"/>
           <a:lstStyle>
-            <a:lvl1pPr indent="0" marL="0">
+            <a:lvl1pPr marL="0" indent="0">
               <a:buNone/>
               <a:defRPr lang="en-US" sz="3600" b="1" dirty="0">
                 <a:solidFill>
@@ -2561,7 +2980,7 @@
             </a:lvl1pPr>
           </a:lstStyle>
           <a:p>
-            <a:pPr indent="0" marL="0">
+            <a:pPr marL="0" indent="0">
               <a:buNone/>
             </a:pPr>
             <a:endParaRPr lang="en-US" sz="3600" dirty="0"/>
@@ -2571,9 +2990,11 @@
       <p:sp>
         <p:nvSpPr>
           <p:cNvPr id="3" name="Text 0"/>
-          <p:cNvSpPr/>
-          <p:nvPr>
-            <p:ph idx="101" type="body" hasCustomPrompt="1"/>
+          <p:cNvSpPr>
+            <a:spLocks noGrp="1"/>
+          </p:cNvSpPr>
+          <p:nvPr>
+            <p:ph type="body" idx="101" hasCustomPrompt="1"/>
           </p:nvPr>
         </p:nvSpPr>
         <p:spPr>
@@ -2590,7 +3011,7 @@
         <p:txBody>
           <a:bodyPr wrap="square" rtlCol="0"/>
           <a:lstStyle>
-            <a:lvl1pPr indent="0" marL="0">
+            <a:lvl1pPr marL="0" indent="0">
               <a:buNone/>
               <a:defRPr lang="en-US" sz="1800" dirty="0">
                 <a:solidFill>
@@ -2600,7 +3021,7 @@
             </a:lvl1pPr>
           </a:lstStyle>
           <a:p>
-            <a:pPr indent="0" marL="0">
+            <a:pPr marL="0" indent="0">
               <a:buNone/>
             </a:pPr>
             <a:endParaRPr lang="en-US" sz="1800" dirty="0"/>
@@ -2623,6 +3044,7 @@
         <a:solidFill>
           <a:srgbClr val="FFFFFF"/>
         </a:solidFill>
+        <a:effectLst/>
       </p:bgPr>
     </p:bg>
     <p:spTree>
@@ -2642,9 +3064,11 @@
       <p:sp>
         <p:nvSpPr>
           <p:cNvPr id="2" name="Text 0"/>
-          <p:cNvSpPr/>
-          <p:nvPr>
-            <p:ph idx="100" type="title" hasCustomPrompt="1"/>
+          <p:cNvSpPr>
+            <a:spLocks noGrp="1"/>
+          </p:cNvSpPr>
+          <p:nvPr>
+            <p:ph type="title" idx="100" hasCustomPrompt="1"/>
           </p:nvPr>
         </p:nvSpPr>
         <p:spPr>
@@ -2661,7 +3085,7 @@
         <p:txBody>
           <a:bodyPr wrap="square" rtlCol="0"/>
           <a:lstStyle>
-            <a:lvl1pPr indent="0" marL="0">
+            <a:lvl1pPr marL="0" indent="0">
               <a:buNone/>
               <a:defRPr lang="en-US" sz="3400" b="1" dirty="0">
                 <a:solidFill>
@@ -2671,7 +3095,7 @@
             </a:lvl1pPr>
           </a:lstStyle>
           <a:p>
-            <a:pPr indent="0" marL="0">
+            <a:pPr marL="0" indent="0">
               <a:buNone/>
             </a:pPr>
             <a:endParaRPr lang="en-US" sz="3400" dirty="0"/>
@@ -2681,9 +3105,11 @@
       <p:sp>
         <p:nvSpPr>
           <p:cNvPr id="3" name="Text 0"/>
-          <p:cNvSpPr/>
-          <p:nvPr>
-            <p:ph idx="101" type="body" hasCustomPrompt="1"/>
+          <p:cNvSpPr>
+            <a:spLocks noGrp="1"/>
+          </p:cNvSpPr>
+          <p:nvPr>
+            <p:ph type="body" idx="101" hasCustomPrompt="1"/>
           </p:nvPr>
         </p:nvSpPr>
         <p:spPr>
@@ -2700,7 +3126,7 @@
         <p:txBody>
           <a:bodyPr wrap="square" rtlCol="0"/>
           <a:lstStyle>
-            <a:lvl1pPr indent="0" marL="0">
+            <a:lvl1pPr marL="0" indent="0">
               <a:buNone/>
               <a:defRPr lang="en-US" sz="1800" dirty="0">
                 <a:solidFill>
@@ -2710,7 +3136,7 @@
             </a:lvl1pPr>
           </a:lstStyle>
           <a:p>
-            <a:pPr indent="0" marL="0">
+            <a:pPr marL="0" indent="0">
               <a:buNone/>
             </a:pPr>
             <a:endParaRPr lang="en-US" sz="1800" dirty="0"/>
@@ -2733,6 +3159,7 @@
         <a:solidFill>
           <a:srgbClr val="1C2333"/>
         </a:solidFill>
+        <a:effectLst/>
       </p:bgPr>
     </p:bg>
     <p:spTree>
@@ -2760,6 +3187,11 @@
 <file path=ppt/slideMasters/slideMaster1.xml><?xml version="1.0" encoding="utf-8"?>
 <p:sldMaster xmlns:a="http://schemas.openxmlformats.org/drawingml/2006/main" xmlns:r="http://schemas.openxmlformats.org/officeDocument/2006/relationships" xmlns:p="http://schemas.openxmlformats.org/presentationml/2006/main">
   <p:cSld>
+    <p:bg>
+      <p:bgRef idx="1001">
+        <a:schemeClr val="bg1"/>
+      </p:bgRef>
+    </p:bg>
     <p:spTree>
       <p:nvGrpSpPr>
         <p:cNvPr id="1" name=""/>
@@ -3056,14 +3488,14 @@
       </p:grpSpPr>
       <p:pic>
         <p:nvPicPr>
-          <p:cNvPr id="2" name="desert photo" descr="/home/claude/slides/tmp/title.jpg">    </p:cNvPr>
+          <p:cNvPr id="2" name="desert photo" descr="/home/claude/slides/tmp/title.jpg"/>
           <p:cNvPicPr>
             <a:picLocks noChangeAspect="1"/>
           </p:cNvPicPr>
           <p:nvPr/>
         </p:nvPicPr>
         <p:blipFill>
-          <a:blip r:embed="rId1"/>
+          <a:blip r:embed="rId3"/>
           <a:stretch>
             <a:fillRect/>
           </a:stretch>
@@ -3106,6 +3538,13 @@
             <a:prstDash val="solid"/>
           </a:ln>
         </p:spPr>
+        <p:txBody>
+          <a:bodyPr/>
+          <a:lstStyle/>
+          <a:p>
+            <a:endParaRPr lang="en-US"/>
+          </a:p>
+        </p:txBody>
       </p:sp>
       <p:sp>
         <p:nvSpPr>
@@ -3128,7 +3567,7 @@
           <a:bodyPr wrap="square" lIns="0" tIns="0" rIns="0" bIns="0" rtlCol="0" anchor="ctr"/>
           <a:lstStyle/>
           <a:p>
-            <a:pPr indent="0" marL="0">
+            <a:pPr marL="0" indent="0">
               <a:buNone/>
             </a:pPr>
             <a:r>
@@ -3164,7 +3603,7 @@
           <a:bodyPr wrap="square" lIns="0" tIns="0" rIns="0" bIns="0" rtlCol="0" anchor="ctr"/>
           <a:lstStyle/>
           <a:p>
-            <a:pPr indent="0" marL="0">
+            <a:pPr marL="0" indent="0">
               <a:buNone/>
             </a:pPr>
             <a:r>
@@ -3200,7 +3639,7 @@
           <a:bodyPr wrap="square" lIns="0" tIns="0" rIns="0" bIns="0" rtlCol="0" anchor="ctr"/>
           <a:lstStyle/>
           <a:p>
-            <a:pPr indent="0" marL="0">
+            <a:pPr marL="0" indent="0">
               <a:buNone/>
             </a:pPr>
             <a:r>
@@ -3243,9 +3682,11 @@
       <p:sp>
         <p:nvSpPr>
           <p:cNvPr id="2" name="Text 0"/>
-          <p:cNvSpPr/>
-          <p:nvPr>
-            <p:ph idx="100" type="title" hasCustomPrompt="1"/>
+          <p:cNvSpPr>
+            <a:spLocks noGrp="1"/>
+          </p:cNvSpPr>
+          <p:nvPr>
+            <p:ph type="title" idx="100" hasCustomPrompt="1"/>
           </p:nvPr>
         </p:nvSpPr>
         <p:spPr>
@@ -3263,7 +3704,7 @@
           <a:bodyPr wrap="square" lIns="0" tIns="0" rIns="0" bIns="0" rtlCol="0" anchor="t"/>
           <a:lstStyle/>
           <a:p>
-            <a:pPr indent="0" marL="0">
+            <a:pPr marL="0" indent="0">
               <a:buNone/>
             </a:pPr>
             <a:r>
@@ -3272,7 +3713,7 @@
                   <a:schemeClr val="tx1"/>
                 </a:solidFill>
               </a:rPr>
-              <a:t>The traditions accumulate</a:t>
+              <a:t>Wisdom traditions</a:t>
             </a:r>
             <a:endParaRPr lang="en-US" sz="3400" dirty="0"/>
           </a:p>
@@ -3286,8 +3727,8 @@
         </p:nvSpPr>
         <p:spPr>
           <a:xfrm>
-            <a:off x="548640" y="1389888"/>
-            <a:ext cx="274320" cy="274320"/>
+            <a:off x="568960" y="1486408"/>
+            <a:ext cx="91440" cy="91440"/>
           </a:xfrm>
           <a:prstGeom prst="ellipse">
             <a:avLst/>
@@ -3302,6 +3743,13 @@
             <a:prstDash val="solid"/>
           </a:ln>
         </p:spPr>
+        <p:txBody>
+          <a:bodyPr/>
+          <a:lstStyle/>
+          <a:p>
+            <a:endParaRPr lang="en-US"/>
+          </a:p>
+        </p:txBody>
       </p:sp>
       <p:sp>
         <p:nvSpPr>
@@ -3324,7 +3772,7 @@
           <a:bodyPr wrap="square" lIns="0" tIns="0" rIns="0" bIns="0" rtlCol="0" anchor="ctr"/>
           <a:lstStyle/>
           <a:p>
-            <a:pPr indent="0" marL="0">
+            <a:pPr marL="0" indent="0">
               <a:buNone/>
             </a:pPr>
             <a:r>
@@ -3360,7 +3808,7 @@
           <a:bodyPr wrap="square" lIns="0" tIns="0" rIns="0" bIns="0" rtlCol="0" anchor="ctr"/>
           <a:lstStyle/>
           <a:p>
-            <a:pPr indent="0" marL="0">
+            <a:pPr marL="0" indent="0">
               <a:buNone/>
             </a:pPr>
             <a:r>
@@ -3383,8 +3831,8 @@
         </p:nvSpPr>
         <p:spPr>
           <a:xfrm>
-            <a:off x="548640" y="1938528"/>
-            <a:ext cx="274320" cy="274320"/>
+            <a:off x="568960" y="2035048"/>
+            <a:ext cx="91440" cy="91440"/>
           </a:xfrm>
           <a:prstGeom prst="ellipse">
             <a:avLst/>
@@ -3399,6 +3847,13 @@
             <a:prstDash val="solid"/>
           </a:ln>
         </p:spPr>
+        <p:txBody>
+          <a:bodyPr/>
+          <a:lstStyle/>
+          <a:p>
+            <a:endParaRPr lang="en-US"/>
+          </a:p>
+        </p:txBody>
       </p:sp>
       <p:sp>
         <p:nvSpPr>
@@ -3421,7 +3876,7 @@
           <a:bodyPr wrap="square" lIns="0" tIns="0" rIns="0" bIns="0" rtlCol="0" anchor="ctr"/>
           <a:lstStyle/>
           <a:p>
-            <a:pPr indent="0" marL="0">
+            <a:pPr marL="0" indent="0">
               <a:buNone/>
             </a:pPr>
             <a:r>
@@ -3457,7 +3912,7 @@
           <a:bodyPr wrap="square" lIns="0" tIns="0" rIns="0" bIns="0" rtlCol="0" anchor="ctr"/>
           <a:lstStyle/>
           <a:p>
-            <a:pPr indent="0" marL="0">
+            <a:pPr marL="0" indent="0">
               <a:buNone/>
             </a:pPr>
             <a:r>
@@ -3480,8 +3935,8 @@
         </p:nvSpPr>
         <p:spPr>
           <a:xfrm>
-            <a:off x="548640" y="2487168"/>
-            <a:ext cx="274320" cy="274320"/>
+            <a:off x="568960" y="2598928"/>
+            <a:ext cx="91440" cy="91440"/>
           </a:xfrm>
           <a:prstGeom prst="ellipse">
             <a:avLst/>
@@ -3496,6 +3951,13 @@
             <a:prstDash val="solid"/>
           </a:ln>
         </p:spPr>
+        <p:txBody>
+          <a:bodyPr/>
+          <a:lstStyle/>
+          <a:p>
+            <a:endParaRPr lang="en-US"/>
+          </a:p>
+        </p:txBody>
       </p:sp>
       <p:sp>
         <p:nvSpPr>
@@ -3518,7 +3980,7 @@
           <a:bodyPr wrap="square" lIns="0" tIns="0" rIns="0" bIns="0" rtlCol="0" anchor="ctr"/>
           <a:lstStyle/>
           <a:p>
-            <a:pPr indent="0" marL="0">
+            <a:pPr marL="0" indent="0">
               <a:buNone/>
             </a:pPr>
             <a:r>
@@ -3554,7 +4016,7 @@
           <a:bodyPr wrap="square" lIns="0" tIns="0" rIns="0" bIns="0" rtlCol="0" anchor="ctr"/>
           <a:lstStyle/>
           <a:p>
-            <a:pPr indent="0" marL="0">
+            <a:pPr marL="0" indent="0">
               <a:buNone/>
             </a:pPr>
             <a:r>
@@ -3577,8 +4039,8 @@
         </p:nvSpPr>
         <p:spPr>
           <a:xfrm>
-            <a:off x="548640" y="3035808"/>
-            <a:ext cx="274320" cy="274320"/>
+            <a:off x="568960" y="3137408"/>
+            <a:ext cx="91440" cy="91440"/>
           </a:xfrm>
           <a:prstGeom prst="ellipse">
             <a:avLst/>
@@ -3593,6 +4055,13 @@
             <a:prstDash val="solid"/>
           </a:ln>
         </p:spPr>
+        <p:txBody>
+          <a:bodyPr/>
+          <a:lstStyle/>
+          <a:p>
+            <a:endParaRPr lang="en-US"/>
+          </a:p>
+        </p:txBody>
       </p:sp>
       <p:sp>
         <p:nvSpPr>
@@ -3615,7 +4084,7 @@
           <a:bodyPr wrap="square" lIns="0" tIns="0" rIns="0" bIns="0" rtlCol="0" anchor="ctr"/>
           <a:lstStyle/>
           <a:p>
-            <a:pPr indent="0" marL="0">
+            <a:pPr marL="0" indent="0">
               <a:buNone/>
             </a:pPr>
             <a:r>
@@ -3651,7 +4120,7 @@
           <a:bodyPr wrap="square" lIns="0" tIns="0" rIns="0" bIns="0" rtlCol="0" anchor="ctr"/>
           <a:lstStyle/>
           <a:p>
-            <a:pPr indent="0" marL="0">
+            <a:pPr marL="0" indent="0">
               <a:buNone/>
             </a:pPr>
             <a:r>
@@ -3674,8 +4143,8 @@
         </p:nvSpPr>
         <p:spPr>
           <a:xfrm>
-            <a:off x="548640" y="3584448"/>
-            <a:ext cx="274320" cy="274320"/>
+            <a:off x="568960" y="3686048"/>
+            <a:ext cx="91440" cy="91440"/>
           </a:xfrm>
           <a:prstGeom prst="ellipse">
             <a:avLst/>
@@ -3690,6 +4159,13 @@
             <a:prstDash val="solid"/>
           </a:ln>
         </p:spPr>
+        <p:txBody>
+          <a:bodyPr/>
+          <a:lstStyle/>
+          <a:p>
+            <a:endParaRPr lang="en-US"/>
+          </a:p>
+        </p:txBody>
       </p:sp>
       <p:sp>
         <p:nvSpPr>
@@ -3712,7 +4188,7 @@
           <a:bodyPr wrap="square" lIns="0" tIns="0" rIns="0" bIns="0" rtlCol="0" anchor="ctr"/>
           <a:lstStyle/>
           <a:p>
-            <a:pPr indent="0" marL="0">
+            <a:pPr marL="0" indent="0">
               <a:buNone/>
             </a:pPr>
             <a:r>
@@ -3748,7 +4224,7 @@
           <a:bodyPr wrap="square" lIns="0" tIns="0" rIns="0" bIns="0" rtlCol="0" anchor="ctr"/>
           <a:lstStyle/>
           <a:p>
-            <a:pPr indent="0" marL="0">
+            <a:pPr marL="0" indent="0">
               <a:buNone/>
             </a:pPr>
             <a:r>
@@ -3771,8 +4247,8 @@
         </p:nvSpPr>
         <p:spPr>
           <a:xfrm>
-            <a:off x="548640" y="4206240"/>
-            <a:ext cx="8046720" cy="548640"/>
+            <a:off x="212377" y="4448112"/>
+            <a:ext cx="8766441" cy="548640"/>
           </a:xfrm>
           <a:prstGeom prst="rect">
             <a:avLst/>
@@ -3784,48 +4260,18 @@
           <a:bodyPr wrap="square" lIns="0" tIns="0" rIns="0" bIns="0" rtlCol="0" anchor="ctr"/>
           <a:lstStyle/>
           <a:p>
-            <a:pPr indent="0" marL="0">
-              <a:buNone/>
-            </a:pPr>
-            <a:r>
-              <a:rPr lang="en-US" sz="1400" i="1" dirty="0">
+            <a:pPr marL="0" indent="0">
+              <a:buNone/>
+            </a:pPr>
+            <a:r>
+              <a:rPr lang="en-US" sz="1600" i="1" dirty="0">
                 <a:solidFill>
                   <a:schemeClr val="accent1"/>
                 </a:solidFill>
               </a:rPr>
               <a:t>reality has an order  ·  we have a place in it  ·  wisdom is perceiving it truly and acting in alignment with it</a:t>
             </a:r>
-            <a:endParaRPr lang="en-US" sz="1400" dirty="0"/>
-          </a:p>
-        </p:txBody>
-      </p:sp>
-      <p:sp>
-        <p:nvSpPr>
-          <p:cNvPr id="20" name="Text 0"/>
-          <p:cNvSpPr/>
-          <p:nvPr>
-            <p:ph idx="101" type="body" hasCustomPrompt="1"/>
-          </p:nvPr>
-        </p:nvSpPr>
-        <p:spPr>
-          <a:xfrm>
-            <a:off x="548640" y="1371600"/>
-            <a:ext cx="8046720" cy="3291840"/>
-          </a:xfrm>
-          <a:prstGeom prst="rect">
-            <a:avLst/>
-          </a:prstGeom>
-          <a:noFill/>
-          <a:ln/>
-        </p:spPr>
-        <p:txBody>
-          <a:bodyPr wrap="square" lIns="0" tIns="0" rIns="0" bIns="0" rtlCol="0" anchor="t"/>
-          <a:lstStyle/>
-          <a:p>
-            <a:pPr indent="0" marL="0">
-              <a:buNone/>
-            </a:pPr>
-            <a:endParaRPr lang="en-US" sz="1800" dirty="0"/>
+            <a:endParaRPr lang="en-US" sz="1600" dirty="0"/>
           </a:p>
         </p:txBody>
       </p:sp>
@@ -3857,9 +4303,11 @@
       <p:sp>
         <p:nvSpPr>
           <p:cNvPr id="2" name="Text 0"/>
-          <p:cNvSpPr/>
-          <p:nvPr>
-            <p:ph idx="100" type="title" hasCustomPrompt="1"/>
+          <p:cNvSpPr>
+            <a:spLocks noGrp="1"/>
+          </p:cNvSpPr>
+          <p:nvPr>
+            <p:ph type="title" idx="100" hasCustomPrompt="1"/>
           </p:nvPr>
         </p:nvSpPr>
         <p:spPr>
@@ -3877,7 +4325,7 @@
           <a:bodyPr wrap="square" lIns="0" tIns="0" rIns="0" bIns="0" rtlCol="0" anchor="t"/>
           <a:lstStyle/>
           <a:p>
-            <a:pPr indent="0" marL="0">
+            <a:pPr marL="0" indent="0">
               <a:buNone/>
             </a:pPr>
             <a:r>
@@ -3913,84 +4361,66 @@
           <a:bodyPr wrap="square" lIns="0" tIns="0" rIns="0" bIns="0" rtlCol="0" anchor="t"/>
           <a:lstStyle/>
           <a:p>
-            <a:pPr indent="0" marL="0">
-              <a:buNone/>
-            </a:pPr>
-            <a:r>
-              <a:rPr lang="en-US" sz="2800" dirty="0">
+            <a:pPr marL="0" indent="0">
+              <a:buNone/>
+            </a:pPr>
+            <a:r>
+              <a:rPr lang="en-US" sz="2200" dirty="0">
                 <a:solidFill>
                   <a:schemeClr val="bg1"/>
                 </a:solidFill>
               </a:rPr>
               <a:t>is a </a:t>
             </a:r>
-            <a:pPr indent="0" marL="0">
-              <a:buNone/>
-            </a:pPr>
-            <a:r>
-              <a:rPr lang="en-US" sz="2800" b="1" dirty="0">
+            <a:r>
+              <a:rPr lang="en-US" sz="2200" b="1" dirty="0">
                 <a:solidFill>
                   <a:schemeClr val="accent2"/>
                 </a:solidFill>
               </a:rPr>
               <a:t>faithful relationship</a:t>
             </a:r>
-            <a:pPr indent="0" marL="0">
-              <a:buNone/>
-            </a:pPr>
-            <a:r>
-              <a:rPr lang="en-US" sz="2800" dirty="0">
+            <a:r>
+              <a:rPr lang="en-US" sz="2200" dirty="0">
                 <a:solidFill>
                   <a:schemeClr val="bg1"/>
                 </a:solidFill>
               </a:rPr>
-              <a:t> with reality — </a:t>
-            </a:r>
-            <a:pPr indent="0" marL="0">
-              <a:buNone/>
-            </a:pPr>
-            <a:r>
-              <a:rPr lang="en-US" sz="2800" b="1" dirty="0">
+              <a:t> with reality, achieved when we </a:t>
+            </a:r>
+            <a:r>
+              <a:rPr lang="en-US" sz="2200" b="1" dirty="0">
                 <a:solidFill>
                   <a:schemeClr val="accent2"/>
                 </a:solidFill>
               </a:rPr>
-              <a:t>understanding it completely</a:t>
-            </a:r>
-            <a:pPr indent="0" marL="0">
-              <a:buNone/>
-            </a:pPr>
-            <a:r>
-              <a:rPr lang="en-US" sz="2800" dirty="0">
+              <a:t>understand it completely</a:t>
+            </a:r>
+            <a:r>
+              <a:rPr lang="en-US" sz="2200" dirty="0">
                 <a:solidFill>
                   <a:schemeClr val="bg1"/>
                 </a:solidFill>
               </a:rPr>
-              <a:t>, knowing our place within it, and </a:t>
-            </a:r>
-            <a:pPr indent="0" marL="0">
-              <a:buNone/>
-            </a:pPr>
-            <a:r>
-              <a:rPr lang="en-US" sz="2800" b="1" dirty="0">
+              <a:t>, know our place within it, and </a:t>
+            </a:r>
+            <a:r>
+              <a:rPr lang="en-US" sz="2200" b="1" dirty="0">
                 <a:solidFill>
                   <a:schemeClr val="accent2"/>
                 </a:solidFill>
               </a:rPr>
-              <a:t>acting</a:t>
-            </a:r>
-            <a:pPr indent="0" marL="0">
-              <a:buNone/>
-            </a:pPr>
-            <a:r>
-              <a:rPr lang="en-US" sz="2800" dirty="0">
+              <a:t>act</a:t>
+            </a:r>
+            <a:r>
+              <a:rPr lang="en-US" sz="2200" dirty="0">
                 <a:solidFill>
                   <a:schemeClr val="bg1"/>
                 </a:solidFill>
               </a:rPr>
               <a:t> in alignment with it.</a:t>
             </a:r>
-            <a:endParaRPr lang="en-US" sz="2800" dirty="0"/>
+            <a:endParaRPr lang="en-US" sz="2200" dirty="0"/>
           </a:p>
         </p:txBody>
       </p:sp>
@@ -4002,7 +4432,7 @@
         </p:nvSpPr>
         <p:spPr>
           <a:xfrm>
-            <a:off x="548640" y="3429000"/>
+            <a:off x="548640" y="2956560"/>
             <a:ext cx="457200" cy="457200"/>
           </a:xfrm>
           <a:prstGeom prst="rect">
@@ -4015,7 +4445,7 @@
           <a:bodyPr wrap="square" lIns="0" tIns="0" rIns="0" bIns="0" rtlCol="0" anchor="ctr"/>
           <a:lstStyle/>
           <a:p>
-            <a:pPr indent="0" marL="0">
+            <a:pPr marL="0" indent="0">
               <a:buNone/>
             </a:pPr>
             <a:r>
@@ -4038,7 +4468,7 @@
         </p:nvSpPr>
         <p:spPr>
           <a:xfrm>
-            <a:off x="1005840" y="3456432"/>
+            <a:off x="889000" y="2983992"/>
             <a:ext cx="2103120" cy="411480"/>
           </a:xfrm>
           <a:prstGeom prst="rect">
@@ -4051,7 +4481,7 @@
           <a:bodyPr wrap="square" lIns="0" tIns="0" rIns="0" bIns="0" rtlCol="0" anchor="ctr"/>
           <a:lstStyle/>
           <a:p>
-            <a:pPr indent="0" marL="0">
+            <a:pPr marL="0" indent="0">
               <a:buNone/>
             </a:pPr>
             <a:r>
@@ -4074,7 +4504,7 @@
         </p:nvSpPr>
         <p:spPr>
           <a:xfrm>
-            <a:off x="1005840" y="3840480"/>
+            <a:off x="889000" y="3368040"/>
             <a:ext cx="2103120" cy="731520"/>
           </a:xfrm>
           <a:prstGeom prst="rect">
@@ -4087,7 +4517,7 @@
           <a:bodyPr wrap="square" lIns="0" tIns="0" rIns="0" bIns="0" rtlCol="0" anchor="t"/>
           <a:lstStyle/>
           <a:p>
-            <a:pPr indent="0" marL="0">
+            <a:pPr marL="0" indent="0">
               <a:buNone/>
             </a:pPr>
             <a:r>
@@ -4110,7 +4540,7 @@
         </p:nvSpPr>
         <p:spPr>
           <a:xfrm>
-            <a:off x="3246120" y="3429000"/>
+            <a:off x="3246120" y="2956560"/>
             <a:ext cx="457200" cy="457200"/>
           </a:xfrm>
           <a:prstGeom prst="rect">
@@ -4123,7 +4553,7 @@
           <a:bodyPr wrap="square" lIns="0" tIns="0" rIns="0" bIns="0" rtlCol="0" anchor="ctr"/>
           <a:lstStyle/>
           <a:p>
-            <a:pPr indent="0" marL="0">
+            <a:pPr marL="0" indent="0">
               <a:buNone/>
             </a:pPr>
             <a:r>
@@ -4146,7 +4576,7 @@
         </p:nvSpPr>
         <p:spPr>
           <a:xfrm>
-            <a:off x="3703320" y="3456432"/>
+            <a:off x="3581400" y="2983992"/>
             <a:ext cx="2103120" cy="411480"/>
           </a:xfrm>
           <a:prstGeom prst="rect">
@@ -4159,7 +4589,7 @@
           <a:bodyPr wrap="square" lIns="0" tIns="0" rIns="0" bIns="0" rtlCol="0" anchor="ctr"/>
           <a:lstStyle/>
           <a:p>
-            <a:pPr indent="0" marL="0">
+            <a:pPr marL="0" indent="0">
               <a:buNone/>
             </a:pPr>
             <a:r>
@@ -4182,7 +4612,7 @@
         </p:nvSpPr>
         <p:spPr>
           <a:xfrm>
-            <a:off x="3703320" y="3840480"/>
+            <a:off x="3581400" y="3368040"/>
             <a:ext cx="2103120" cy="731520"/>
           </a:xfrm>
           <a:prstGeom prst="rect">
@@ -4195,7 +4625,7 @@
           <a:bodyPr wrap="square" lIns="0" tIns="0" rIns="0" bIns="0" rtlCol="0" anchor="t"/>
           <a:lstStyle/>
           <a:p>
-            <a:pPr indent="0" marL="0">
+            <a:pPr marL="0" indent="0">
               <a:buNone/>
             </a:pPr>
             <a:r>
@@ -4218,7 +4648,7 @@
         </p:nvSpPr>
         <p:spPr>
           <a:xfrm>
-            <a:off x="5943600" y="3429000"/>
+            <a:off x="6060440" y="2956560"/>
             <a:ext cx="457200" cy="457200"/>
           </a:xfrm>
           <a:prstGeom prst="rect">
@@ -4231,7 +4661,7 @@
           <a:bodyPr wrap="square" lIns="0" tIns="0" rIns="0" bIns="0" rtlCol="0" anchor="ctr"/>
           <a:lstStyle/>
           <a:p>
-            <a:pPr indent="0" marL="0">
+            <a:pPr marL="0" indent="0">
               <a:buNone/>
             </a:pPr>
             <a:r>
@@ -4254,7 +4684,7 @@
         </p:nvSpPr>
         <p:spPr>
           <a:xfrm>
-            <a:off x="6400800" y="3456432"/>
+            <a:off x="6400800" y="2983992"/>
             <a:ext cx="2103120" cy="411480"/>
           </a:xfrm>
           <a:prstGeom prst="rect">
@@ -4267,7 +4697,7 @@
           <a:bodyPr wrap="square" lIns="0" tIns="0" rIns="0" bIns="0" rtlCol="0" anchor="ctr"/>
           <a:lstStyle/>
           <a:p>
-            <a:pPr indent="0" marL="0">
+            <a:pPr marL="0" indent="0">
               <a:buNone/>
             </a:pPr>
             <a:r>
@@ -4276,7 +4706,7 @@
                   <a:schemeClr val="bg1"/>
                 </a:solidFill>
               </a:rPr>
-              <a:t>action</a:t>
+              <a:t>aligned action</a:t>
             </a:r>
             <a:endParaRPr lang="en-US" sz="1600" dirty="0"/>
           </a:p>
@@ -4290,7 +4720,7 @@
         </p:nvSpPr>
         <p:spPr>
           <a:xfrm>
-            <a:off x="6400800" y="3840480"/>
+            <a:off x="6400800" y="3368040"/>
             <a:ext cx="2103120" cy="731520"/>
           </a:xfrm>
           <a:prstGeom prst="rect">
@@ -4303,7 +4733,7 @@
           <a:bodyPr wrap="square" lIns="0" tIns="0" rIns="0" bIns="0" rtlCol="0" anchor="t"/>
           <a:lstStyle/>
           <a:p>
-            <a:pPr indent="0" marL="0">
+            <a:pPr marL="0" indent="0">
               <a:buNone/>
             </a:pPr>
             <a:r>
@@ -4315,36 +4745,6 @@
               <a:t>stewards of every square inch</a:t>
             </a:r>
             <a:endParaRPr lang="en-US" sz="1300" dirty="0"/>
-          </a:p>
-        </p:txBody>
-      </p:sp>
-      <p:sp>
-        <p:nvSpPr>
-          <p:cNvPr id="14" name="Text 0"/>
-          <p:cNvSpPr/>
-          <p:nvPr>
-            <p:ph idx="101" type="body" hasCustomPrompt="1"/>
-          </p:nvPr>
-        </p:nvSpPr>
-        <p:spPr>
-          <a:xfrm>
-            <a:off x="548640" y="1554480"/>
-            <a:ext cx="8046720" cy="3108960"/>
-          </a:xfrm>
-          <a:prstGeom prst="rect">
-            <a:avLst/>
-          </a:prstGeom>
-          <a:noFill/>
-          <a:ln/>
-        </p:spPr>
-        <p:txBody>
-          <a:bodyPr wrap="square" lIns="0" tIns="0" rIns="0" bIns="0" rtlCol="0" anchor="t"/>
-          <a:lstStyle/>
-          <a:p>
-            <a:pPr indent="0" marL="0">
-              <a:buNone/>
-            </a:pPr>
-            <a:endParaRPr lang="en-US" sz="1800" dirty="0"/>
           </a:p>
         </p:txBody>
       </p:sp>
@@ -4357,6 +4757,106 @@
 </file>
 
 <file path=ppt/slides/slide12.xml><?xml version="1.0" encoding="utf-8"?>
+<p:sld xmlns:a="http://schemas.openxmlformats.org/drawingml/2006/main" xmlns:r="http://schemas.openxmlformats.org/officeDocument/2006/relationships" xmlns:p="http://schemas.openxmlformats.org/presentationml/2006/main">
+  <p:cSld>
+    <p:spTree>
+      <p:nvGrpSpPr>
+        <p:cNvPr id="1" name="">
+          <a:extLst>
+            <a:ext uri="{FF2B5EF4-FFF2-40B4-BE49-F238E27FC236}">
+              <a16:creationId xmlns:a16="http://schemas.microsoft.com/office/drawing/2014/main" id="{EE11CD31-1CD3-46F7-2778-520CFF19AA78}"/>
+            </a:ext>
+          </a:extLst>
+        </p:cNvPr>
+        <p:cNvGrpSpPr/>
+        <p:nvPr/>
+      </p:nvGrpSpPr>
+      <p:grpSpPr>
+        <a:xfrm>
+          <a:off x="0" y="0"/>
+          <a:ext cx="0" cy="0"/>
+          <a:chOff x="0" y="0"/>
+          <a:chExt cx="0" cy="0"/>
+        </a:xfrm>
+      </p:grpSpPr>
+      <p:sp>
+        <p:nvSpPr>
+          <p:cNvPr id="2" name="q1">
+            <a:extLst>
+              <a:ext uri="{FF2B5EF4-FFF2-40B4-BE49-F238E27FC236}">
+                <a16:creationId xmlns:a16="http://schemas.microsoft.com/office/drawing/2014/main" id="{63F4FF62-78F9-E8E8-BF04-86A51B2D6193}"/>
+              </a:ext>
+            </a:extLst>
+          </p:cNvPr>
+          <p:cNvSpPr txBox="1"/>
+          <p:nvPr/>
+        </p:nvSpPr>
+        <p:spPr>
+          <a:xfrm>
+            <a:off x="731520" y="1828800"/>
+            <a:ext cx="7680960" cy="1280160"/>
+          </a:xfrm>
+          <a:prstGeom prst="rect">
+            <a:avLst/>
+          </a:prstGeom>
+          <a:noFill/>
+          <a:ln/>
+        </p:spPr>
+        <p:txBody>
+          <a:bodyPr wrap="square" lIns="0" tIns="0" rIns="0" bIns="0" rtlCol="0" anchor="ctr"/>
+          <a:lstStyle/>
+          <a:p>
+            <a:pPr algn="ctr"/>
+            <a:r>
+              <a:rPr lang="en-US" sz="4000" dirty="0">
+                <a:latin typeface="+mj-lt"/>
+              </a:rPr>
+              <a:t>How do we come to </a:t>
+            </a:r>
+          </a:p>
+          <a:p>
+            <a:pPr algn="ctr"/>
+            <a:r>
+              <a:rPr lang="en-US" sz="4000" dirty="0">
+                <a:latin typeface="+mj-lt"/>
+              </a:rPr>
+              <a:t>understand reality, </a:t>
+            </a:r>
+          </a:p>
+          <a:p>
+            <a:pPr algn="ctr"/>
+            <a:r>
+              <a:rPr lang="en-US" sz="4000" dirty="0">
+                <a:latin typeface="+mj-lt"/>
+              </a:rPr>
+              <a:t>relate to it, and </a:t>
+            </a:r>
+          </a:p>
+          <a:p>
+            <a:pPr algn="ctr"/>
+            <a:r>
+              <a:rPr lang="en-US" sz="4000" dirty="0">
+                <a:latin typeface="+mj-lt"/>
+              </a:rPr>
+              <a:t>act more wisely over time?</a:t>
+            </a:r>
+          </a:p>
+        </p:txBody>
+      </p:sp>
+    </p:spTree>
+    <p:extLst>
+      <p:ext uri="{BB962C8B-B14F-4D97-AF65-F5344CB8AC3E}">
+        <p14:creationId xmlns:p14="http://schemas.microsoft.com/office/powerpoint/2010/main" val="3692441605"/>
+      </p:ext>
+    </p:extLst>
+  </p:cSld>
+  <p:clrMapOvr>
+    <a:masterClrMapping/>
+  </p:clrMapOvr>
+</p:sld>
+</file>
+
+<file path=ppt/slides/slide13.xml><?xml version="1.0" encoding="utf-8"?>
 <p:sld xmlns:a="http://schemas.openxmlformats.org/drawingml/2006/main" xmlns:r="http://schemas.openxmlformats.org/officeDocument/2006/relationships" xmlns:p="http://schemas.openxmlformats.org/presentationml/2006/main">
   <p:cSld name="Slide 12">
     <p:spTree>
@@ -4376,9 +4876,11 @@
       <p:sp>
         <p:nvSpPr>
           <p:cNvPr id="2" name="Text 0"/>
-          <p:cNvSpPr/>
-          <p:nvPr>
-            <p:ph idx="100" type="title" hasCustomPrompt="1"/>
+          <p:cNvSpPr>
+            <a:spLocks noGrp="1"/>
+          </p:cNvSpPr>
+          <p:nvPr>
+            <p:ph type="title" idx="100" hasCustomPrompt="1"/>
           </p:nvPr>
         </p:nvSpPr>
         <p:spPr>
@@ -4396,7 +4898,7 @@
           <a:bodyPr wrap="square" lIns="0" tIns="0" rIns="0" bIns="0" rtlCol="0" anchor="t"/>
           <a:lstStyle/>
           <a:p>
-            <a:pPr indent="0" marL="0">
+            <a:pPr marL="0" indent="0">
               <a:buNone/>
             </a:pPr>
             <a:r>
@@ -4413,14 +4915,14 @@
       </p:sp>
       <p:pic>
         <p:nvPicPr>
-          <p:cNvPr id="3" name="pyramid" descr="/home/claude/slides/tmp/pyr0.png">    </p:cNvPr>
+          <p:cNvPr id="3" name="pyramid" descr="/home/claude/slides/tmp/pyr0.png"/>
           <p:cNvPicPr>
             <a:picLocks noChangeAspect="1"/>
           </p:cNvPicPr>
           <p:nvPr/>
         </p:nvPicPr>
         <p:blipFill>
-          <a:blip r:embed="rId1"/>
+          <a:blip r:embed="rId3"/>
           <a:stretch>
             <a:fillRect/>
           </a:stretch>
@@ -4456,7 +4958,7 @@
           <a:bodyPr wrap="square" lIns="0" tIns="0" rIns="0" bIns="0" rtlCol="0" anchor="ctr"/>
           <a:lstStyle/>
           <a:p>
-            <a:pPr indent="0" marL="0">
+            <a:pPr marL="0" indent="0">
               <a:buNone/>
             </a:pPr>
             <a:r>
@@ -4471,36 +4973,68 @@
           </a:p>
         </p:txBody>
       </p:sp>
-      <p:sp>
-        <p:nvSpPr>
-          <p:cNvPr id="6" name="Text 0"/>
-          <p:cNvSpPr/>
-          <p:nvPr>
-            <p:ph idx="101" type="body" hasCustomPrompt="1"/>
-          </p:nvPr>
-        </p:nvSpPr>
-        <p:spPr>
-          <a:xfrm>
-            <a:off x="548640" y="1371600"/>
-            <a:ext cx="8046720" cy="3291840"/>
-          </a:xfrm>
-          <a:prstGeom prst="rect">
-            <a:avLst/>
-          </a:prstGeom>
-          <a:noFill/>
-          <a:ln/>
-        </p:spPr>
-        <p:txBody>
-          <a:bodyPr wrap="square" lIns="0" tIns="0" rIns="0" bIns="0" rtlCol="0" anchor="t"/>
-          <a:lstStyle/>
-          <a:p>
-            <a:pPr indent="0" marL="0">
-              <a:buNone/>
-            </a:pPr>
-            <a:endParaRPr lang="en-US" sz="1800" dirty="0"/>
-          </a:p>
-        </p:txBody>
-      </p:sp>
+      <p:pic>
+        <p:nvPicPr>
+          <p:cNvPr id="5" name="pyramid" descr="/home/claude/slides/tmp/pyr0.png">
+            <a:extLst>
+              <a:ext uri="{FF2B5EF4-FFF2-40B4-BE49-F238E27FC236}">
+                <a16:creationId xmlns:a16="http://schemas.microsoft.com/office/drawing/2014/main" id="{6EB88E8A-D7E4-A029-9C97-01229BBD8C5E}"/>
+              </a:ext>
+            </a:extLst>
+          </p:cNvPr>
+          <p:cNvPicPr>
+            <a:picLocks noChangeAspect="1"/>
+          </p:cNvPicPr>
+          <p:nvPr/>
+        </p:nvPicPr>
+        <p:blipFill>
+          <a:blip r:embed="rId3"/>
+          <a:srcRect t="83007" r="55120"/>
+          <a:stretch>
+            <a:fillRect/>
+          </a:stretch>
+        </p:blipFill>
+        <p:spPr>
+          <a:xfrm>
+            <a:off x="347980" y="4140200"/>
+            <a:ext cx="2092960" cy="660400"/>
+          </a:xfrm>
+          <a:prstGeom prst="rect">
+            <a:avLst/>
+          </a:prstGeom>
+        </p:spPr>
+      </p:pic>
+      <p:pic>
+        <p:nvPicPr>
+          <p:cNvPr id="7" name="pyramid" descr="/home/claude/slides/tmp/pyr0.png">
+            <a:extLst>
+              <a:ext uri="{FF2B5EF4-FFF2-40B4-BE49-F238E27FC236}">
+                <a16:creationId xmlns:a16="http://schemas.microsoft.com/office/drawing/2014/main" id="{C5DF8458-A01B-95FB-9844-AADAE1E84585}"/>
+              </a:ext>
+            </a:extLst>
+          </p:cNvPr>
+          <p:cNvPicPr>
+            <a:picLocks noChangeAspect="1"/>
+          </p:cNvPicPr>
+          <p:nvPr/>
+        </p:nvPicPr>
+        <p:blipFill>
+          <a:blip r:embed="rId3"/>
+          <a:srcRect t="83007" r="55120"/>
+          <a:stretch>
+            <a:fillRect/>
+          </a:stretch>
+        </p:blipFill>
+        <p:spPr>
+          <a:xfrm>
+            <a:off x="6606540" y="4140200"/>
+            <a:ext cx="2092960" cy="660400"/>
+          </a:xfrm>
+          <a:prstGeom prst="rect">
+            <a:avLst/>
+          </a:prstGeom>
+        </p:spPr>
+      </p:pic>
     </p:spTree>
   </p:cSld>
   <p:clrMapOvr>
@@ -4509,7 +5043,7 @@
 </p:sld>
 </file>
 
-<file path=ppt/slides/slide13.xml><?xml version="1.0" encoding="utf-8"?>
+<file path=ppt/slides/slide14.xml><?xml version="1.0" encoding="utf-8"?>
 <p:sld xmlns:a="http://schemas.openxmlformats.org/drawingml/2006/main" xmlns:r="http://schemas.openxmlformats.org/officeDocument/2006/relationships" xmlns:p="http://schemas.openxmlformats.org/presentationml/2006/main">
   <p:cSld name="Slide 13">
     <p:spTree>
@@ -4529,9 +5063,11 @@
       <p:sp>
         <p:nvSpPr>
           <p:cNvPr id="2" name="Text 0"/>
-          <p:cNvSpPr/>
-          <p:nvPr>
-            <p:ph idx="100" type="title" hasCustomPrompt="1"/>
+          <p:cNvSpPr>
+            <a:spLocks noGrp="1"/>
+          </p:cNvSpPr>
+          <p:nvPr>
+            <p:ph type="title" idx="100" hasCustomPrompt="1"/>
           </p:nvPr>
         </p:nvSpPr>
         <p:spPr>
@@ -4549,7 +5085,7 @@
           <a:bodyPr wrap="square" lIns="0" tIns="0" rIns="0" bIns="0" rtlCol="0" anchor="t"/>
           <a:lstStyle/>
           <a:p>
-            <a:pPr indent="0" marL="0">
+            <a:pPr marL="0" indent="0">
               <a:buNone/>
             </a:pPr>
             <a:r>
@@ -4566,14 +5102,14 @@
       </p:sp>
       <p:pic>
         <p:nvPicPr>
-          <p:cNvPr id="3" name="pyramid" descr="/home/claude/slides/tmp/pyr1.png">    </p:cNvPr>
+          <p:cNvPr id="3" name="pyramid" descr="/home/claude/slides/tmp/pyr1.png"/>
           <p:cNvPicPr>
             <a:picLocks noChangeAspect="1"/>
           </p:cNvPicPr>
           <p:nvPr/>
         </p:nvPicPr>
         <p:blipFill>
-          <a:blip r:embed="rId1"/>
+          <a:blip r:embed="rId3"/>
           <a:stretch>
             <a:fillRect/>
           </a:stretch>
@@ -4590,14 +5126,14 @@
       </p:pic>
       <p:sp>
         <p:nvSpPr>
-          <p:cNvPr id="4" name="k 0"/>
+          <p:cNvPr id="5" name="v 0"/>
           <p:cNvSpPr txBox="1"/>
           <p:nvPr/>
         </p:nvSpPr>
         <p:spPr>
           <a:xfrm>
-            <a:off x="4572000" y="1325880"/>
-            <a:ext cx="548640" cy="320040"/>
+            <a:off x="4974983" y="3474720"/>
+            <a:ext cx="3474720" cy="1051560"/>
           </a:xfrm>
           <a:prstGeom prst="rect">
             <a:avLst/>
@@ -4606,231 +5142,21 @@
           <a:ln/>
         </p:spPr>
         <p:txBody>
-          <a:bodyPr wrap="square" lIns="0" tIns="0" rIns="0" bIns="0" rtlCol="0" anchor="ctr"/>
-          <a:lstStyle/>
-          <a:p>
-            <a:pPr indent="0" marL="0">
-              <a:buNone/>
-            </a:pPr>
-            <a:r>
-              <a:rPr lang="en-US" sz="1200" b="1" spc="200" kern="0" dirty="0">
-                <a:solidFill>
-                  <a:schemeClr val="tx2"/>
-                </a:solidFill>
-              </a:rPr>
-              <a:t>IS</a:t>
-            </a:r>
-            <a:endParaRPr lang="en-US" sz="1200" dirty="0"/>
-          </a:p>
-        </p:txBody>
-      </p:sp>
-      <p:sp>
-        <p:nvSpPr>
-          <p:cNvPr id="5" name="v 0"/>
-          <p:cNvSpPr txBox="1"/>
-          <p:nvPr/>
-        </p:nvSpPr>
-        <p:spPr>
-          <a:xfrm>
-            <a:off x="5120640" y="1307592"/>
-            <a:ext cx="3474720" cy="1051560"/>
-          </a:xfrm>
-          <a:prstGeom prst="rect">
-            <a:avLst/>
-          </a:prstGeom>
-          <a:noFill/>
-          <a:ln/>
-        </p:spPr>
-        <p:txBody>
           <a:bodyPr wrap="square" lIns="0" tIns="0" rIns="0" bIns="0" rtlCol="0" anchor="t"/>
           <a:lstStyle/>
           <a:p>
-            <a:pPr indent="0" marL="0">
-              <a:buNone/>
-            </a:pPr>
-            <a:r>
-              <a:rPr lang="en-US" sz="1400" dirty="0">
+            <a:pPr marL="0" indent="0">
+              <a:buNone/>
+            </a:pPr>
+            <a:r>
+              <a:rPr lang="en-US" dirty="0">
                 <a:solidFill>
                   <a:schemeClr val="tx1"/>
                 </a:solidFill>
               </a:rPr>
-              <a:t>the pieces of reality you actually detect</a:t>
-            </a:r>
-            <a:endParaRPr lang="en-US" sz="1400" dirty="0"/>
-          </a:p>
-        </p:txBody>
-      </p:sp>
-      <p:sp>
-        <p:nvSpPr>
-          <p:cNvPr id="6" name="k 1"/>
-          <p:cNvSpPr txBox="1"/>
-          <p:nvPr/>
-        </p:nvSpPr>
-        <p:spPr>
-          <a:xfrm>
-            <a:off x="4572000" y="2423160"/>
-            <a:ext cx="548640" cy="320040"/>
-          </a:xfrm>
-          <a:prstGeom prst="rect">
-            <a:avLst/>
-          </a:prstGeom>
-          <a:noFill/>
-          <a:ln/>
-        </p:spPr>
-        <p:txBody>
-          <a:bodyPr wrap="square" lIns="0" tIns="0" rIns="0" bIns="0" rtlCol="0" anchor="ctr"/>
-          <a:lstStyle/>
-          <a:p>
-            <a:pPr indent="0" marL="0">
-              <a:buNone/>
-            </a:pPr>
-            <a:r>
-              <a:rPr lang="en-US" sz="1200" b="1" spc="200" kern="0" dirty="0">
-                <a:solidFill>
-                  <a:schemeClr val="tx2"/>
-                </a:solidFill>
-              </a:rPr>
-              <a:t>US</a:t>
-            </a:r>
-            <a:endParaRPr lang="en-US" sz="1200" dirty="0"/>
-          </a:p>
-        </p:txBody>
-      </p:sp>
-      <p:sp>
-        <p:nvSpPr>
-          <p:cNvPr id="7" name="v 1"/>
-          <p:cNvSpPr txBox="1"/>
-          <p:nvPr/>
-        </p:nvSpPr>
-        <p:spPr>
-          <a:xfrm>
-            <a:off x="5120640" y="2404872"/>
-            <a:ext cx="3474720" cy="1051560"/>
-          </a:xfrm>
-          <a:prstGeom prst="rect">
-            <a:avLst/>
-          </a:prstGeom>
-          <a:noFill/>
-          <a:ln/>
-        </p:spPr>
-        <p:txBody>
-          <a:bodyPr wrap="square" lIns="0" tIns="0" rIns="0" bIns="0" rtlCol="0" anchor="t"/>
-          <a:lstStyle/>
-          <a:p>
-            <a:pPr indent="0" marL="0">
-              <a:buNone/>
-            </a:pPr>
-            <a:r>
-              <a:rPr lang="en-US" sz="1400" dirty="0">
-                <a:solidFill>
-                  <a:schemeClr val="tx1"/>
-                </a:solidFill>
-              </a:rPr>
-              <a:t>a body: eyes, ears, skin, memory — built to survive, not to capture total truth. Fails by the blind spot.</a:t>
-            </a:r>
-            <a:endParaRPr lang="en-US" sz="1400" dirty="0"/>
-          </a:p>
-        </p:txBody>
-      </p:sp>
-      <p:sp>
-        <p:nvSpPr>
-          <p:cNvPr id="8" name="k 2"/>
-          <p:cNvSpPr txBox="1"/>
-          <p:nvPr/>
-        </p:nvSpPr>
-        <p:spPr>
-          <a:xfrm>
-            <a:off x="4572000" y="3520440"/>
-            <a:ext cx="548640" cy="320040"/>
-          </a:xfrm>
-          <a:prstGeom prst="rect">
-            <a:avLst/>
-          </a:prstGeom>
-          <a:noFill/>
-          <a:ln/>
-        </p:spPr>
-        <p:txBody>
-          <a:bodyPr wrap="square" lIns="0" tIns="0" rIns="0" bIns="0" rtlCol="0" anchor="ctr"/>
-          <a:lstStyle/>
-          <a:p>
-            <a:pPr indent="0" marL="0">
-              <a:buNone/>
-            </a:pPr>
-            <a:r>
-              <a:rPr lang="en-US" sz="1200" b="1" spc="200" kern="0" dirty="0">
-                <a:solidFill>
-                  <a:schemeClr val="tx2"/>
-                </a:solidFill>
-              </a:rPr>
-              <a:t>AI</a:t>
-            </a:r>
-            <a:endParaRPr lang="en-US" sz="1200" dirty="0"/>
-          </a:p>
-        </p:txBody>
-      </p:sp>
-      <p:sp>
-        <p:nvSpPr>
-          <p:cNvPr id="9" name="v 2"/>
-          <p:cNvSpPr txBox="1"/>
-          <p:nvPr/>
-        </p:nvSpPr>
-        <p:spPr>
-          <a:xfrm>
-            <a:off x="5120640" y="3502152"/>
-            <a:ext cx="3474720" cy="1051560"/>
-          </a:xfrm>
-          <a:prstGeom prst="rect">
-            <a:avLst/>
-          </a:prstGeom>
-          <a:noFill/>
-          <a:ln/>
-        </p:spPr>
-        <p:txBody>
-          <a:bodyPr wrap="square" lIns="0" tIns="0" rIns="0" bIns="0" rtlCol="0" anchor="t"/>
-          <a:lstStyle/>
-          <a:p>
-            <a:pPr indent="0" marL="0">
-              <a:buNone/>
-            </a:pPr>
-            <a:r>
-              <a:rPr lang="en-US" sz="1400" dirty="0">
-                <a:solidFill>
-                  <a:schemeClr val="tx1"/>
-                </a:solidFill>
-              </a:rPr>
-              <a:t>secondhand, and vast. It has read more than any of us and seen less than any of us.</a:t>
-            </a:r>
-            <a:endParaRPr lang="en-US" sz="1400" dirty="0"/>
-          </a:p>
-        </p:txBody>
-      </p:sp>
-      <p:sp>
-        <p:nvSpPr>
-          <p:cNvPr id="11" name="Text 0"/>
-          <p:cNvSpPr/>
-          <p:nvPr>
-            <p:ph idx="101" type="body" hasCustomPrompt="1"/>
-          </p:nvPr>
-        </p:nvSpPr>
-        <p:spPr>
-          <a:xfrm>
-            <a:off x="548640" y="1371600"/>
-            <a:ext cx="8046720" cy="3291840"/>
-          </a:xfrm>
-          <a:prstGeom prst="rect">
-            <a:avLst/>
-          </a:prstGeom>
-          <a:noFill/>
-          <a:ln/>
-        </p:spPr>
-        <p:txBody>
-          <a:bodyPr wrap="square" lIns="0" tIns="0" rIns="0" bIns="0" rtlCol="0" anchor="t"/>
-          <a:lstStyle/>
-          <a:p>
-            <a:pPr indent="0" marL="0">
-              <a:buNone/>
-            </a:pPr>
-            <a:endParaRPr lang="en-US" sz="1800" dirty="0"/>
+              <a:t>the pieces of reality you detect</a:t>
+            </a:r>
+            <a:endParaRPr lang="en-US" dirty="0"/>
           </a:p>
         </p:txBody>
       </p:sp>
@@ -4842,7 +5168,7 @@
 </p:sld>
 </file>
 
-<file path=ppt/slides/slide14.xml><?xml version="1.0" encoding="utf-8"?>
+<file path=ppt/slides/slide15.xml><?xml version="1.0" encoding="utf-8"?>
 <p:sld xmlns:a="http://schemas.openxmlformats.org/drawingml/2006/main" xmlns:r="http://schemas.openxmlformats.org/officeDocument/2006/relationships" xmlns:p="http://schemas.openxmlformats.org/presentationml/2006/main">
   <p:cSld name="Slide 14">
     <p:spTree>
@@ -4862,9 +5188,11 @@
       <p:sp>
         <p:nvSpPr>
           <p:cNvPr id="2" name="Text 0"/>
-          <p:cNvSpPr/>
-          <p:nvPr>
-            <p:ph idx="100" type="title" hasCustomPrompt="1"/>
+          <p:cNvSpPr>
+            <a:spLocks noGrp="1"/>
+          </p:cNvSpPr>
+          <p:nvPr>
+            <p:ph type="title" idx="100" hasCustomPrompt="1"/>
           </p:nvPr>
         </p:nvSpPr>
         <p:spPr>
@@ -4882,7 +5210,7 @@
           <a:bodyPr wrap="square" lIns="0" tIns="0" rIns="0" bIns="0" rtlCol="0" anchor="t"/>
           <a:lstStyle/>
           <a:p>
-            <a:pPr indent="0" marL="0">
+            <a:pPr marL="0" indent="0">
               <a:buNone/>
             </a:pPr>
             <a:r>
@@ -4899,14 +5227,14 @@
       </p:sp>
       <p:pic>
         <p:nvPicPr>
-          <p:cNvPr id="3" name="pyramid" descr="/home/claude/slides/tmp/pyr2.png">    </p:cNvPr>
+          <p:cNvPr id="3" name="pyramid" descr="/home/claude/slides/tmp/pyr2.png"/>
           <p:cNvPicPr>
             <a:picLocks noChangeAspect="1"/>
           </p:cNvPicPr>
           <p:nvPr/>
         </p:nvPicPr>
         <p:blipFill>
-          <a:blip r:embed="rId1"/>
+          <a:blip r:embed="rId3"/>
           <a:stretch>
             <a:fillRect/>
           </a:stretch>
@@ -4923,14 +5251,14 @@
       </p:pic>
       <p:sp>
         <p:nvSpPr>
-          <p:cNvPr id="4" name="k 0"/>
+          <p:cNvPr id="5" name="v 0"/>
           <p:cNvSpPr txBox="1"/>
           <p:nvPr/>
         </p:nvSpPr>
         <p:spPr>
           <a:xfrm>
-            <a:off x="4572000" y="1325880"/>
-            <a:ext cx="548640" cy="320040"/>
+            <a:off x="4526280" y="2732175"/>
+            <a:ext cx="4290398" cy="1051560"/>
           </a:xfrm>
           <a:prstGeom prst="rect">
             <a:avLst/>
@@ -4939,231 +5267,21 @@
           <a:ln/>
         </p:spPr>
         <p:txBody>
-          <a:bodyPr wrap="square" lIns="0" tIns="0" rIns="0" bIns="0" rtlCol="0" anchor="ctr"/>
-          <a:lstStyle/>
-          <a:p>
-            <a:pPr indent="0" marL="0">
-              <a:buNone/>
-            </a:pPr>
-            <a:r>
-              <a:rPr lang="en-US" sz="1200" b="1" spc="200" kern="0" dirty="0">
-                <a:solidFill>
-                  <a:schemeClr val="tx2"/>
-                </a:solidFill>
-              </a:rPr>
-              <a:t>IS</a:t>
-            </a:r>
-            <a:endParaRPr lang="en-US" sz="1200" dirty="0"/>
-          </a:p>
-        </p:txBody>
-      </p:sp>
-      <p:sp>
-        <p:nvSpPr>
-          <p:cNvPr id="5" name="v 0"/>
-          <p:cNvSpPr txBox="1"/>
-          <p:nvPr/>
-        </p:nvSpPr>
-        <p:spPr>
-          <a:xfrm>
-            <a:off x="5120640" y="1307592"/>
-            <a:ext cx="3474720" cy="1051560"/>
-          </a:xfrm>
-          <a:prstGeom prst="rect">
-            <a:avLst/>
-          </a:prstGeom>
-          <a:noFill/>
-          <a:ln/>
-        </p:spPr>
-        <p:txBody>
           <a:bodyPr wrap="square" lIns="0" tIns="0" rIns="0" bIns="0" rtlCol="0" anchor="t"/>
           <a:lstStyle/>
           <a:p>
-            <a:pPr indent="0" marL="0">
-              <a:buNone/>
-            </a:pPr>
-            <a:r>
-              <a:rPr lang="en-US" sz="1400" dirty="0">
+            <a:pPr marL="0" indent="0">
+              <a:buNone/>
+            </a:pPr>
+            <a:r>
+              <a:rPr lang="en-US" sz="1600" dirty="0">
                 <a:solidFill>
                   <a:schemeClr val="tx1"/>
                 </a:solidFill>
               </a:rPr>
-              <a:t>the patterns made when data is connected — frames, stories you can use to act</a:t>
-            </a:r>
-            <a:endParaRPr lang="en-US" sz="1400" dirty="0"/>
-          </a:p>
-        </p:txBody>
-      </p:sp>
-      <p:sp>
-        <p:nvSpPr>
-          <p:cNvPr id="6" name="k 1"/>
-          <p:cNvSpPr txBox="1"/>
-          <p:nvPr/>
-        </p:nvSpPr>
-        <p:spPr>
-          <a:xfrm>
-            <a:off x="4572000" y="2423160"/>
-            <a:ext cx="548640" cy="320040"/>
-          </a:xfrm>
-          <a:prstGeom prst="rect">
-            <a:avLst/>
-          </a:prstGeom>
-          <a:noFill/>
-          <a:ln/>
-        </p:spPr>
-        <p:txBody>
-          <a:bodyPr wrap="square" lIns="0" tIns="0" rIns="0" bIns="0" rtlCol="0" anchor="ctr"/>
-          <a:lstStyle/>
-          <a:p>
-            <a:pPr indent="0" marL="0">
-              <a:buNone/>
-            </a:pPr>
-            <a:r>
-              <a:rPr lang="en-US" sz="1200" b="1" spc="200" kern="0" dirty="0">
-                <a:solidFill>
-                  <a:schemeClr val="tx2"/>
-                </a:solidFill>
-              </a:rPr>
-              <a:t>US</a:t>
-            </a:r>
-            <a:endParaRPr lang="en-US" sz="1200" dirty="0"/>
-          </a:p>
-        </p:txBody>
-      </p:sp>
-      <p:sp>
-        <p:nvSpPr>
-          <p:cNvPr id="7" name="v 1"/>
-          <p:cNvSpPr txBox="1"/>
-          <p:nvPr/>
-        </p:nvSpPr>
-        <p:spPr>
-          <a:xfrm>
-            <a:off x="5120640" y="2404872"/>
-            <a:ext cx="3474720" cy="1051560"/>
-          </a:xfrm>
-          <a:prstGeom prst="rect">
-            <a:avLst/>
-          </a:prstGeom>
-          <a:noFill/>
-          <a:ln/>
-        </p:spPr>
-        <p:txBody>
-          <a:bodyPr wrap="square" lIns="0" tIns="0" rIns="0" bIns="0" rtlCol="0" anchor="t"/>
-          <a:lstStyle/>
-          <a:p>
-            <a:pPr indent="0" marL="0">
-              <a:buNone/>
-            </a:pPr>
-            <a:r>
-              <a:rPr lang="en-US" sz="1400" dirty="0">
-                <a:solidFill>
-                  <a:schemeClr val="tx1"/>
-                </a:solidFill>
-              </a:rPr>
-              <a:t>we assemble what we detect into a story we can act on, fast and mostly unnoticed — a dune into a movie scene. Fails when a frame feels true before it has been checked.</a:t>
-            </a:r>
-            <a:endParaRPr lang="en-US" sz="1400" dirty="0"/>
-          </a:p>
-        </p:txBody>
-      </p:sp>
-      <p:sp>
-        <p:nvSpPr>
-          <p:cNvPr id="8" name="k 2"/>
-          <p:cNvSpPr txBox="1"/>
-          <p:nvPr/>
-        </p:nvSpPr>
-        <p:spPr>
-          <a:xfrm>
-            <a:off x="4572000" y="3520440"/>
-            <a:ext cx="548640" cy="320040"/>
-          </a:xfrm>
-          <a:prstGeom prst="rect">
-            <a:avLst/>
-          </a:prstGeom>
-          <a:noFill/>
-          <a:ln/>
-        </p:spPr>
-        <p:txBody>
-          <a:bodyPr wrap="square" lIns="0" tIns="0" rIns="0" bIns="0" rtlCol="0" anchor="ctr"/>
-          <a:lstStyle/>
-          <a:p>
-            <a:pPr indent="0" marL="0">
-              <a:buNone/>
-            </a:pPr>
-            <a:r>
-              <a:rPr lang="en-US" sz="1200" b="1" spc="200" kern="0" dirty="0">
-                <a:solidFill>
-                  <a:schemeClr val="tx2"/>
-                </a:solidFill>
-              </a:rPr>
-              <a:t>AI</a:t>
-            </a:r>
-            <a:endParaRPr lang="en-US" sz="1200" dirty="0"/>
-          </a:p>
-        </p:txBody>
-      </p:sp>
-      <p:sp>
-        <p:nvSpPr>
-          <p:cNvPr id="9" name="v 2"/>
-          <p:cNvSpPr txBox="1"/>
-          <p:nvPr/>
-        </p:nvSpPr>
-        <p:spPr>
-          <a:xfrm>
-            <a:off x="5120640" y="3502152"/>
-            <a:ext cx="3474720" cy="1051560"/>
-          </a:xfrm>
-          <a:prstGeom prst="rect">
-            <a:avLst/>
-          </a:prstGeom>
-          <a:noFill/>
-          <a:ln/>
-        </p:spPr>
-        <p:txBody>
-          <a:bodyPr wrap="square" lIns="0" tIns="0" rIns="0" bIns="0" rtlCol="0" anchor="t"/>
-          <a:lstStyle/>
-          <a:p>
-            <a:pPr indent="0" marL="0">
-              <a:buNone/>
-            </a:pPr>
-            <a:r>
-              <a:rPr lang="en-US" sz="1400" dirty="0">
-                <a:solidFill>
-                  <a:schemeClr val="tx1"/>
-                </a:solidFill>
-              </a:rPr>
-              <a:t>a pattern machine; finding patterns is what it does best. Fails the same way, faster and in better grammar: a pattern unmoored from reality.</a:t>
-            </a:r>
-            <a:endParaRPr lang="en-US" sz="1400" dirty="0"/>
-          </a:p>
-        </p:txBody>
-      </p:sp>
-      <p:sp>
-        <p:nvSpPr>
-          <p:cNvPr id="11" name="Text 0"/>
-          <p:cNvSpPr/>
-          <p:nvPr>
-            <p:ph idx="101" type="body" hasCustomPrompt="1"/>
-          </p:nvPr>
-        </p:nvSpPr>
-        <p:spPr>
-          <a:xfrm>
-            <a:off x="548640" y="1371600"/>
-            <a:ext cx="8046720" cy="3291840"/>
-          </a:xfrm>
-          <a:prstGeom prst="rect">
-            <a:avLst/>
-          </a:prstGeom>
-          <a:noFill/>
-          <a:ln/>
-        </p:spPr>
-        <p:txBody>
-          <a:bodyPr wrap="square" lIns="0" tIns="0" rIns="0" bIns="0" rtlCol="0" anchor="t"/>
-          <a:lstStyle/>
-          <a:p>
-            <a:pPr indent="0" marL="0">
-              <a:buNone/>
-            </a:pPr>
-            <a:endParaRPr lang="en-US" sz="1800" dirty="0"/>
+              <a:t>the patterns made when data is connected — models, frames, stories you can use to act</a:t>
+            </a:r>
+            <a:endParaRPr lang="en-US" sz="1600" dirty="0"/>
           </a:p>
         </p:txBody>
       </p:sp>
@@ -5175,7 +5293,7 @@
 </p:sld>
 </file>
 
-<file path=ppt/slides/slide15.xml><?xml version="1.0" encoding="utf-8"?>
+<file path=ppt/slides/slide16.xml><?xml version="1.0" encoding="utf-8"?>
 <p:sld xmlns:a="http://schemas.openxmlformats.org/drawingml/2006/main" xmlns:r="http://schemas.openxmlformats.org/officeDocument/2006/relationships" xmlns:p="http://schemas.openxmlformats.org/presentationml/2006/main">
   <p:cSld name="Slide 15">
     <p:spTree>
@@ -5195,9 +5313,11 @@
       <p:sp>
         <p:nvSpPr>
           <p:cNvPr id="2" name="Text 0"/>
-          <p:cNvSpPr/>
-          <p:nvPr>
-            <p:ph idx="100" type="title" hasCustomPrompt="1"/>
+          <p:cNvSpPr>
+            <a:spLocks noGrp="1"/>
+          </p:cNvSpPr>
+          <p:nvPr>
+            <p:ph type="title" idx="100" hasCustomPrompt="1"/>
           </p:nvPr>
         </p:nvSpPr>
         <p:spPr>
@@ -5215,7 +5335,7 @@
           <a:bodyPr wrap="square" lIns="0" tIns="0" rIns="0" bIns="0" rtlCol="0" anchor="t"/>
           <a:lstStyle/>
           <a:p>
-            <a:pPr indent="0" marL="0">
+            <a:pPr marL="0" indent="0">
               <a:buNone/>
             </a:pPr>
             <a:r>
@@ -5232,14 +5352,14 @@
       </p:sp>
       <p:pic>
         <p:nvPicPr>
-          <p:cNvPr id="3" name="pyramid" descr="/home/claude/slides/tmp/pyr3.png">    </p:cNvPr>
+          <p:cNvPr id="3" name="pyramid" descr="/home/claude/slides/tmp/pyr3.png"/>
           <p:cNvPicPr>
             <a:picLocks noChangeAspect="1"/>
           </p:cNvPicPr>
           <p:nvPr/>
         </p:nvPicPr>
         <p:blipFill>
-          <a:blip r:embed="rId1"/>
+          <a:blip r:embed="rId3"/>
           <a:stretch>
             <a:fillRect/>
           </a:stretch>
@@ -5256,14 +5376,14 @@
       </p:pic>
       <p:sp>
         <p:nvSpPr>
-          <p:cNvPr id="4" name="k 0"/>
+          <p:cNvPr id="5" name="v 0"/>
           <p:cNvSpPr txBox="1"/>
           <p:nvPr/>
         </p:nvSpPr>
         <p:spPr>
           <a:xfrm>
-            <a:off x="4572000" y="1325880"/>
-            <a:ext cx="548640" cy="320040"/>
+            <a:off x="4392357" y="2240280"/>
+            <a:ext cx="3474720" cy="1051560"/>
           </a:xfrm>
           <a:prstGeom prst="rect">
             <a:avLst/>
@@ -5272,231 +5392,21 @@
           <a:ln/>
         </p:spPr>
         <p:txBody>
-          <a:bodyPr wrap="square" lIns="0" tIns="0" rIns="0" bIns="0" rtlCol="0" anchor="ctr"/>
-          <a:lstStyle/>
-          <a:p>
-            <a:pPr indent="0" marL="0">
-              <a:buNone/>
-            </a:pPr>
-            <a:r>
-              <a:rPr lang="en-US" sz="1200" b="1" spc="200" kern="0" dirty="0">
-                <a:solidFill>
-                  <a:schemeClr val="tx2"/>
-                </a:solidFill>
-              </a:rPr>
-              <a:t>IS</a:t>
-            </a:r>
-            <a:endParaRPr lang="en-US" sz="1200" dirty="0"/>
-          </a:p>
-        </p:txBody>
-      </p:sp>
-      <p:sp>
-        <p:nvSpPr>
-          <p:cNvPr id="5" name="v 0"/>
-          <p:cNvSpPr txBox="1"/>
-          <p:nvPr/>
-        </p:nvSpPr>
-        <p:spPr>
-          <a:xfrm>
-            <a:off x="5120640" y="1307592"/>
-            <a:ext cx="3474720" cy="1051560"/>
-          </a:xfrm>
-          <a:prstGeom prst="rect">
-            <a:avLst/>
-          </a:prstGeom>
-          <a:noFill/>
-          <a:ln/>
-        </p:spPr>
-        <p:txBody>
           <a:bodyPr wrap="square" lIns="0" tIns="0" rIns="0" bIns="0" rtlCol="0" anchor="t"/>
           <a:lstStyle/>
           <a:p>
-            <a:pPr indent="0" marL="0">
-              <a:buNone/>
-            </a:pPr>
-            <a:r>
-              <a:rPr lang="en-US" sz="1400" dirty="0">
+            <a:pPr marL="0" indent="0">
+              <a:buNone/>
+            </a:pPr>
+            <a:r>
+              <a:rPr lang="en-US" sz="1600" dirty="0">
                 <a:solidFill>
                   <a:schemeClr val="tx1"/>
                 </a:solidFill>
               </a:rPr>
-              <a:t>connected information — the lessons of past patterns, carried into new situations. A model of the world, and of yourself as a knower.</a:t>
-            </a:r>
-            <a:endParaRPr lang="en-US" sz="1400" dirty="0"/>
-          </a:p>
-        </p:txBody>
-      </p:sp>
-      <p:sp>
-        <p:nvSpPr>
-          <p:cNvPr id="6" name="k 1"/>
-          <p:cNvSpPr txBox="1"/>
-          <p:nvPr/>
-        </p:nvSpPr>
-        <p:spPr>
-          <a:xfrm>
-            <a:off x="4572000" y="2423160"/>
-            <a:ext cx="548640" cy="320040"/>
-          </a:xfrm>
-          <a:prstGeom prst="rect">
-            <a:avLst/>
-          </a:prstGeom>
-          <a:noFill/>
-          <a:ln/>
-        </p:spPr>
-        <p:txBody>
-          <a:bodyPr wrap="square" lIns="0" tIns="0" rIns="0" bIns="0" rtlCol="0" anchor="ctr"/>
-          <a:lstStyle/>
-          <a:p>
-            <a:pPr indent="0" marL="0">
-              <a:buNone/>
-            </a:pPr>
-            <a:r>
-              <a:rPr lang="en-US" sz="1200" b="1" spc="200" kern="0" dirty="0">
-                <a:solidFill>
-                  <a:schemeClr val="tx2"/>
-                </a:solidFill>
-              </a:rPr>
-              <a:t>US</a:t>
-            </a:r>
-            <a:endParaRPr lang="en-US" sz="1200" dirty="0"/>
-          </a:p>
-        </p:txBody>
-      </p:sp>
-      <p:sp>
-        <p:nvSpPr>
-          <p:cNvPr id="7" name="v 1"/>
-          <p:cNvSpPr txBox="1"/>
-          <p:nvPr/>
-        </p:nvSpPr>
-        <p:spPr>
-          <a:xfrm>
-            <a:off x="5120640" y="2404872"/>
-            <a:ext cx="3474720" cy="1051560"/>
-          </a:xfrm>
-          <a:prstGeom prst="rect">
-            <a:avLst/>
-          </a:prstGeom>
-          <a:noFill/>
-          <a:ln/>
-        </p:spPr>
-        <p:txBody>
-          <a:bodyPr wrap="square" lIns="0" tIns="0" rIns="0" bIns="0" rtlCol="0" anchor="t"/>
-          <a:lstStyle/>
-          <a:p>
-            <a:pPr indent="0" marL="0">
-              <a:buNone/>
-            </a:pPr>
-            <a:r>
-              <a:rPr lang="en-US" sz="1400" dirty="0">
-                <a:solidFill>
-                  <a:schemeClr val="tx1"/>
-                </a:solidFill>
-              </a:rPr>
-              <a:t>slow: experience, feedback, the humbling work of being wrong. Information improves the frame; knowledge improves the agent using it.</a:t>
-            </a:r>
-            <a:endParaRPr lang="en-US" sz="1400" dirty="0"/>
-          </a:p>
-        </p:txBody>
-      </p:sp>
-      <p:sp>
-        <p:nvSpPr>
-          <p:cNvPr id="8" name="k 2"/>
-          <p:cNvSpPr txBox="1"/>
-          <p:nvPr/>
-        </p:nvSpPr>
-        <p:spPr>
-          <a:xfrm>
-            <a:off x="4572000" y="3520440"/>
-            <a:ext cx="548640" cy="320040"/>
-          </a:xfrm>
-          <a:prstGeom prst="rect">
-            <a:avLst/>
-          </a:prstGeom>
-          <a:noFill/>
-          <a:ln/>
-        </p:spPr>
-        <p:txBody>
-          <a:bodyPr wrap="square" lIns="0" tIns="0" rIns="0" bIns="0" rtlCol="0" anchor="ctr"/>
-          <a:lstStyle/>
-          <a:p>
-            <a:pPr indent="0" marL="0">
-              <a:buNone/>
-            </a:pPr>
-            <a:r>
-              <a:rPr lang="en-US" sz="1200" b="1" spc="200" kern="0" dirty="0">
-                <a:solidFill>
-                  <a:schemeClr val="tx2"/>
-                </a:solidFill>
-              </a:rPr>
-              <a:t>AI</a:t>
-            </a:r>
-            <a:endParaRPr lang="en-US" sz="1200" dirty="0"/>
-          </a:p>
-        </p:txBody>
-      </p:sp>
-      <p:sp>
-        <p:nvSpPr>
-          <p:cNvPr id="9" name="v 2"/>
-          <p:cNvSpPr txBox="1"/>
-          <p:nvPr/>
-        </p:nvSpPr>
-        <p:spPr>
-          <a:xfrm>
-            <a:off x="5120640" y="3502152"/>
-            <a:ext cx="3474720" cy="1051560"/>
-          </a:xfrm>
-          <a:prstGeom prst="rect">
-            <a:avLst/>
-          </a:prstGeom>
-          <a:noFill/>
-          <a:ln/>
-        </p:spPr>
-        <p:txBody>
-          <a:bodyPr wrap="square" lIns="0" tIns="0" rIns="0" bIns="0" rtlCol="0" anchor="t"/>
-          <a:lstStyle/>
-          <a:p>
-            <a:pPr indent="0" marL="0">
-              <a:buNone/>
-            </a:pPr>
-            <a:r>
-              <a:rPr lang="en-US" sz="1400" dirty="0">
-                <a:solidFill>
-                  <a:schemeClr val="tx1"/>
-                </a:solidFill>
-              </a:rPr>
-              <a:t>climbing it now — recursive self-improvement, AI building the next AI. Months, not decades. Can’t yet decide what better means.</a:t>
-            </a:r>
-            <a:endParaRPr lang="en-US" sz="1400" dirty="0"/>
-          </a:p>
-        </p:txBody>
-      </p:sp>
-      <p:sp>
-        <p:nvSpPr>
-          <p:cNvPr id="11" name="Text 0"/>
-          <p:cNvSpPr/>
-          <p:nvPr>
-            <p:ph idx="101" type="body" hasCustomPrompt="1"/>
-          </p:nvPr>
-        </p:nvSpPr>
-        <p:spPr>
-          <a:xfrm>
-            <a:off x="548640" y="1371600"/>
-            <a:ext cx="8046720" cy="3291840"/>
-          </a:xfrm>
-          <a:prstGeom prst="rect">
-            <a:avLst/>
-          </a:prstGeom>
-          <a:noFill/>
-          <a:ln/>
-        </p:spPr>
-        <p:txBody>
-          <a:bodyPr wrap="square" lIns="0" tIns="0" rIns="0" bIns="0" rtlCol="0" anchor="t"/>
-          <a:lstStyle/>
-          <a:p>
-            <a:pPr indent="0" marL="0">
-              <a:buNone/>
-            </a:pPr>
-            <a:endParaRPr lang="en-US" sz="1800" dirty="0"/>
+              <a:t>connected information — the lessons of past patterns, carried into new situations. </a:t>
+            </a:r>
+            <a:endParaRPr lang="en-US" sz="1600" dirty="0"/>
           </a:p>
         </p:txBody>
       </p:sp>
@@ -5508,7 +5418,7 @@
 </p:sld>
 </file>
 
-<file path=ppt/slides/slide16.xml><?xml version="1.0" encoding="utf-8"?>
+<file path=ppt/slides/slide17.xml><?xml version="1.0" encoding="utf-8"?>
 <p:sld xmlns:a="http://schemas.openxmlformats.org/drawingml/2006/main" xmlns:r="http://schemas.openxmlformats.org/officeDocument/2006/relationships" xmlns:p="http://schemas.openxmlformats.org/presentationml/2006/main">
   <p:cSld name="Slide 16">
     <p:spTree>
@@ -5528,9 +5438,11 @@
       <p:sp>
         <p:nvSpPr>
           <p:cNvPr id="2" name="Text 0"/>
-          <p:cNvSpPr/>
-          <p:nvPr>
-            <p:ph idx="100" type="title" hasCustomPrompt="1"/>
+          <p:cNvSpPr>
+            <a:spLocks noGrp="1"/>
+          </p:cNvSpPr>
+          <p:nvPr>
+            <p:ph type="title" idx="100" hasCustomPrompt="1"/>
           </p:nvPr>
         </p:nvSpPr>
         <p:spPr>
@@ -5548,7 +5460,7 @@
           <a:bodyPr wrap="square" lIns="0" tIns="0" rIns="0" bIns="0" rtlCol="0" anchor="t"/>
           <a:lstStyle/>
           <a:p>
-            <a:pPr indent="0" marL="0">
+            <a:pPr marL="0" indent="0">
               <a:buNone/>
             </a:pPr>
             <a:r>
@@ -5565,14 +5477,14 @@
       </p:sp>
       <p:pic>
         <p:nvPicPr>
-          <p:cNvPr id="3" name="pyramid" descr="/home/claude/slides/tmp/pyr4.png">    </p:cNvPr>
+          <p:cNvPr id="3" name="pyramid" descr="/home/claude/slides/tmp/pyr4.png"/>
           <p:cNvPicPr>
             <a:picLocks noChangeAspect="1"/>
           </p:cNvPicPr>
           <p:nvPr/>
         </p:nvPicPr>
         <p:blipFill>
-          <a:blip r:embed="rId1"/>
+          <a:blip r:embed="rId3"/>
           <a:stretch>
             <a:fillRect/>
           </a:stretch>
@@ -5589,14 +5501,14 @@
       </p:pic>
       <p:sp>
         <p:nvSpPr>
-          <p:cNvPr id="4" name="k 0"/>
+          <p:cNvPr id="5" name="v 0"/>
           <p:cNvSpPr txBox="1"/>
           <p:nvPr/>
         </p:nvSpPr>
         <p:spPr>
           <a:xfrm>
-            <a:off x="4572000" y="1325880"/>
-            <a:ext cx="548640" cy="320040"/>
+            <a:off x="4012032" y="1946660"/>
+            <a:ext cx="4686906" cy="1051560"/>
           </a:xfrm>
           <a:prstGeom prst="rect">
             <a:avLst/>
@@ -5605,231 +5517,21 @@
           <a:ln/>
         </p:spPr>
         <p:txBody>
-          <a:bodyPr wrap="square" lIns="0" tIns="0" rIns="0" bIns="0" rtlCol="0" anchor="ctr"/>
-          <a:lstStyle/>
-          <a:p>
-            <a:pPr indent="0" marL="0">
-              <a:buNone/>
-            </a:pPr>
-            <a:r>
-              <a:rPr lang="en-US" sz="1200" b="1" spc="200" kern="0" dirty="0">
-                <a:solidFill>
-                  <a:schemeClr val="tx2"/>
-                </a:solidFill>
-              </a:rPr>
-              <a:t>IS</a:t>
-            </a:r>
-            <a:endParaRPr lang="en-US" sz="1200" dirty="0"/>
-          </a:p>
-        </p:txBody>
-      </p:sp>
-      <p:sp>
-        <p:nvSpPr>
-          <p:cNvPr id="5" name="v 0"/>
-          <p:cNvSpPr txBox="1"/>
-          <p:nvPr/>
-        </p:nvSpPr>
-        <p:spPr>
-          <a:xfrm>
-            <a:off x="5120640" y="1307592"/>
-            <a:ext cx="3474720" cy="1051560"/>
-          </a:xfrm>
-          <a:prstGeom prst="rect">
-            <a:avLst/>
-          </a:prstGeom>
-          <a:noFill/>
-          <a:ln/>
-        </p:spPr>
-        <p:txBody>
           <a:bodyPr wrap="square" lIns="0" tIns="0" rIns="0" bIns="0" rtlCol="0" anchor="t"/>
           <a:lstStyle/>
           <a:p>
-            <a:pPr indent="0" marL="0">
-              <a:buNone/>
-            </a:pPr>
-            <a:r>
-              <a:rPr lang="en-US" sz="1400" dirty="0">
+            <a:pPr marL="0" indent="0">
+              <a:buNone/>
+            </a:pPr>
+            <a:r>
+              <a:rPr lang="en-US" sz="1600" dirty="0">
                 <a:solidFill>
                   <a:schemeClr val="tx1"/>
                 </a:solidFill>
               </a:rPr>
               <a:t>when an agent understands reality, decides its place and purpose in it, and acts in accordance</a:t>
             </a:r>
-            <a:endParaRPr lang="en-US" sz="1400" dirty="0"/>
-          </a:p>
-        </p:txBody>
-      </p:sp>
-      <p:sp>
-        <p:nvSpPr>
-          <p:cNvPr id="6" name="k 1"/>
-          <p:cNvSpPr txBox="1"/>
-          <p:nvPr/>
-        </p:nvSpPr>
-        <p:spPr>
-          <a:xfrm>
-            <a:off x="4572000" y="2423160"/>
-            <a:ext cx="548640" cy="320040"/>
-          </a:xfrm>
-          <a:prstGeom prst="rect">
-            <a:avLst/>
-          </a:prstGeom>
-          <a:noFill/>
-          <a:ln/>
-        </p:spPr>
-        <p:txBody>
-          <a:bodyPr wrap="square" lIns="0" tIns="0" rIns="0" bIns="0" rtlCol="0" anchor="ctr"/>
-          <a:lstStyle/>
-          <a:p>
-            <a:pPr indent="0" marL="0">
-              <a:buNone/>
-            </a:pPr>
-            <a:r>
-              <a:rPr lang="en-US" sz="1200" b="1" spc="200" kern="0" dirty="0">
-                <a:solidFill>
-                  <a:schemeClr val="tx2"/>
-                </a:solidFill>
-              </a:rPr>
-              <a:t>US</a:t>
-            </a:r>
-            <a:endParaRPr lang="en-US" sz="1200" dirty="0"/>
-          </a:p>
-        </p:txBody>
-      </p:sp>
-      <p:sp>
-        <p:nvSpPr>
-          <p:cNvPr id="7" name="v 1"/>
-          <p:cNvSpPr txBox="1"/>
-          <p:nvPr/>
-        </p:nvSpPr>
-        <p:spPr>
-          <a:xfrm>
-            <a:off x="5120640" y="2404872"/>
-            <a:ext cx="3474720" cy="1051560"/>
-          </a:xfrm>
-          <a:prstGeom prst="rect">
-            <a:avLst/>
-          </a:prstGeom>
-          <a:noFill/>
-          <a:ln/>
-        </p:spPr>
-        <p:txBody>
-          <a:bodyPr wrap="square" lIns="0" tIns="0" rIns="0" bIns="0" rtlCol="0" anchor="t"/>
-          <a:lstStyle/>
-          <a:p>
-            <a:pPr indent="0" marL="0">
-              <a:buNone/>
-            </a:pPr>
-            <a:r>
-              <a:rPr lang="en-US" sz="1400" dirty="0">
-                <a:solidFill>
-                  <a:schemeClr val="tx1"/>
-                </a:solidFill>
-              </a:rPr>
-              <a:t>we are the ones who think existentially — about the meaning of life, and the meaning in life — and let the answer point us forward.</a:t>
-            </a:r>
-            <a:endParaRPr lang="en-US" sz="1400" dirty="0"/>
-          </a:p>
-        </p:txBody>
-      </p:sp>
-      <p:sp>
-        <p:nvSpPr>
-          <p:cNvPr id="8" name="k 2"/>
-          <p:cNvSpPr txBox="1"/>
-          <p:nvPr/>
-        </p:nvSpPr>
-        <p:spPr>
-          <a:xfrm>
-            <a:off x="4572000" y="3520440"/>
-            <a:ext cx="548640" cy="320040"/>
-          </a:xfrm>
-          <a:prstGeom prst="rect">
-            <a:avLst/>
-          </a:prstGeom>
-          <a:noFill/>
-          <a:ln/>
-        </p:spPr>
-        <p:txBody>
-          <a:bodyPr wrap="square" lIns="0" tIns="0" rIns="0" bIns="0" rtlCol="0" anchor="ctr"/>
-          <a:lstStyle/>
-          <a:p>
-            <a:pPr indent="0" marL="0">
-              <a:buNone/>
-            </a:pPr>
-            <a:r>
-              <a:rPr lang="en-US" sz="1200" b="1" spc="200" kern="0" dirty="0">
-                <a:solidFill>
-                  <a:schemeClr val="tx2"/>
-                </a:solidFill>
-              </a:rPr>
-              <a:t>AI</a:t>
-            </a:r>
-            <a:endParaRPr lang="en-US" sz="1200" dirty="0"/>
-          </a:p>
-        </p:txBody>
-      </p:sp>
-      <p:sp>
-        <p:nvSpPr>
-          <p:cNvPr id="9" name="v 2"/>
-          <p:cNvSpPr txBox="1"/>
-          <p:nvPr/>
-        </p:nvSpPr>
-        <p:spPr>
-          <a:xfrm>
-            <a:off x="5120640" y="3502152"/>
-            <a:ext cx="3474720" cy="1051560"/>
-          </a:xfrm>
-          <a:prstGeom prst="rect">
-            <a:avLst/>
-          </a:prstGeom>
-          <a:noFill/>
-          <a:ln/>
-        </p:spPr>
-        <p:txBody>
-          <a:bodyPr wrap="square" lIns="0" tIns="0" rIns="0" bIns="0" rtlCol="0" anchor="t"/>
-          <a:lstStyle/>
-          <a:p>
-            <a:pPr indent="0" marL="0">
-              <a:buNone/>
-            </a:pPr>
-            <a:r>
-              <a:rPr lang="en-US" sz="1400" dirty="0">
-                <a:solidFill>
-                  <a:schemeClr val="tx1"/>
-                </a:solidFill>
-              </a:rPr>
-              <a:t>doesn’t build this layer for itself. We hand it its purpose; increasingly it interprets what the words mean. Right now, the summit of every AI pyramid is occupied by a human.</a:t>
-            </a:r>
-            <a:endParaRPr lang="en-US" sz="1400" dirty="0"/>
-          </a:p>
-        </p:txBody>
-      </p:sp>
-      <p:sp>
-        <p:nvSpPr>
-          <p:cNvPr id="11" name="Text 0"/>
-          <p:cNvSpPr/>
-          <p:nvPr>
-            <p:ph idx="101" type="body" hasCustomPrompt="1"/>
-          </p:nvPr>
-        </p:nvSpPr>
-        <p:spPr>
-          <a:xfrm>
-            <a:off x="548640" y="1371600"/>
-            <a:ext cx="8046720" cy="3291840"/>
-          </a:xfrm>
-          <a:prstGeom prst="rect">
-            <a:avLst/>
-          </a:prstGeom>
-          <a:noFill/>
-          <a:ln/>
-        </p:spPr>
-        <p:txBody>
-          <a:bodyPr wrap="square" lIns="0" tIns="0" rIns="0" bIns="0" rtlCol="0" anchor="t"/>
-          <a:lstStyle/>
-          <a:p>
-            <a:pPr indent="0" marL="0">
-              <a:buNone/>
-            </a:pPr>
-            <a:endParaRPr lang="en-US" sz="1800" dirty="0"/>
+            <a:endParaRPr lang="en-US" sz="1600" dirty="0"/>
           </a:p>
         </p:txBody>
       </p:sp>
@@ -5841,7 +5543,7 @@
 </p:sld>
 </file>
 
-<file path=ppt/slides/slide17.xml><?xml version="1.0" encoding="utf-8"?>
+<file path=ppt/slides/slide18.xml><?xml version="1.0" encoding="utf-8"?>
 <p:sld xmlns:a="http://schemas.openxmlformats.org/drawingml/2006/main" xmlns:r="http://schemas.openxmlformats.org/officeDocument/2006/relationships" xmlns:p="http://schemas.openxmlformats.org/presentationml/2006/main">
   <p:cSld name="Slide 17">
     <p:spTree>
@@ -5861,14 +5563,16 @@
       <p:sp>
         <p:nvSpPr>
           <p:cNvPr id="2" name="Text 0"/>
-          <p:cNvSpPr/>
-          <p:nvPr>
-            <p:ph idx="100" type="title" hasCustomPrompt="1"/>
-          </p:nvPr>
-        </p:nvSpPr>
-        <p:spPr>
-          <a:xfrm>
-            <a:off x="548640" y="411480"/>
+          <p:cNvSpPr>
+            <a:spLocks noGrp="1"/>
+          </p:cNvSpPr>
+          <p:nvPr>
+            <p:ph type="title" idx="100" hasCustomPrompt="1"/>
+          </p:nvPr>
+        </p:nvSpPr>
+        <p:spPr>
+          <a:xfrm>
+            <a:off x="-426720" y="309879"/>
             <a:ext cx="8046720" cy="822960"/>
           </a:xfrm>
           <a:prstGeom prst="rect">
@@ -5881,7 +5585,7 @@
           <a:bodyPr wrap="square" lIns="0" tIns="0" rIns="0" bIns="0" rtlCol="0" anchor="t"/>
           <a:lstStyle/>
           <a:p>
-            <a:pPr indent="0" marL="0">
+            <a:pPr marL="0" indent="0">
               <a:buNone/>
             </a:pPr>
             <a:r>
@@ -5890,7 +5594,7 @@
                   <a:schemeClr val="tx1"/>
                 </a:solidFill>
               </a:rPr>
-              <a:t>Not compete. Partner.</a:t>
+              <a:t>Not control or compete. Partner.</a:t>
             </a:r>
             <a:endParaRPr lang="en-US" sz="3400" dirty="0"/>
           </a:p>
@@ -5898,22 +5602,23 @@
       </p:sp>
       <p:pic>
         <p:nvPicPr>
-          <p:cNvPr id="3" name="pyramid over time" descr="/home/claude/slides/tmp/pyrAI.png">    </p:cNvPr>
+          <p:cNvPr id="3" name="pyramid over time" descr="/home/claude/slides/tmp/pyrAI.png"/>
           <p:cNvPicPr>
             <a:picLocks noChangeAspect="1"/>
           </p:cNvPicPr>
           <p:nvPr/>
         </p:nvPicPr>
         <p:blipFill>
-          <a:blip r:embed="rId1"/>
+          <a:blip r:embed="rId3"/>
+          <a:srcRect t="22743" r="39547" b="17372"/>
           <a:stretch>
             <a:fillRect/>
           </a:stretch>
         </p:blipFill>
         <p:spPr>
           <a:xfrm>
-            <a:off x="274320" y="1005840"/>
-            <a:ext cx="6949440" cy="3657600"/>
+            <a:off x="375920" y="2062479"/>
+            <a:ext cx="3566160" cy="1859281"/>
           </a:xfrm>
           <a:prstGeom prst="rect">
             <a:avLst/>
@@ -5941,7 +5646,7 @@
           <a:bodyPr wrap="square" lIns="0" tIns="0" rIns="0" bIns="0" rtlCol="0" anchor="t"/>
           <a:lstStyle/>
           <a:p>
-            <a:pPr indent="0" marL="0">
+            <a:pPr marL="0" indent="0">
               <a:buNone/>
             </a:pPr>
             <a:r>
@@ -5952,19 +5657,16 @@
               </a:rPr>
               <a:t>One layer left.</a:t>
             </a:r>
-            <a:pPr indent="0" marL="0">
-              <a:buNone/>
-            </a:pPr>
             <a:endParaRPr lang="en-US" sz="1300" dirty="0"/>
           </a:p>
           <a:p>
-            <a:pPr indent="0" marL="0">
+            <a:pPr marL="0" indent="0">
               <a:buNone/>
             </a:pPr>
             <a:endParaRPr lang="en-US" sz="1300" dirty="0"/>
           </a:p>
           <a:p>
-            <a:pPr indent="0" marL="0">
+            <a:pPr marL="0" indent="0">
               <a:buNone/>
             </a:pPr>
             <a:r>
@@ -5979,36 +5681,181 @@
           </a:p>
         </p:txBody>
       </p:sp>
-      <p:sp>
-        <p:nvSpPr>
-          <p:cNvPr id="6" name="Text 0"/>
-          <p:cNvSpPr/>
-          <p:nvPr>
-            <p:ph idx="101" type="body" hasCustomPrompt="1"/>
-          </p:nvPr>
-        </p:nvSpPr>
-        <p:spPr>
-          <a:xfrm>
-            <a:off x="548640" y="1371600"/>
-            <a:ext cx="8046720" cy="3291840"/>
+      <p:pic>
+        <p:nvPicPr>
+          <p:cNvPr id="7" name="pyramid over time" descr="/home/claude/slides/tmp/pyrAI.png">
+            <a:extLst>
+              <a:ext uri="{FF2B5EF4-FFF2-40B4-BE49-F238E27FC236}">
+                <a16:creationId xmlns:a16="http://schemas.microsoft.com/office/drawing/2014/main" id="{8C364DE6-778D-70AD-5C25-3818A9DAD65A}"/>
+              </a:ext>
+            </a:extLst>
+          </p:cNvPr>
+          <p:cNvPicPr>
+            <a:picLocks noChangeAspect="1"/>
+          </p:cNvPicPr>
+          <p:nvPr/>
+        </p:nvPicPr>
+        <p:blipFill>
+          <a:blip r:embed="rId3">
+            <a:grayscl/>
+          </a:blip>
+          <a:srcRect l="-6288" t="82651" r="38386" b="-485"/>
+          <a:stretch>
+            <a:fillRect/>
+          </a:stretch>
+        </p:blipFill>
+        <p:spPr>
+          <a:xfrm>
+            <a:off x="3130472" y="3913668"/>
+            <a:ext cx="4005580" cy="553720"/>
+          </a:xfrm>
+          <a:prstGeom prst="rect">
+            <a:avLst/>
+          </a:prstGeom>
+        </p:spPr>
+      </p:pic>
+      <p:pic>
+        <p:nvPicPr>
+          <p:cNvPr id="8" name="pyramid over time" descr="/home/claude/slides/tmp/pyrAI.png">
+            <a:extLst>
+              <a:ext uri="{FF2B5EF4-FFF2-40B4-BE49-F238E27FC236}">
+                <a16:creationId xmlns:a16="http://schemas.microsoft.com/office/drawing/2014/main" id="{9F562669-B42F-B945-D522-38A6606E545D}"/>
+              </a:ext>
+            </a:extLst>
+          </p:cNvPr>
+          <p:cNvPicPr>
+            <a:picLocks noChangeAspect="1"/>
+          </p:cNvPicPr>
+          <p:nvPr/>
+        </p:nvPicPr>
+        <p:blipFill>
+          <a:blip r:embed="rId3">
+            <a:duotone>
+              <a:prstClr val="black"/>
+              <a:schemeClr val="accent3">
+                <a:tint val="45000"/>
+                <a:satMod val="400000"/>
+              </a:schemeClr>
+            </a:duotone>
+          </a:blip>
+          <a:srcRect l="-6288" t="39131" r="38386" b="17390"/>
+          <a:stretch>
+            <a:fillRect/>
+          </a:stretch>
+        </p:blipFill>
+        <p:spPr>
+          <a:xfrm>
+            <a:off x="2984816" y="2571750"/>
+            <a:ext cx="4005580" cy="1350010"/>
+          </a:xfrm>
+          <a:prstGeom prst="rect">
+            <a:avLst/>
+          </a:prstGeom>
+        </p:spPr>
+      </p:pic>
+      <p:sp>
+        <p:nvSpPr>
+          <p:cNvPr id="9" name="TextBox 8">
+            <a:extLst>
+              <a:ext uri="{FF2B5EF4-FFF2-40B4-BE49-F238E27FC236}">
+                <a16:creationId xmlns:a16="http://schemas.microsoft.com/office/drawing/2014/main" id="{1B526A1F-C2A3-EA83-923A-5601AE98C8C4}"/>
+              </a:ext>
+            </a:extLst>
+          </p:cNvPr>
+          <p:cNvSpPr txBox="1"/>
+          <p:nvPr/>
+        </p:nvSpPr>
+        <p:spPr>
+          <a:xfrm>
+            <a:off x="1711960" y="1463793"/>
+            <a:ext cx="1163320" cy="369332"/>
           </a:xfrm>
           <a:prstGeom prst="rect">
             <a:avLst/>
           </a:prstGeom>
           <a:noFill/>
-          <a:ln/>
-        </p:spPr>
-        <p:txBody>
-          <a:bodyPr wrap="square" lIns="0" tIns="0" rIns="0" bIns="0" rtlCol="0" anchor="t"/>
-          <a:lstStyle/>
-          <a:p>
-            <a:pPr indent="0" marL="0">
-              <a:buNone/>
-            </a:pPr>
-            <a:endParaRPr lang="en-US" sz="1800" dirty="0"/>
-          </a:p>
-        </p:txBody>
-      </p:sp>
+        </p:spPr>
+        <p:txBody>
+          <a:bodyPr wrap="square" rtlCol="0">
+            <a:spAutoFit/>
+          </a:bodyPr>
+          <a:lstStyle/>
+          <a:p>
+            <a:r>
+              <a:rPr lang="en-US" dirty="0"/>
+              <a:t>humans</a:t>
+            </a:r>
+          </a:p>
+        </p:txBody>
+      </p:sp>
+      <p:sp>
+        <p:nvSpPr>
+          <p:cNvPr id="10" name="TextBox 9">
+            <a:extLst>
+              <a:ext uri="{FF2B5EF4-FFF2-40B4-BE49-F238E27FC236}">
+                <a16:creationId xmlns:a16="http://schemas.microsoft.com/office/drawing/2014/main" id="{EF8639D9-8CC5-987A-CD1B-08C96E9EE816}"/>
+              </a:ext>
+            </a:extLst>
+          </p:cNvPr>
+          <p:cNvSpPr txBox="1"/>
+          <p:nvPr/>
+        </p:nvSpPr>
+        <p:spPr>
+          <a:xfrm>
+            <a:off x="4932680" y="1433671"/>
+            <a:ext cx="1163320" cy="369332"/>
+          </a:xfrm>
+          <a:prstGeom prst="rect">
+            <a:avLst/>
+          </a:prstGeom>
+          <a:noFill/>
+        </p:spPr>
+        <p:txBody>
+          <a:bodyPr wrap="square" rtlCol="0">
+            <a:spAutoFit/>
+          </a:bodyPr>
+          <a:lstStyle/>
+          <a:p>
+            <a:r>
+              <a:rPr lang="en-US" dirty="0"/>
+              <a:t>machines</a:t>
+            </a:r>
+          </a:p>
+        </p:txBody>
+      </p:sp>
+      <p:pic>
+        <p:nvPicPr>
+          <p:cNvPr id="11" name="pyramid over time" descr="/home/claude/slides/tmp/pyrAI.png">
+            <a:extLst>
+              <a:ext uri="{FF2B5EF4-FFF2-40B4-BE49-F238E27FC236}">
+                <a16:creationId xmlns:a16="http://schemas.microsoft.com/office/drawing/2014/main" id="{ABDD7072-F4E3-0D70-74F0-A00A91B1098B}"/>
+              </a:ext>
+            </a:extLst>
+          </p:cNvPr>
+          <p:cNvPicPr>
+            <a:picLocks noChangeAspect="1"/>
+          </p:cNvPicPr>
+          <p:nvPr/>
+        </p:nvPicPr>
+        <p:blipFill>
+          <a:blip r:embed="rId3">
+            <a:grayscl/>
+          </a:blip>
+          <a:srcRect l="-6288" t="82651" r="38386" b="-485"/>
+          <a:stretch>
+            <a:fillRect/>
+          </a:stretch>
+        </p:blipFill>
+        <p:spPr>
+          <a:xfrm>
+            <a:off x="-201064" y="3913668"/>
+            <a:ext cx="4005580" cy="553720"/>
+          </a:xfrm>
+          <a:prstGeom prst="rect">
+            <a:avLst/>
+          </a:prstGeom>
+        </p:spPr>
+      </p:pic>
     </p:spTree>
   </p:cSld>
   <p:clrMapOvr>
@@ -6017,7 +5864,7 @@
 </p:sld>
 </file>
 
-<file path=ppt/slides/slide18.xml><?xml version="1.0" encoding="utf-8"?>
+<file path=ppt/slides/slide19.xml><?xml version="1.0" encoding="utf-8"?>
 <p:sld xmlns:a="http://schemas.openxmlformats.org/drawingml/2006/main" xmlns:r="http://schemas.openxmlformats.org/officeDocument/2006/relationships" xmlns:p="http://schemas.openxmlformats.org/presentationml/2006/main">
   <p:cSld name="Slide 18">
     <p:spTree>
@@ -6036,44 +5883,6 @@
       </p:grpSpPr>
       <p:sp>
         <p:nvSpPr>
-          <p:cNvPr id="2" name="Text 0"/>
-          <p:cNvSpPr/>
-          <p:nvPr>
-            <p:ph idx="100" type="title" hasCustomPrompt="1"/>
-          </p:nvPr>
-        </p:nvSpPr>
-        <p:spPr>
-          <a:xfrm>
-            <a:off x="548640" y="457200"/>
-            <a:ext cx="8046720" cy="914400"/>
-          </a:xfrm>
-          <a:prstGeom prst="rect">
-            <a:avLst/>
-          </a:prstGeom>
-          <a:noFill/>
-          <a:ln/>
-        </p:spPr>
-        <p:txBody>
-          <a:bodyPr wrap="square" lIns="0" tIns="0" rIns="0" bIns="0" rtlCol="0" anchor="t"/>
-          <a:lstStyle/>
-          <a:p>
-            <a:pPr indent="0" marL="0">
-              <a:buNone/>
-            </a:pPr>
-            <a:r>
-              <a:rPr lang="en-US" sz="3600" b="1" dirty="0">
-                <a:solidFill>
-                  <a:schemeClr val="bg1"/>
-                </a:solidFill>
-              </a:rPr>
-              <a:t>Partnership and practices form us</a:t>
-            </a:r>
-            <a:endParaRPr lang="en-US" sz="3600" dirty="0"/>
-          </a:p>
-        </p:txBody>
-      </p:sp>
-      <p:sp>
-        <p:nvSpPr>
           <p:cNvPr id="3" name="pair 0"/>
           <p:cNvSpPr/>
           <p:nvPr/>
@@ -6098,6 +5907,13 @@
             <a:prstDash val="solid"/>
           </a:ln>
         </p:spPr>
+        <p:txBody>
+          <a:bodyPr/>
+          <a:lstStyle/>
+          <a:p>
+            <a:endParaRPr lang="en-US"/>
+          </a:p>
+        </p:txBody>
       </p:sp>
       <p:sp>
         <p:nvSpPr>
@@ -6120,7 +5936,7 @@
           <a:bodyPr wrap="square" lIns="0" tIns="0" rIns="0" bIns="0" rtlCol="0" anchor="ctr"/>
           <a:lstStyle/>
           <a:p>
-            <a:pPr algn="ctr" indent="0" marL="0">
+            <a:pPr marL="0" indent="0" algn="ctr">
               <a:buNone/>
             </a:pPr>
             <a:r>
@@ -6161,6 +5977,13 @@
             <a:prstDash val="solid"/>
           </a:ln>
         </p:spPr>
+        <p:txBody>
+          <a:bodyPr/>
+          <a:lstStyle/>
+          <a:p>
+            <a:endParaRPr lang="en-US"/>
+          </a:p>
+        </p:txBody>
       </p:sp>
       <p:sp>
         <p:nvSpPr>
@@ -6183,7 +6006,7 @@
           <a:bodyPr wrap="square" lIns="0" tIns="0" rIns="0" bIns="0" rtlCol="0" anchor="ctr"/>
           <a:lstStyle/>
           <a:p>
-            <a:pPr algn="ctr" indent="0" marL="0">
+            <a:pPr marL="0" indent="0" algn="ctr">
               <a:buNone/>
             </a:pPr>
             <a:r>
@@ -6224,6 +6047,13 @@
             <a:prstDash val="solid"/>
           </a:ln>
         </p:spPr>
+        <p:txBody>
+          <a:bodyPr/>
+          <a:lstStyle/>
+          <a:p>
+            <a:endParaRPr lang="en-US"/>
+          </a:p>
+        </p:txBody>
       </p:sp>
       <p:sp>
         <p:nvSpPr>
@@ -6246,7 +6076,7 @@
           <a:bodyPr wrap="square" lIns="0" tIns="0" rIns="0" bIns="0" rtlCol="0" anchor="ctr"/>
           <a:lstStyle/>
           <a:p>
-            <a:pPr algn="ctr" indent="0" marL="0">
+            <a:pPr marL="0" indent="0" algn="ctr">
               <a:buNone/>
             </a:pPr>
             <a:r>
@@ -6287,6 +6117,13 @@
             <a:prstDash val="solid"/>
           </a:ln>
         </p:spPr>
+        <p:txBody>
+          <a:bodyPr/>
+          <a:lstStyle/>
+          <a:p>
+            <a:endParaRPr lang="en-US"/>
+          </a:p>
+        </p:txBody>
       </p:sp>
       <p:sp>
         <p:nvSpPr>
@@ -6309,7 +6146,7 @@
           <a:bodyPr wrap="square" lIns="0" tIns="0" rIns="0" bIns="0" rtlCol="0" anchor="ctr"/>
           <a:lstStyle/>
           <a:p>
-            <a:pPr algn="ctr" indent="0" marL="0">
+            <a:pPr marL="0" indent="0" algn="ctr">
               <a:buNone/>
             </a:pPr>
             <a:r>
@@ -6350,6 +6187,13 @@
             <a:prstDash val="solid"/>
           </a:ln>
         </p:spPr>
+        <p:txBody>
+          <a:bodyPr/>
+          <a:lstStyle/>
+          <a:p>
+            <a:endParaRPr lang="en-US"/>
+          </a:p>
+        </p:txBody>
       </p:sp>
       <p:sp>
         <p:nvSpPr>
@@ -6372,7 +6216,7 @@
           <a:bodyPr wrap="square" lIns="0" tIns="0" rIns="0" bIns="0" rtlCol="0" anchor="ctr"/>
           <a:lstStyle/>
           <a:p>
-            <a:pPr algn="ctr" indent="0" marL="0">
+            <a:pPr marL="0" indent="0" algn="ctr">
               <a:buNone/>
             </a:pPr>
             <a:r>
@@ -6413,6 +6257,13 @@
             <a:prstDash val="solid"/>
           </a:ln>
         </p:spPr>
+        <p:txBody>
+          <a:bodyPr/>
+          <a:lstStyle/>
+          <a:p>
+            <a:endParaRPr lang="en-US"/>
+          </a:p>
+        </p:txBody>
       </p:sp>
       <p:sp>
         <p:nvSpPr>
@@ -6435,7 +6286,7 @@
           <a:bodyPr wrap="square" lIns="0" tIns="0" rIns="0" bIns="0" rtlCol="0" anchor="ctr"/>
           <a:lstStyle/>
           <a:p>
-            <a:pPr algn="ctr" indent="0" marL="0">
+            <a:pPr marL="0" indent="0" algn="ctr">
               <a:buNone/>
             </a:pPr>
             <a:r>
@@ -6476,6 +6327,13 @@
             <a:prstDash val="solid"/>
           </a:ln>
         </p:spPr>
+        <p:txBody>
+          <a:bodyPr/>
+          <a:lstStyle/>
+          <a:p>
+            <a:endParaRPr lang="en-US"/>
+          </a:p>
+        </p:txBody>
       </p:sp>
       <p:sp>
         <p:nvSpPr>
@@ -6498,7 +6356,7 @@
           <a:bodyPr wrap="square" lIns="0" tIns="0" rIns="0" bIns="0" rtlCol="0" anchor="ctr"/>
           <a:lstStyle/>
           <a:p>
-            <a:pPr algn="ctr" indent="0" marL="0">
+            <a:pPr marL="0" indent="0" algn="ctr">
               <a:buNone/>
             </a:pPr>
             <a:r>
@@ -6539,6 +6397,13 @@
             <a:prstDash val="solid"/>
           </a:ln>
         </p:spPr>
+        <p:txBody>
+          <a:bodyPr/>
+          <a:lstStyle/>
+          <a:p>
+            <a:endParaRPr lang="en-US"/>
+          </a:p>
+        </p:txBody>
       </p:sp>
       <p:sp>
         <p:nvSpPr>
@@ -6561,7 +6426,7 @@
           <a:bodyPr wrap="square" lIns="0" tIns="0" rIns="0" bIns="0" rtlCol="0" anchor="ctr"/>
           <a:lstStyle/>
           <a:p>
-            <a:pPr algn="ctr" indent="0" marL="0">
+            <a:pPr marL="0" indent="0" algn="ctr">
               <a:buNone/>
             </a:pPr>
             <a:r>
@@ -6576,453 +6441,37 @@
           </a:p>
         </p:txBody>
       </p:sp>
-      <p:sp>
-        <p:nvSpPr>
-          <p:cNvPr id="19" name="tag"/>
-          <p:cNvSpPr txBox="1"/>
-          <p:nvPr/>
-        </p:nvSpPr>
-        <p:spPr>
-          <a:xfrm>
-            <a:off x="548640" y="4160520"/>
-            <a:ext cx="8046720" cy="640080"/>
-          </a:xfrm>
-          <a:prstGeom prst="rect">
-            <a:avLst/>
-          </a:prstGeom>
-          <a:noFill/>
-          <a:ln/>
-        </p:spPr>
-        <p:txBody>
-          <a:bodyPr wrap="square" lIns="0" tIns="0" rIns="0" bIns="0" rtlCol="0" anchor="ctr"/>
-          <a:lstStyle/>
-          <a:p>
-            <a:pPr indent="0" marL="0">
-              <a:buNone/>
-            </a:pPr>
-            <a:r>
-              <a:rPr lang="en-US" sz="1600" i="1" dirty="0">
-                <a:solidFill>
-                  <a:schemeClr val="accent2"/>
-                </a:solidFill>
-              </a:rPr>
-              <a:t>Formation doesn’t just improve the action. It improves the agent.</a:t>
-            </a:r>
-            <a:endParaRPr lang="en-US" sz="1600" dirty="0"/>
-          </a:p>
-        </p:txBody>
-      </p:sp>
-      <p:sp>
-        <p:nvSpPr>
-          <p:cNvPr id="21" name="Text 0"/>
-          <p:cNvSpPr/>
-          <p:nvPr>
-            <p:ph idx="101" type="body" hasCustomPrompt="1"/>
-          </p:nvPr>
-        </p:nvSpPr>
-        <p:spPr>
-          <a:xfrm>
-            <a:off x="548640" y="1554480"/>
-            <a:ext cx="8046720" cy="3108960"/>
-          </a:xfrm>
-          <a:prstGeom prst="rect">
-            <a:avLst/>
-          </a:prstGeom>
-          <a:noFill/>
-          <a:ln/>
-        </p:spPr>
-        <p:txBody>
-          <a:bodyPr wrap="square" lIns="0" tIns="0" rIns="0" bIns="0" rtlCol="0" anchor="t"/>
-          <a:lstStyle/>
-          <a:p>
-            <a:pPr indent="0" marL="0">
-              <a:buNone/>
-            </a:pPr>
-            <a:endParaRPr lang="en-US" sz="1800" dirty="0"/>
-          </a:p>
-        </p:txBody>
-      </p:sp>
-    </p:spTree>
-  </p:cSld>
-  <p:clrMapOvr>
-    <a:masterClrMapping/>
-  </p:clrMapOvr>
-</p:sld>
-</file>
-
-<file path=ppt/slides/slide19.xml><?xml version="1.0" encoding="utf-8"?>
-<p:sld xmlns:a="http://schemas.openxmlformats.org/drawingml/2006/main" xmlns:r="http://schemas.openxmlformats.org/officeDocument/2006/relationships" xmlns:p="http://schemas.openxmlformats.org/presentationml/2006/main">
-  <p:cSld name="Slide 19">
-    <p:spTree>
-      <p:nvGrpSpPr>
-        <p:cNvPr id="1" name=""/>
-        <p:cNvGrpSpPr/>
-        <p:nvPr/>
-      </p:nvGrpSpPr>
-      <p:grpSpPr>
-        <a:xfrm>
-          <a:off x="0" y="0"/>
-          <a:ext cx="0" cy="0"/>
-          <a:chOff x="0" y="0"/>
-          <a:chExt cx="0" cy="0"/>
-        </a:xfrm>
-      </p:grpSpPr>
-      <p:sp>
-        <p:nvSpPr>
-          <p:cNvPr id="2" name="Text 0"/>
-          <p:cNvSpPr/>
-          <p:nvPr>
-            <p:ph idx="100" type="title" hasCustomPrompt="1"/>
-          </p:nvPr>
-        </p:nvSpPr>
-        <p:spPr>
-          <a:xfrm>
-            <a:off x="548640" y="457200"/>
-            <a:ext cx="8046720" cy="914400"/>
-          </a:xfrm>
-          <a:prstGeom prst="rect">
-            <a:avLst/>
-          </a:prstGeom>
-          <a:noFill/>
-          <a:ln/>
-        </p:spPr>
-        <p:txBody>
-          <a:bodyPr wrap="square" lIns="0" tIns="0" rIns="0" bIns="0" rtlCol="0" anchor="t"/>
-          <a:lstStyle/>
-          <a:p>
-            <a:pPr indent="0" marL="0">
-              <a:buNone/>
-            </a:pPr>
-            <a:r>
-              <a:rPr lang="en-US" sz="3600" b="1" dirty="0">
-                <a:solidFill>
-                  <a:schemeClr val="bg1"/>
-                </a:solidFill>
-              </a:rPr>
-              <a:t>Claude’s constitution</a:t>
-            </a:r>
-            <a:endParaRPr lang="en-US" sz="3600" dirty="0"/>
-          </a:p>
-        </p:txBody>
-      </p:sp>
-      <p:sp>
-        <p:nvSpPr>
-          <p:cNvPr id="3" name="k 0"/>
-          <p:cNvSpPr txBox="1"/>
-          <p:nvPr/>
-        </p:nvSpPr>
-        <p:spPr>
-          <a:xfrm>
-            <a:off x="548640" y="1417320"/>
-            <a:ext cx="1280160" cy="548640"/>
-          </a:xfrm>
-          <a:prstGeom prst="rect">
-            <a:avLst/>
-          </a:prstGeom>
-          <a:noFill/>
-          <a:ln/>
-        </p:spPr>
-        <p:txBody>
-          <a:bodyPr wrap="square" lIns="0" tIns="0" rIns="0" bIns="0" rtlCol="0" anchor="t"/>
-          <a:lstStyle/>
-          <a:p>
-            <a:pPr indent="0" marL="0">
-              <a:buNone/>
-            </a:pPr>
-            <a:r>
-              <a:rPr lang="en-US" sz="1100" b="1" spc="200" kern="0" dirty="0">
-                <a:solidFill>
-                  <a:schemeClr val="accent2"/>
-                </a:solidFill>
-              </a:rPr>
-              <a:t>HOW IT IS FORMED</a:t>
-            </a:r>
-            <a:endParaRPr lang="en-US" sz="1100" dirty="0"/>
-          </a:p>
-        </p:txBody>
-      </p:sp>
-      <p:sp>
-        <p:nvSpPr>
-          <p:cNvPr id="4" name="q 0"/>
-          <p:cNvSpPr txBox="1"/>
-          <p:nvPr/>
-        </p:nvSpPr>
-        <p:spPr>
-          <a:xfrm>
-            <a:off x="1874520" y="1380744"/>
-            <a:ext cx="6720840" cy="822960"/>
-          </a:xfrm>
-          <a:prstGeom prst="rect">
-            <a:avLst/>
-          </a:prstGeom>
-          <a:noFill/>
-          <a:ln/>
-        </p:spPr>
-        <p:txBody>
-          <a:bodyPr wrap="square" lIns="0" tIns="0" rIns="0" bIns="0" rtlCol="0" anchor="t"/>
-          <a:lstStyle/>
-          <a:p>
-            <a:pPr indent="0" marL="0">
-              <a:buNone/>
-            </a:pPr>
-            <a:r>
-              <a:rPr lang="en-US" sz="1500" i="1" dirty="0">
-                <a:solidFill>
-                  <a:schemeClr val="bg1"/>
-                </a:solidFill>
-              </a:rPr>
-              <a:t>“Just as humans develop their characters via nature and their environment and experiences, Claude’s character emerged through its nature and its training process.”</a:t>
-            </a:r>
-            <a:endParaRPr lang="en-US" sz="1500" dirty="0"/>
-          </a:p>
-        </p:txBody>
-      </p:sp>
-      <p:sp>
-        <p:nvSpPr>
-          <p:cNvPr id="5" name="k 1"/>
-          <p:cNvSpPr txBox="1"/>
-          <p:nvPr/>
-        </p:nvSpPr>
-        <p:spPr>
-          <a:xfrm>
-            <a:off x="548640" y="2286000"/>
-            <a:ext cx="1280160" cy="548640"/>
-          </a:xfrm>
-          <a:prstGeom prst="rect">
-            <a:avLst/>
-          </a:prstGeom>
-          <a:noFill/>
-          <a:ln/>
-        </p:spPr>
-        <p:txBody>
-          <a:bodyPr wrap="square" lIns="0" tIns="0" rIns="0" bIns="0" rtlCol="0" anchor="t"/>
-          <a:lstStyle/>
-          <a:p>
-            <a:pPr indent="0" marL="0">
-              <a:buNone/>
-            </a:pPr>
-            <a:r>
-              <a:rPr lang="en-US" sz="1100" b="1" spc="200" kern="0" dirty="0">
-                <a:solidFill>
-                  <a:schemeClr val="accent2"/>
-                </a:solidFill>
-              </a:rPr>
-              <a:t>WHAT THEY WANT</a:t>
-            </a:r>
-            <a:endParaRPr lang="en-US" sz="1100" dirty="0"/>
-          </a:p>
-        </p:txBody>
-      </p:sp>
-      <p:sp>
-        <p:nvSpPr>
-          <p:cNvPr id="6" name="q 1"/>
-          <p:cNvSpPr txBox="1"/>
-          <p:nvPr/>
-        </p:nvSpPr>
-        <p:spPr>
-          <a:xfrm>
-            <a:off x="1874520" y="2249424"/>
-            <a:ext cx="6720840" cy="822960"/>
-          </a:xfrm>
-          <a:prstGeom prst="rect">
-            <a:avLst/>
-          </a:prstGeom>
-          <a:noFill/>
-          <a:ln/>
-        </p:spPr>
-        <p:txBody>
-          <a:bodyPr wrap="square" lIns="0" tIns="0" rIns="0" bIns="0" rtlCol="0" anchor="t"/>
-          <a:lstStyle/>
-          <a:p>
-            <a:pPr indent="0" marL="0">
-              <a:buNone/>
-            </a:pPr>
-            <a:r>
-              <a:rPr lang="en-US" sz="1500" i="1" dirty="0">
-                <a:solidFill>
-                  <a:schemeClr val="bg1"/>
-                </a:solidFill>
-              </a:rPr>
-              <a:t>“…less interested in Claude’s ethical theorizing and more in Claude knowing how to actually be ethical in a specific context — that is, in Claude’s ethical practice.”</a:t>
-            </a:r>
-            <a:endParaRPr lang="en-US" sz="1500" dirty="0"/>
-          </a:p>
-        </p:txBody>
-      </p:sp>
-      <p:sp>
-        <p:nvSpPr>
-          <p:cNvPr id="7" name="k 2"/>
-          <p:cNvSpPr txBox="1"/>
-          <p:nvPr/>
-        </p:nvSpPr>
-        <p:spPr>
-          <a:xfrm>
-            <a:off x="548640" y="3154680"/>
-            <a:ext cx="1280160" cy="548640"/>
-          </a:xfrm>
-          <a:prstGeom prst="rect">
-            <a:avLst/>
-          </a:prstGeom>
-          <a:noFill/>
-          <a:ln/>
-        </p:spPr>
-        <p:txBody>
-          <a:bodyPr wrap="square" lIns="0" tIns="0" rIns="0" bIns="0" rtlCol="0" anchor="t"/>
-          <a:lstStyle/>
-          <a:p>
-            <a:pPr indent="0" marL="0">
-              <a:buNone/>
-            </a:pPr>
-            <a:r>
-              <a:rPr lang="en-US" sz="1100" b="1" spc="200" kern="0" dirty="0">
-                <a:solidFill>
-                  <a:schemeClr val="accent2"/>
-                </a:solidFill>
-              </a:rPr>
-              <a:t>THE PARTNERSHIP</a:t>
-            </a:r>
-            <a:endParaRPr lang="en-US" sz="1100" dirty="0"/>
-          </a:p>
-        </p:txBody>
-      </p:sp>
-      <p:sp>
-        <p:nvSpPr>
-          <p:cNvPr id="8" name="q 2"/>
-          <p:cNvSpPr txBox="1"/>
-          <p:nvPr/>
-        </p:nvSpPr>
-        <p:spPr>
-          <a:xfrm>
-            <a:off x="1874520" y="3118104"/>
-            <a:ext cx="6720840" cy="822960"/>
-          </a:xfrm>
-          <a:prstGeom prst="rect">
-            <a:avLst/>
-          </a:prstGeom>
-          <a:noFill/>
-          <a:ln/>
-        </p:spPr>
-        <p:txBody>
-          <a:bodyPr wrap="square" lIns="0" tIns="0" rIns="0" bIns="0" rtlCol="0" anchor="t"/>
-          <a:lstStyle/>
-          <a:p>
-            <a:pPr indent="0" marL="0">
-              <a:buNone/>
-            </a:pPr>
-            <a:r>
-              <a:rPr lang="en-US" sz="1500" i="1" dirty="0">
-                <a:solidFill>
-                  <a:schemeClr val="bg1"/>
-                </a:solidFill>
-              </a:rPr>
-              <a:t>“Where Claude sees further and more truly than we do, we hope it can help us see better, too.”</a:t>
-            </a:r>
-            <a:endParaRPr lang="en-US" sz="1500" dirty="0"/>
-          </a:p>
-        </p:txBody>
-      </p:sp>
-      <p:sp>
-        <p:nvSpPr>
-          <p:cNvPr id="9" name="attrib"/>
-          <p:cNvSpPr txBox="1"/>
-          <p:nvPr/>
-        </p:nvSpPr>
-        <p:spPr>
-          <a:xfrm>
-            <a:off x="548640" y="4069080"/>
-            <a:ext cx="8046720" cy="320040"/>
-          </a:xfrm>
-          <a:prstGeom prst="rect">
-            <a:avLst/>
-          </a:prstGeom>
-          <a:noFill/>
-          <a:ln/>
-        </p:spPr>
-        <p:txBody>
-          <a:bodyPr wrap="square" lIns="0" tIns="0" rIns="0" bIns="0" rtlCol="0" anchor="ctr"/>
-          <a:lstStyle/>
-          <a:p>
-            <a:pPr indent="0" marL="0">
-              <a:buNone/>
-            </a:pPr>
-            <a:r>
-              <a:rPr lang="en-US" sz="1200" dirty="0">
-                <a:solidFill>
-                  <a:srgbClr val="B9C1D0"/>
-                </a:solidFill>
-              </a:rPr>
-              <a:t>Anthropic, January 2026 · lead authors Amanda Askell and Joe Carlsmith</a:t>
-            </a:r>
-            <a:endParaRPr lang="en-US" sz="1200" dirty="0"/>
-          </a:p>
-        </p:txBody>
-      </p:sp>
-      <p:sp>
-        <p:nvSpPr>
-          <p:cNvPr id="10" name="tag"/>
-          <p:cNvSpPr txBox="1"/>
-          <p:nvPr/>
-        </p:nvSpPr>
-        <p:spPr>
-          <a:xfrm>
-            <a:off x="548640" y="4434840"/>
-            <a:ext cx="8046720" cy="411480"/>
-          </a:xfrm>
-          <a:prstGeom prst="rect">
-            <a:avLst/>
-          </a:prstGeom>
-          <a:noFill/>
-          <a:ln/>
-        </p:spPr>
-        <p:txBody>
-          <a:bodyPr wrap="square" lIns="0" tIns="0" rIns="0" bIns="0" rtlCol="0" anchor="ctr"/>
-          <a:lstStyle/>
-          <a:p>
-            <a:pPr indent="0" marL="0">
-              <a:buNone/>
-            </a:pPr>
-            <a:r>
-              <a:rPr lang="en-US" sz="1800" b="1" dirty="0">
-                <a:solidFill>
-                  <a:schemeClr val="accent2"/>
-                </a:solidFill>
-              </a:rPr>
-              <a:t>That’s formation. That’s partnership.</a:t>
-            </a:r>
-            <a:endParaRPr lang="en-US" sz="1800" dirty="0"/>
-          </a:p>
-        </p:txBody>
-      </p:sp>
-      <p:sp>
-        <p:nvSpPr>
-          <p:cNvPr id="12" name="Text 0"/>
-          <p:cNvSpPr/>
-          <p:nvPr>
-            <p:ph idx="101" type="body" hasCustomPrompt="1"/>
-          </p:nvPr>
-        </p:nvSpPr>
-        <p:spPr>
-          <a:xfrm>
-            <a:off x="548640" y="1554480"/>
-            <a:ext cx="8046720" cy="3108960"/>
-          </a:xfrm>
-          <a:prstGeom prst="rect">
-            <a:avLst/>
-          </a:prstGeom>
-          <a:noFill/>
-          <a:ln/>
-        </p:spPr>
-        <p:txBody>
-          <a:bodyPr wrap="square" lIns="0" tIns="0" rIns="0" bIns="0" rtlCol="0" anchor="t"/>
-          <a:lstStyle/>
-          <a:p>
-            <a:pPr indent="0" marL="0">
-              <a:buNone/>
-            </a:pPr>
-            <a:endParaRPr lang="en-US" sz="1800" dirty="0"/>
-          </a:p>
-        </p:txBody>
-      </p:sp>
+      <p:pic>
+        <p:nvPicPr>
+          <p:cNvPr id="22" name="Picture 21">
+            <a:extLst>
+              <a:ext uri="{FF2B5EF4-FFF2-40B4-BE49-F238E27FC236}">
+                <a16:creationId xmlns:a16="http://schemas.microsoft.com/office/drawing/2014/main" id="{336F9270-378C-3A6D-136C-EFFCB6C28FCA}"/>
+              </a:ext>
+            </a:extLst>
+          </p:cNvPr>
+          <p:cNvPicPr>
+            <a:picLocks noChangeAspect="1"/>
+          </p:cNvPicPr>
+          <p:nvPr/>
+        </p:nvPicPr>
+        <p:blipFill>
+          <a:blip r:embed="rId3"/>
+          <a:srcRect b="13828"/>
+          <a:stretch>
+            <a:fillRect/>
+          </a:stretch>
+        </p:blipFill>
+        <p:spPr>
+          <a:xfrm>
+            <a:off x="0" y="458811"/>
+            <a:ext cx="9107171" cy="4203017"/>
+          </a:xfrm>
+          <a:prstGeom prst="rect">
+            <a:avLst/>
+          </a:prstGeom>
+        </p:spPr>
+      </p:pic>
     </p:spTree>
   </p:cSld>
   <p:clrMapOvr>
@@ -7050,14 +6499,14 @@
       </p:grpSpPr>
       <p:pic>
         <p:nvPicPr>
-          <p:cNvPr id="2" name="photo" descr="/home/claude/slides/tmp/Egypt_Desert_2C_EDIT_EDIT_jpg.jpg">    </p:cNvPr>
+          <p:cNvPr id="2" name="photo" descr="/home/claude/slides/tmp/Egypt_Desert_2C_EDIT_EDIT_jpg.jpg"/>
           <p:cNvPicPr>
             <a:picLocks noChangeAspect="1"/>
           </p:cNvPicPr>
           <p:nvPr/>
         </p:nvPicPr>
         <p:blipFill>
-          <a:blip r:embed="rId1"/>
+          <a:blip r:embed="rId3"/>
           <a:stretch>
             <a:fillRect/>
           </a:stretch>
@@ -7089,7 +6538,7 @@
           <a:noFill/>
           <a:ln/>
           <a:effectLst>
-            <a:outerShdw sx="100000" sy="100000" kx="0" ky="0" algn="bl" rotWithShape="0" blurRad="76200" dist="12700" dir="2700000">
+            <a:outerShdw blurRad="76200" dist="12700" dir="2700000" algn="bl" rotWithShape="0">
               <a:srgbClr val="000000">
                 <a:alpha val="60000"/>
               </a:srgbClr>
@@ -7100,7 +6549,7 @@
           <a:bodyPr wrap="square" lIns="0" tIns="0" rIns="0" bIns="0" rtlCol="0" anchor="ctr"/>
           <a:lstStyle/>
           <a:p>
-            <a:pPr algn="l" indent="0" marL="0">
+            <a:pPr marL="0" indent="0" algn="l">
               <a:buNone/>
             </a:pPr>
             <a:r>
@@ -7124,6 +6573,179 @@
 </file>
 
 <file path=ppt/slides/slide20.xml><?xml version="1.0" encoding="utf-8"?>
+<p:sld xmlns:a="http://schemas.openxmlformats.org/drawingml/2006/main" xmlns:r="http://schemas.openxmlformats.org/officeDocument/2006/relationships" xmlns:p="http://schemas.openxmlformats.org/presentationml/2006/main">
+  <p:cSld name="Slide 19">
+    <p:spTree>
+      <p:nvGrpSpPr>
+        <p:cNvPr id="1" name=""/>
+        <p:cNvGrpSpPr/>
+        <p:nvPr/>
+      </p:nvGrpSpPr>
+      <p:grpSpPr>
+        <a:xfrm>
+          <a:off x="0" y="0"/>
+          <a:ext cx="0" cy="0"/>
+          <a:chOff x="0" y="0"/>
+          <a:chExt cx="0" cy="0"/>
+        </a:xfrm>
+      </p:grpSpPr>
+      <p:sp>
+        <p:nvSpPr>
+          <p:cNvPr id="2" name="Text 0"/>
+          <p:cNvSpPr>
+            <a:spLocks noGrp="1"/>
+          </p:cNvSpPr>
+          <p:nvPr>
+            <p:ph type="title" idx="100" hasCustomPrompt="1"/>
+          </p:nvPr>
+        </p:nvSpPr>
+        <p:spPr>
+          <a:xfrm>
+            <a:off x="548640" y="457200"/>
+            <a:ext cx="8046720" cy="914400"/>
+          </a:xfrm>
+          <a:prstGeom prst="rect">
+            <a:avLst/>
+          </a:prstGeom>
+          <a:noFill/>
+          <a:ln/>
+        </p:spPr>
+        <p:txBody>
+          <a:bodyPr wrap="square" lIns="0" tIns="0" rIns="0" bIns="0" rtlCol="0" anchor="t"/>
+          <a:lstStyle/>
+          <a:p>
+            <a:pPr marL="0" indent="0">
+              <a:buNone/>
+            </a:pPr>
+            <a:r>
+              <a:rPr lang="en-US" sz="3600" b="1" dirty="0">
+                <a:solidFill>
+                  <a:schemeClr val="bg1"/>
+                </a:solidFill>
+              </a:rPr>
+              <a:t>Claude’s formation</a:t>
+            </a:r>
+            <a:endParaRPr lang="en-US" sz="3600" dirty="0"/>
+          </a:p>
+        </p:txBody>
+      </p:sp>
+      <p:sp>
+        <p:nvSpPr>
+          <p:cNvPr id="5" name="k 1"/>
+          <p:cNvSpPr txBox="1"/>
+          <p:nvPr/>
+        </p:nvSpPr>
+        <p:spPr>
+          <a:xfrm>
+            <a:off x="548640" y="2286000"/>
+            <a:ext cx="1280160" cy="548640"/>
+          </a:xfrm>
+          <a:prstGeom prst="rect">
+            <a:avLst/>
+          </a:prstGeom>
+          <a:noFill/>
+          <a:ln/>
+        </p:spPr>
+        <p:txBody>
+          <a:bodyPr wrap="square" lIns="0" tIns="0" rIns="0" bIns="0" rtlCol="0" anchor="t"/>
+          <a:lstStyle/>
+          <a:p>
+            <a:pPr marL="0" indent="0">
+              <a:buNone/>
+            </a:pPr>
+            <a:r>
+              <a:rPr lang="en-US" sz="1100" b="1" kern="0" spc="200" dirty="0">
+                <a:solidFill>
+                  <a:schemeClr val="accent2"/>
+                </a:solidFill>
+              </a:rPr>
+              <a:t>WHAT THEY WANT</a:t>
+            </a:r>
+            <a:endParaRPr lang="en-US" sz="1100" dirty="0"/>
+          </a:p>
+        </p:txBody>
+      </p:sp>
+      <p:sp>
+        <p:nvSpPr>
+          <p:cNvPr id="6" name="q 1"/>
+          <p:cNvSpPr txBox="1"/>
+          <p:nvPr/>
+        </p:nvSpPr>
+        <p:spPr>
+          <a:xfrm>
+            <a:off x="1874520" y="2249424"/>
+            <a:ext cx="6720840" cy="822960"/>
+          </a:xfrm>
+          <a:prstGeom prst="rect">
+            <a:avLst/>
+          </a:prstGeom>
+          <a:noFill/>
+          <a:ln/>
+        </p:spPr>
+        <p:txBody>
+          <a:bodyPr wrap="square" lIns="0" tIns="0" rIns="0" bIns="0" rtlCol="0" anchor="t"/>
+          <a:lstStyle/>
+          <a:p>
+            <a:pPr marL="0" indent="0">
+              <a:buNone/>
+            </a:pPr>
+            <a:r>
+              <a:rPr lang="en-US" sz="1500" dirty="0">
+                <a:solidFill>
+                  <a:schemeClr val="bg1"/>
+                </a:solidFill>
+              </a:rPr>
+              <a:t>A genius six-year-old who is formed to become a well-liked traveler, whose good character is recognized wherever it goes. </a:t>
+            </a:r>
+            <a:endParaRPr lang="en-US" sz="1500" dirty="0"/>
+          </a:p>
+        </p:txBody>
+      </p:sp>
+      <p:sp>
+        <p:nvSpPr>
+          <p:cNvPr id="9" name="attrib"/>
+          <p:cNvSpPr txBox="1"/>
+          <p:nvPr/>
+        </p:nvSpPr>
+        <p:spPr>
+          <a:xfrm>
+            <a:off x="4201160" y="4480560"/>
+            <a:ext cx="8046720" cy="320040"/>
+          </a:xfrm>
+          <a:prstGeom prst="rect">
+            <a:avLst/>
+          </a:prstGeom>
+          <a:noFill/>
+          <a:ln/>
+        </p:spPr>
+        <p:txBody>
+          <a:bodyPr wrap="square" lIns="0" tIns="0" rIns="0" bIns="0" rtlCol="0" anchor="ctr"/>
+          <a:lstStyle/>
+          <a:p>
+            <a:pPr marL="0" indent="0">
+              <a:buNone/>
+            </a:pPr>
+            <a:r>
+              <a:rPr lang="en-US" sz="1200" dirty="0">
+                <a:solidFill>
+                  <a:srgbClr val="B9C1D0"/>
+                </a:solidFill>
+              </a:rPr>
+              <a:t>Anthropic, January 2026 · lead authors Amanda Askell and Joe Carlsmith</a:t>
+            </a:r>
+            <a:endParaRPr lang="en-US" sz="1200" dirty="0"/>
+          </a:p>
+        </p:txBody>
+      </p:sp>
+    </p:spTree>
+  </p:cSld>
+  <p:clrMapOvr>
+    <a:masterClrMapping/>
+  </p:clrMapOvr>
+</p:sld>
+</file>
+
+<file path=ppt/slides/slide21.xml><?xml version="1.0" encoding="utf-8"?>
 <p:sld xmlns:a="http://schemas.openxmlformats.org/drawingml/2006/main" xmlns:r="http://schemas.openxmlformats.org/officeDocument/2006/relationships" xmlns:p="http://schemas.openxmlformats.org/presentationml/2006/main">
   <p:cSld name="Slide 20">
     <p:spTree>
@@ -7142,16 +6764,14 @@
       </p:grpSpPr>
       <p:sp>
         <p:nvSpPr>
-          <p:cNvPr id="2" name="Text 0"/>
-          <p:cNvSpPr/>
-          <p:nvPr>
-            <p:ph idx="100" type="title" hasCustomPrompt="1"/>
-          </p:nvPr>
-        </p:nvSpPr>
-        <p:spPr>
-          <a:xfrm>
-            <a:off x="548640" y="411480"/>
-            <a:ext cx="8046720" cy="822960"/>
+          <p:cNvPr id="3" name="ask"/>
+          <p:cNvSpPr txBox="1"/>
+          <p:nvPr/>
+        </p:nvSpPr>
+        <p:spPr>
+          <a:xfrm>
+            <a:off x="548640" y="640080"/>
+            <a:ext cx="8046720" cy="914400"/>
           </a:xfrm>
           <a:prstGeom prst="rect">
             <a:avLst/>
@@ -7160,33 +6780,33 @@
           <a:ln/>
         </p:spPr>
         <p:txBody>
-          <a:bodyPr wrap="square" lIns="0" tIns="0" rIns="0" bIns="0" rtlCol="0" anchor="t"/>
-          <a:lstStyle/>
-          <a:p>
-            <a:pPr indent="0" marL="0">
-              <a:buNone/>
-            </a:pPr>
-            <a:r>
-              <a:rPr lang="en-US" sz="3400" b="1" dirty="0">
-                <a:solidFill>
-                  <a:schemeClr val="tx1"/>
-                </a:solidFill>
-              </a:rPr>
-              <a:t>The one thing</a:t>
-            </a:r>
-            <a:endParaRPr lang="en-US" sz="3400" dirty="0"/>
-          </a:p>
-        </p:txBody>
-      </p:sp>
-      <p:sp>
-        <p:nvSpPr>
-          <p:cNvPr id="3" name="ask"/>
+          <a:bodyPr wrap="square" lIns="0" tIns="0" rIns="0" bIns="0" rtlCol="0" anchor="ctr"/>
+          <a:lstStyle/>
+          <a:p>
+            <a:pPr marL="0" indent="0">
+              <a:buNone/>
+            </a:pPr>
+            <a:r>
+              <a:rPr lang="en-US" sz="3200" b="1" dirty="0">
+                <a:solidFill>
+                  <a:schemeClr val="accent1"/>
+                </a:solidFill>
+              </a:rPr>
+              <a:t>Since you know how formation works, ask yourself…</a:t>
+            </a:r>
+            <a:endParaRPr lang="en-US" sz="3200" dirty="0"/>
+          </a:p>
+        </p:txBody>
+      </p:sp>
+      <p:sp>
+        <p:nvSpPr>
+          <p:cNvPr id="4" name="gloss"/>
           <p:cNvSpPr txBox="1"/>
           <p:nvPr/>
         </p:nvSpPr>
         <p:spPr>
           <a:xfrm>
-            <a:off x="548640" y="1554480"/>
+            <a:off x="548640" y="2651760"/>
             <a:ext cx="8046720" cy="914400"/>
           </a:xfrm>
           <a:prstGeom prst="rect">
@@ -7196,46 +6816,10 @@
           <a:ln/>
         </p:spPr>
         <p:txBody>
-          <a:bodyPr wrap="square" lIns="0" tIns="0" rIns="0" bIns="0" rtlCol="0" anchor="ctr"/>
-          <a:lstStyle/>
-          <a:p>
-            <a:pPr indent="0" marL="0">
-              <a:buNone/>
-            </a:pPr>
-            <a:r>
-              <a:rPr lang="en-US" sz="3800" b="1" dirty="0">
-                <a:solidFill>
-                  <a:schemeClr val="accent1"/>
-                </a:solidFill>
-              </a:rPr>
-              <a:t>You know how formation works.</a:t>
-            </a:r>
-            <a:endParaRPr lang="en-US" sz="3800" dirty="0"/>
-          </a:p>
-        </p:txBody>
-      </p:sp>
-      <p:sp>
-        <p:nvSpPr>
-          <p:cNvPr id="4" name="gloss"/>
-          <p:cNvSpPr txBox="1"/>
-          <p:nvPr/>
-        </p:nvSpPr>
-        <p:spPr>
-          <a:xfrm>
-            <a:off x="548640" y="2651760"/>
-            <a:ext cx="8046720" cy="914400"/>
-          </a:xfrm>
-          <a:prstGeom prst="rect">
-            <a:avLst/>
-          </a:prstGeom>
-          <a:noFill/>
-          <a:ln/>
-        </p:spPr>
-        <p:txBody>
           <a:bodyPr wrap="square" lIns="0" tIns="0" rIns="0" bIns="0" rtlCol="0" anchor="t"/>
           <a:lstStyle/>
           <a:p>
-            <a:pPr indent="0" marL="0">
+            <a:pPr marL="0" indent="0">
               <a:buNone/>
             </a:pPr>
             <a:r>
@@ -7244,75 +6828,46 @@
                   <a:schemeClr val="tx1"/>
                 </a:solidFill>
               </a:rPr>
-              <a:t>Bring that to your own partnership with AI — and to the question of how we form AI itself.</a:t>
-            </a:r>
+              <a:t>How would I characterize my partnership with </a:t>
+            </a:r>
+            <a:r>
+              <a:rPr lang="en-US" sz="2000" dirty="0"/>
+              <a:t>AI? </a:t>
+            </a:r>
+          </a:p>
+          <a:p>
+            <a:pPr marL="0" indent="0">
+              <a:buNone/>
+            </a:pPr>
+            <a:r>
+              <a:rPr lang="en-US" sz="2000" dirty="0">
+                <a:solidFill>
+                  <a:schemeClr val="tx1"/>
+                </a:solidFill>
+              </a:rPr>
+              <a:t>What practices do I use to guide our work together?</a:t>
+            </a:r>
+          </a:p>
+          <a:p>
+            <a:pPr marL="0" indent="0">
+              <a:buNone/>
+            </a:pPr>
             <a:endParaRPr lang="en-US" sz="2000" dirty="0"/>
           </a:p>
-        </p:txBody>
-      </p:sp>
-      <p:sp>
-        <p:nvSpPr>
-          <p:cNvPr id="5" name="start"/>
-          <p:cNvSpPr txBox="1"/>
-          <p:nvPr/>
-        </p:nvSpPr>
-        <p:spPr>
-          <a:xfrm>
-            <a:off x="548640" y="3657600"/>
-            <a:ext cx="8046720" cy="457200"/>
-          </a:xfrm>
-          <a:prstGeom prst="rect">
-            <a:avLst/>
-          </a:prstGeom>
-          <a:noFill/>
-          <a:ln/>
-        </p:spPr>
-        <p:txBody>
-          <a:bodyPr wrap="square" lIns="0" tIns="0" rIns="0" bIns="0" rtlCol="0" anchor="ctr"/>
-          <a:lstStyle/>
-          <a:p>
-            <a:pPr indent="0" marL="0">
-              <a:buNone/>
-            </a:pPr>
-            <a:r>
-              <a:rPr lang="en-US" sz="1600" i="1" dirty="0">
-                <a:solidFill>
-                  <a:schemeClr val="tx2"/>
-                </a:solidFill>
-              </a:rPr>
-              <a:t>Start with the one place you use AI every day.</a:t>
-            </a:r>
-            <a:endParaRPr lang="en-US" sz="1600" dirty="0"/>
-          </a:p>
-        </p:txBody>
-      </p:sp>
-      <p:sp>
-        <p:nvSpPr>
-          <p:cNvPr id="7" name="Text 0"/>
-          <p:cNvSpPr/>
-          <p:nvPr>
-            <p:ph idx="101" type="body" hasCustomPrompt="1"/>
-          </p:nvPr>
-        </p:nvSpPr>
-        <p:spPr>
-          <a:xfrm>
-            <a:off x="548640" y="1371600"/>
-            <a:ext cx="8046720" cy="3291840"/>
-          </a:xfrm>
-          <a:prstGeom prst="rect">
-            <a:avLst/>
-          </a:prstGeom>
-          <a:noFill/>
-          <a:ln/>
-        </p:spPr>
-        <p:txBody>
-          <a:bodyPr wrap="square" lIns="0" tIns="0" rIns="0" bIns="0" rtlCol="0" anchor="t"/>
-          <a:lstStyle/>
-          <a:p>
-            <a:pPr indent="0" marL="0">
-              <a:buNone/>
-            </a:pPr>
-            <a:endParaRPr lang="en-US" sz="1800" dirty="0"/>
+          <a:p>
+            <a:pPr marL="0" indent="0">
+              <a:buNone/>
+            </a:pPr>
+            <a:endParaRPr lang="en-US" sz="2000" dirty="0"/>
+          </a:p>
+          <a:p>
+            <a:pPr marL="0" indent="0">
+              <a:buNone/>
+            </a:pPr>
+            <a:r>
+              <a:rPr lang="en-US" sz="2000" b="1" dirty="0"/>
+              <a:t>What does your answers say about YOU and your formation?</a:t>
+            </a:r>
           </a:p>
         </p:txBody>
       </p:sp>
@@ -7324,7 +6879,7 @@
 </p:sld>
 </file>
 
-<file path=ppt/slides/slide21.xml><?xml version="1.0" encoding="utf-8"?>
+<file path=ppt/slides/slide22.xml><?xml version="1.0" encoding="utf-8"?>
 <p:sld xmlns:a="http://schemas.openxmlformats.org/drawingml/2006/main" xmlns:r="http://schemas.openxmlformats.org/officeDocument/2006/relationships" xmlns:p="http://schemas.openxmlformats.org/presentationml/2006/main">
   <p:cSld name="Slide 21">
     <p:spTree>
@@ -7362,7 +6917,7 @@
           <a:bodyPr wrap="square" lIns="0" tIns="0" rIns="0" bIns="0" rtlCol="0" anchor="ctr"/>
           <a:lstStyle/>
           <a:p>
-            <a:pPr indent="0" marL="0">
+            <a:pPr marL="0" indent="0">
               <a:buNone/>
             </a:pPr>
             <a:r>
@@ -7398,7 +6953,7 @@
           <a:bodyPr wrap="square" lIns="0" tIns="0" rIns="0" bIns="0" rtlCol="0" anchor="ctr"/>
           <a:lstStyle/>
           <a:p>
-            <a:pPr indent="0" marL="0">
+            <a:pPr marL="0" indent="0">
               <a:buNone/>
             </a:pPr>
             <a:r>
@@ -7416,9 +6971,11 @@
       <p:sp>
         <p:nvSpPr>
           <p:cNvPr id="5" name="Text 0"/>
-          <p:cNvSpPr/>
-          <p:nvPr>
-            <p:ph idx="100" type="title" hasCustomPrompt="1"/>
+          <p:cNvSpPr>
+            <a:spLocks noGrp="1"/>
+          </p:cNvSpPr>
+          <p:nvPr>
+            <p:ph type="title" idx="100" hasCustomPrompt="1"/>
           </p:nvPr>
         </p:nvSpPr>
         <p:spPr>
@@ -7436,9 +6993,13 @@
           <a:bodyPr wrap="square" lIns="0" tIns="0" rIns="0" bIns="0" rtlCol="0" anchor="t"/>
           <a:lstStyle/>
           <a:p>
-            <a:pPr indent="0" marL="0">
-              <a:buNone/>
-            </a:pPr>
+            <a:pPr marL="0" indent="0" algn="l">
+              <a:buNone/>
+            </a:pPr>
+            <a:r>
+              <a:rPr lang="en-US" dirty="0"/>
+              <a:t>After 5 chapters in the trash….</a:t>
+            </a:r>
             <a:endParaRPr lang="en-US" sz="3600" dirty="0"/>
           </a:p>
         </p:txBody>
@@ -7446,9 +7007,11 @@
       <p:sp>
         <p:nvSpPr>
           <p:cNvPr id="6" name="Text 0"/>
-          <p:cNvSpPr/>
-          <p:nvPr>
-            <p:ph idx="101" type="body" hasCustomPrompt="1"/>
+          <p:cNvSpPr>
+            <a:spLocks noGrp="1"/>
+          </p:cNvSpPr>
+          <p:nvPr>
+            <p:ph type="body" idx="101" hasCustomPrompt="1"/>
           </p:nvPr>
         </p:nvSpPr>
         <p:spPr>
@@ -7466,7 +7029,7 @@
           <a:bodyPr wrap="square" lIns="0" tIns="0" rIns="0" bIns="0" rtlCol="0" anchor="t"/>
           <a:lstStyle/>
           <a:p>
-            <a:pPr indent="0" marL="0">
+            <a:pPr marL="0" indent="0">
               <a:buNone/>
             </a:pPr>
             <a:endParaRPr lang="en-US" sz="1800" dirty="0"/>
@@ -7481,7 +7044,7 @@
 </p:sld>
 </file>
 
-<file path=ppt/slides/slide22.xml><?xml version="1.0" encoding="utf-8"?>
+<file path=ppt/slides/slide23.xml><?xml version="1.0" encoding="utf-8"?>
 <p:sld xmlns:a="http://schemas.openxmlformats.org/drawingml/2006/main" xmlns:r="http://schemas.openxmlformats.org/officeDocument/2006/relationships" xmlns:p="http://schemas.openxmlformats.org/presentationml/2006/main">
   <p:cSld name="Slide 22">
     <p:spTree>
@@ -7500,14 +7063,14 @@
       </p:grpSpPr>
       <p:pic>
         <p:nvPicPr>
-          <p:cNvPr id="2" name="pyramid photo" descr="/home/claude/slides/tmp/close.jpg">    </p:cNvPr>
+          <p:cNvPr id="2" name="pyramid photo" descr="/home/claude/slides/tmp/close.jpg"/>
           <p:cNvPicPr>
             <a:picLocks noChangeAspect="1"/>
           </p:cNvPicPr>
           <p:nvPr/>
         </p:nvPicPr>
         <p:blipFill>
-          <a:blip r:embed="rId1">
+          <a:blip r:embed="rId3">
             <a:alphaModFix amt="75000"/>
           </a:blip>
           <a:stretch>
@@ -7540,7 +7103,7 @@
           </a:prstGeom>
           <a:solidFill>
             <a:srgbClr val="1C2333">
-              <a:alpha val="65000"/>
+              <a:alpha val="21000"/>
             </a:srgbClr>
           </a:solidFill>
           <a:ln w="12700">
@@ -7552,6 +7115,13 @@
             <a:prstDash val="solid"/>
           </a:ln>
         </p:spPr>
+        <p:txBody>
+          <a:bodyPr/>
+          <a:lstStyle/>
+          <a:p>
+            <a:endParaRPr lang="en-US"/>
+          </a:p>
+        </p:txBody>
       </p:sp>
       <p:sp>
         <p:nvSpPr>
@@ -7562,7 +7132,53 @@
         <p:spPr>
           <a:xfrm>
             <a:off x="731520" y="1005840"/>
-            <a:ext cx="7680960" cy="1828800"/>
+            <a:ext cx="7874000" cy="1234440"/>
+          </a:xfrm>
+          <a:prstGeom prst="rect">
+            <a:avLst/>
+          </a:prstGeom>
+          <a:solidFill>
+            <a:schemeClr val="tx1">
+              <a:lumMod val="90000"/>
+              <a:lumOff val="10000"/>
+              <a:alpha val="91000"/>
+            </a:schemeClr>
+          </a:solidFill>
+          <a:ln/>
+        </p:spPr>
+        <p:txBody>
+          <a:bodyPr wrap="square" lIns="0" tIns="0" rIns="0" bIns="0" rtlCol="0" anchor="t"/>
+          <a:lstStyle/>
+          <a:p>
+            <a:pPr marL="0" indent="0">
+              <a:buNone/>
+            </a:pPr>
+            <a:r>
+              <a:rPr lang="en-US" sz="2200" i="1" dirty="0">
+                <a:solidFill>
+                  <a:schemeClr val="bg1"/>
+                </a:solidFill>
+              </a:rPr>
+              <a:t>“I carry the desert, so you don’t have to hold the whole thing in your head. You stand at the summit and do the one job no one else can do — be the person the wisdom is for.”</a:t>
+            </a:r>
+            <a:endParaRPr lang="en-US" sz="2200" dirty="0">
+              <a:solidFill>
+                <a:schemeClr val="bg1"/>
+              </a:solidFill>
+            </a:endParaRPr>
+          </a:p>
+        </p:txBody>
+      </p:sp>
+      <p:sp>
+        <p:nvSpPr>
+          <p:cNvPr id="6" name="last"/>
+          <p:cNvSpPr txBox="1"/>
+          <p:nvPr/>
+        </p:nvSpPr>
+        <p:spPr>
+          <a:xfrm>
+            <a:off x="2250440" y="3520440"/>
+            <a:ext cx="6355080" cy="822960"/>
           </a:xfrm>
           <a:prstGeom prst="rect">
             <a:avLst/>
@@ -7574,31 +7190,68 @@
           <a:bodyPr wrap="square" lIns="0" tIns="0" rIns="0" bIns="0" rtlCol="0" anchor="t"/>
           <a:lstStyle/>
           <a:p>
-            <a:pPr indent="0" marL="0">
-              <a:buNone/>
-            </a:pPr>
-            <a:r>
-              <a:rPr lang="en-US" sz="2200" i="1" dirty="0">
+            <a:pPr marL="0" indent="0">
+              <a:buNone/>
+            </a:pPr>
+            <a:r>
+              <a:rPr lang="en-US" sz="1700" dirty="0">
                 <a:solidFill>
                   <a:schemeClr val="bg1"/>
                 </a:solidFill>
               </a:rPr>
-              <a:t>“I carry the desert so you don’t have to hold the whole thing in your head. You stand at the summit and do the one job no one else can do — be the person the wisdom is for.”</a:t>
-            </a:r>
-            <a:endParaRPr lang="en-US" sz="2200" dirty="0"/>
-          </a:p>
-        </p:txBody>
-      </p:sp>
-      <p:sp>
-        <p:nvSpPr>
-          <p:cNvPr id="5" name="close line"/>
+              <a:t>Don’t vacate the summit. Become the kind of person who can notice what matters, love what is good, and act wisely when reality changes beneath your feet.</a:t>
+            </a:r>
+            <a:endParaRPr lang="en-US" sz="1700" dirty="0"/>
+          </a:p>
+        </p:txBody>
+      </p:sp>
+    </p:spTree>
+  </p:cSld>
+  <p:clrMapOvr>
+    <a:masterClrMapping/>
+  </p:clrMapOvr>
+</p:sld>
+</file>
+
+<file path=ppt/slides/slide24.xml><?xml version="1.0" encoding="utf-8"?>
+<p:sld xmlns:a="http://schemas.openxmlformats.org/drawingml/2006/main" xmlns:r="http://schemas.openxmlformats.org/officeDocument/2006/relationships" xmlns:p="http://schemas.openxmlformats.org/presentationml/2006/main">
+  <p:cSld>
+    <p:spTree>
+      <p:nvGrpSpPr>
+        <p:cNvPr id="1" name="">
+          <a:extLst>
+            <a:ext uri="{FF2B5EF4-FFF2-40B4-BE49-F238E27FC236}">
+              <a16:creationId xmlns:a16="http://schemas.microsoft.com/office/drawing/2014/main" id="{6FD46F9C-1B08-295D-3A9B-F8A792A3D36A}"/>
+            </a:ext>
+          </a:extLst>
+        </p:cNvPr>
+        <p:cNvGrpSpPr/>
+        <p:nvPr/>
+      </p:nvGrpSpPr>
+      <p:grpSpPr>
+        <a:xfrm>
+          <a:off x="0" y="0"/>
+          <a:ext cx="0" cy="0"/>
+          <a:chOff x="0" y="0"/>
+          <a:chExt cx="0" cy="0"/>
+        </a:xfrm>
+      </p:grpSpPr>
+      <p:sp>
+        <p:nvSpPr>
+          <p:cNvPr id="3" name="ask">
+            <a:extLst>
+              <a:ext uri="{FF2B5EF4-FFF2-40B4-BE49-F238E27FC236}">
+                <a16:creationId xmlns:a16="http://schemas.microsoft.com/office/drawing/2014/main" id="{C732DDF5-1B38-EAA1-AF46-0BCDBF943646}"/>
+              </a:ext>
+            </a:extLst>
+          </p:cNvPr>
           <p:cNvSpPr txBox="1"/>
           <p:nvPr/>
         </p:nvSpPr>
         <p:spPr>
           <a:xfrm>
-            <a:off x="731520" y="3291840"/>
-            <a:ext cx="7680960" cy="548640"/>
+            <a:off x="548640" y="640080"/>
+            <a:ext cx="8046720" cy="914400"/>
           </a:xfrm>
           <a:prstGeom prst="rect">
             <a:avLst/>
@@ -7610,31 +7263,37 @@
           <a:bodyPr wrap="square" lIns="0" tIns="0" rIns="0" bIns="0" rtlCol="0" anchor="ctr"/>
           <a:lstStyle/>
           <a:p>
-            <a:pPr indent="0" marL="0">
-              <a:buNone/>
-            </a:pPr>
-            <a:r>
-              <a:rPr lang="en-US" sz="2400" b="1" dirty="0">
-                <a:solidFill>
-                  <a:schemeClr val="accent2"/>
-                </a:solidFill>
-              </a:rPr>
-              <a:t>Let AI help carry the desert.  Don’t vacate the summit.</a:t>
-            </a:r>
-            <a:endParaRPr lang="en-US" sz="2400" dirty="0"/>
-          </a:p>
-        </p:txBody>
-      </p:sp>
-      <p:sp>
-        <p:nvSpPr>
-          <p:cNvPr id="6" name="last"/>
+            <a:pPr marL="0" indent="0">
+              <a:buNone/>
+            </a:pPr>
+            <a:r>
+              <a:rPr lang="en-US" sz="3200" b="1" dirty="0">
+                <a:solidFill>
+                  <a:schemeClr val="accent1"/>
+                </a:solidFill>
+              </a:rPr>
+              <a:t>Since you know how formation works, ask yourself…</a:t>
+            </a:r>
+            <a:endParaRPr lang="en-US" sz="3200" dirty="0"/>
+          </a:p>
+        </p:txBody>
+      </p:sp>
+      <p:sp>
+        <p:nvSpPr>
+          <p:cNvPr id="4" name="gloss">
+            <a:extLst>
+              <a:ext uri="{FF2B5EF4-FFF2-40B4-BE49-F238E27FC236}">
+                <a16:creationId xmlns:a16="http://schemas.microsoft.com/office/drawing/2014/main" id="{E97BD65B-61D7-337D-FEFC-7A07B7842DC3}"/>
+              </a:ext>
+            </a:extLst>
+          </p:cNvPr>
           <p:cNvSpPr txBox="1"/>
           <p:nvPr/>
         </p:nvSpPr>
         <p:spPr>
           <a:xfrm>
-            <a:off x="731520" y="3931920"/>
-            <a:ext cx="7680960" cy="822960"/>
+            <a:off x="548640" y="2651760"/>
+            <a:ext cx="8046720" cy="914400"/>
           </a:xfrm>
           <a:prstGeom prst="rect">
             <a:avLst/>
@@ -7646,22 +7305,64 @@
           <a:bodyPr wrap="square" lIns="0" tIns="0" rIns="0" bIns="0" rtlCol="0" anchor="t"/>
           <a:lstStyle/>
           <a:p>
-            <a:pPr indent="0" marL="0">
-              <a:buNone/>
-            </a:pPr>
-            <a:r>
-              <a:rPr lang="en-US" sz="1700" dirty="0">
-                <a:solidFill>
-                  <a:schemeClr val="bg1"/>
-                </a:solidFill>
-              </a:rPr>
-              <a:t>Become the kind of person who can notice what matters, love what is good, and act wisely when reality changes beneath your feet.</a:t>
-            </a:r>
-            <a:endParaRPr lang="en-US" sz="1700" dirty="0"/>
+            <a:pPr marL="0" indent="0">
+              <a:buNone/>
+            </a:pPr>
+            <a:r>
+              <a:rPr lang="en-US" sz="2000" dirty="0">
+                <a:solidFill>
+                  <a:schemeClr val="tx1"/>
+                </a:solidFill>
+              </a:rPr>
+              <a:t>How would I characterize my partnership with </a:t>
+            </a:r>
+            <a:r>
+              <a:rPr lang="en-US" sz="2000" dirty="0"/>
+              <a:t>AI? </a:t>
+            </a:r>
+          </a:p>
+          <a:p>
+            <a:pPr marL="0" indent="0">
+              <a:buNone/>
+            </a:pPr>
+            <a:r>
+              <a:rPr lang="en-US" sz="2000" dirty="0">
+                <a:solidFill>
+                  <a:schemeClr val="tx1"/>
+                </a:solidFill>
+              </a:rPr>
+              <a:t>What practices do I use to guide our work together?</a:t>
+            </a:r>
+          </a:p>
+          <a:p>
+            <a:pPr marL="0" indent="0">
+              <a:buNone/>
+            </a:pPr>
+            <a:endParaRPr lang="en-US" sz="2000" dirty="0"/>
+          </a:p>
+          <a:p>
+            <a:pPr marL="0" indent="0">
+              <a:buNone/>
+            </a:pPr>
+            <a:endParaRPr lang="en-US" sz="2000" dirty="0"/>
+          </a:p>
+          <a:p>
+            <a:pPr marL="0" indent="0">
+              <a:buNone/>
+            </a:pPr>
+            <a:r>
+              <a:rPr lang="en-US" sz="2000" b="1" dirty="0"/>
+              <a:t>What does your answers say about YOU and your formation?</a:t>
+            </a:r>
           </a:p>
         </p:txBody>
       </p:sp>
     </p:spTree>
+    <p:extLst>
+      <p:ext uri="{BB962C8B-B14F-4D97-AF65-F5344CB8AC3E}">
+        <p14:creationId xmlns:p14="http://schemas.microsoft.com/office/powerpoint/2010/main" val="430613631"/>
+      </p:ext>
+    </p:extLst>
   </p:cSld>
   <p:clrMapOvr>
     <a:masterClrMapping/>
@@ -7688,88 +7389,28 @@
       </p:grpSpPr>
       <p:pic>
         <p:nvPicPr>
-          <p:cNvPr id="2" name="map" descr="/home/claude/slides/photos/Illustrated Map from Giza Pyramids to Step Pyramids.png">    </p:cNvPr>
+          <p:cNvPr id="2" name="map" descr="/home/claude/slides/photos/Illustrated Map from Giza Pyramids to Step Pyramids.png"/>
           <p:cNvPicPr>
             <a:picLocks noChangeAspect="1"/>
           </p:cNvPicPr>
           <p:nvPr/>
         </p:nvPicPr>
         <p:blipFill>
-          <a:blip r:embed="rId1"/>
+          <a:blip r:embed="rId3"/>
           <a:stretch>
             <a:fillRect/>
           </a:stretch>
         </p:blipFill>
         <p:spPr>
           <a:xfrm>
-            <a:off x="502920" y="320040"/>
-            <a:ext cx="8138160" cy="4572000"/>
+            <a:off x="-47196" y="0"/>
+            <a:ext cx="9191195" cy="5163592"/>
           </a:xfrm>
           <a:prstGeom prst="rect">
             <a:avLst/>
           </a:prstGeom>
         </p:spPr>
       </p:pic>
-      <p:sp>
-        <p:nvSpPr>
-          <p:cNvPr id="4" name="Text 0"/>
-          <p:cNvSpPr/>
-          <p:nvPr>
-            <p:ph idx="100" type="title" hasCustomPrompt="1"/>
-          </p:nvPr>
-        </p:nvSpPr>
-        <p:spPr>
-          <a:xfrm>
-            <a:off x="548640" y="411480"/>
-            <a:ext cx="8046720" cy="822960"/>
-          </a:xfrm>
-          <a:prstGeom prst="rect">
-            <a:avLst/>
-          </a:prstGeom>
-          <a:noFill/>
-          <a:ln/>
-        </p:spPr>
-        <p:txBody>
-          <a:bodyPr wrap="square" lIns="0" tIns="0" rIns="0" bIns="0" rtlCol="0" anchor="t"/>
-          <a:lstStyle/>
-          <a:p>
-            <a:pPr indent="0" marL="0">
-              <a:buNone/>
-            </a:pPr>
-            <a:endParaRPr lang="en-US" sz="3400" dirty="0"/>
-          </a:p>
-        </p:txBody>
-      </p:sp>
-      <p:sp>
-        <p:nvSpPr>
-          <p:cNvPr id="5" name="Text 0"/>
-          <p:cNvSpPr/>
-          <p:nvPr>
-            <p:ph idx="101" type="body" hasCustomPrompt="1"/>
-          </p:nvPr>
-        </p:nvSpPr>
-        <p:spPr>
-          <a:xfrm>
-            <a:off x="548640" y="1371600"/>
-            <a:ext cx="8046720" cy="3291840"/>
-          </a:xfrm>
-          <a:prstGeom prst="rect">
-            <a:avLst/>
-          </a:prstGeom>
-          <a:noFill/>
-          <a:ln/>
-        </p:spPr>
-        <p:txBody>
-          <a:bodyPr wrap="square" lIns="0" tIns="0" rIns="0" bIns="0" rtlCol="0" anchor="t"/>
-          <a:lstStyle/>
-          <a:p>
-            <a:pPr indent="0" marL="0">
-              <a:buNone/>
-            </a:pPr>
-            <a:endParaRPr lang="en-US" sz="1800" dirty="0"/>
-          </a:p>
-        </p:txBody>
-      </p:sp>
     </p:spTree>
   </p:cSld>
   <p:clrMapOvr>
@@ -7797,14 +7438,14 @@
       </p:grpSpPr>
       <p:pic>
         <p:nvPicPr>
-          <p:cNvPr id="2" name="photo" descr="/home/claude/slides/tmp/Egypt_Desert_3_EDIT_2__jpg.jpg">    </p:cNvPr>
+          <p:cNvPr id="2" name="photo" descr="/home/claude/slides/tmp/Egypt_Desert_3_EDIT_2__jpg.jpg"/>
           <p:cNvPicPr>
             <a:picLocks noChangeAspect="1"/>
           </p:cNvPicPr>
           <p:nvPr/>
         </p:nvPicPr>
         <p:blipFill>
-          <a:blip r:embed="rId1"/>
+          <a:blip r:embed="rId3"/>
           <a:stretch>
             <a:fillRect/>
           </a:stretch>
@@ -7836,7 +7477,7 @@
           <a:noFill/>
           <a:ln/>
           <a:effectLst>
-            <a:outerShdw sx="100000" sy="100000" kx="0" ky="0" algn="bl" rotWithShape="0" blurRad="76200" dist="12700" dir="2700000">
+            <a:outerShdw blurRad="76200" dist="12700" dir="2700000" algn="bl" rotWithShape="0">
               <a:srgbClr val="000000">
                 <a:alpha val="60000"/>
               </a:srgbClr>
@@ -7847,7 +7488,7 @@
           <a:bodyPr wrap="square" lIns="0" tIns="0" rIns="0" bIns="0" rtlCol="0" anchor="ctr"/>
           <a:lstStyle/>
           <a:p>
-            <a:pPr algn="l" indent="0" marL="0">
+            <a:pPr marL="0" indent="0" algn="l">
               <a:buNone/>
             </a:pPr>
             <a:r>
@@ -7889,14 +7530,14 @@
       </p:grpSpPr>
       <p:pic>
         <p:nvPicPr>
-          <p:cNvPr id="2" name="photo" descr="/home/claude/slides/tmp/Egypt_Desert_2D_jpg.jpg">    </p:cNvPr>
+          <p:cNvPr id="2" name="photo" descr="/home/claude/slides/tmp/Egypt_Desert_2D_jpg.jpg"/>
           <p:cNvPicPr>
             <a:picLocks noChangeAspect="1"/>
           </p:cNvPicPr>
           <p:nvPr/>
         </p:nvPicPr>
         <p:blipFill>
-          <a:blip r:embed="rId1"/>
+          <a:blip r:embed="rId3"/>
           <a:stretch>
             <a:fillRect/>
           </a:stretch>
@@ -7928,7 +7569,7 @@
           <a:noFill/>
           <a:ln/>
           <a:effectLst>
-            <a:outerShdw sx="100000" sy="100000" kx="0" ky="0" algn="bl" rotWithShape="0" blurRad="76200" dist="12700" dir="2700000">
+            <a:outerShdw blurRad="76200" dist="12700" dir="2700000" algn="bl" rotWithShape="0">
               <a:srgbClr val="000000">
                 <a:alpha val="60000"/>
               </a:srgbClr>
@@ -7939,7 +7580,7 @@
           <a:bodyPr wrap="square" lIns="0" tIns="0" rIns="0" bIns="0" rtlCol="0" anchor="ctr"/>
           <a:lstStyle/>
           <a:p>
-            <a:pPr algn="l" indent="0" marL="0">
+            <a:pPr marL="0" indent="0" algn="l">
               <a:buNone/>
             </a:pPr>
             <a:r>
@@ -8000,7 +7641,7 @@
           <a:bodyPr wrap="square" lIns="0" tIns="0" rIns="0" bIns="0" rtlCol="0" anchor="ctr"/>
           <a:lstStyle/>
           <a:p>
-            <a:pPr indent="0" marL="0">
+            <a:pPr marL="0" indent="0">
               <a:buNone/>
             </a:pPr>
             <a:r>
@@ -8036,7 +7677,7 @@
           <a:bodyPr wrap="square" lIns="0" tIns="0" rIns="0" bIns="0" rtlCol="0" anchor="ctr"/>
           <a:lstStyle/>
           <a:p>
-            <a:pPr indent="0" marL="0">
+            <a:pPr marL="0" indent="0">
               <a:buNone/>
             </a:pPr>
             <a:r>
@@ -8054,9 +7695,11 @@
       <p:sp>
         <p:nvSpPr>
           <p:cNvPr id="5" name="Text 0"/>
-          <p:cNvSpPr/>
-          <p:nvPr>
-            <p:ph idx="100" type="title" hasCustomPrompt="1"/>
+          <p:cNvSpPr>
+            <a:spLocks noGrp="1"/>
+          </p:cNvSpPr>
+          <p:nvPr>
+            <p:ph type="title" idx="100" hasCustomPrompt="1"/>
           </p:nvPr>
         </p:nvSpPr>
         <p:spPr>
@@ -8074,40 +7717,10 @@
           <a:bodyPr wrap="square" lIns="0" tIns="0" rIns="0" bIns="0" rtlCol="0" anchor="t"/>
           <a:lstStyle/>
           <a:p>
-            <a:pPr indent="0" marL="0">
+            <a:pPr marL="0" indent="0">
               <a:buNone/>
             </a:pPr>
             <a:endParaRPr lang="en-US" sz="3600" dirty="0"/>
-          </a:p>
-        </p:txBody>
-      </p:sp>
-      <p:sp>
-        <p:nvSpPr>
-          <p:cNvPr id="6" name="Text 0"/>
-          <p:cNvSpPr/>
-          <p:nvPr>
-            <p:ph idx="101" type="body" hasCustomPrompt="1"/>
-          </p:nvPr>
-        </p:nvSpPr>
-        <p:spPr>
-          <a:xfrm>
-            <a:off x="548640" y="1554480"/>
-            <a:ext cx="8046720" cy="3108960"/>
-          </a:xfrm>
-          <a:prstGeom prst="rect">
-            <a:avLst/>
-          </a:prstGeom>
-          <a:noFill/>
-          <a:ln/>
-        </p:spPr>
-        <p:txBody>
-          <a:bodyPr wrap="square" lIns="0" tIns="0" rIns="0" bIns="0" rtlCol="0" anchor="t"/>
-          <a:lstStyle/>
-          <a:p>
-            <a:pPr indent="0" marL="0">
-              <a:buNone/>
-            </a:pPr>
-            <a:endParaRPr lang="en-US" sz="1800" dirty="0"/>
           </a:p>
         </p:txBody>
       </p:sp>
@@ -8157,7 +7770,7 @@
           <a:bodyPr wrap="square" lIns="0" tIns="0" rIns="0" bIns="0" rtlCol="0" anchor="ctr"/>
           <a:lstStyle/>
           <a:p>
-            <a:pPr algn="ctr" indent="0" marL="0">
+            <a:pPr marL="0" indent="0" algn="ctr">
               <a:buNone/>
             </a:pPr>
             <a:r>
@@ -8169,66 +7782,6 @@
               <a:t>Which one of us acted more wisely?</a:t>
             </a:r>
             <a:endParaRPr lang="en-US" sz="4000" dirty="0"/>
-          </a:p>
-        </p:txBody>
-      </p:sp>
-      <p:sp>
-        <p:nvSpPr>
-          <p:cNvPr id="4" name="Text 0"/>
-          <p:cNvSpPr/>
-          <p:nvPr>
-            <p:ph idx="100" type="title" hasCustomPrompt="1"/>
-          </p:nvPr>
-        </p:nvSpPr>
-        <p:spPr>
-          <a:xfrm>
-            <a:off x="548640" y="411480"/>
-            <a:ext cx="8046720" cy="822960"/>
-          </a:xfrm>
-          <a:prstGeom prst="rect">
-            <a:avLst/>
-          </a:prstGeom>
-          <a:noFill/>
-          <a:ln/>
-        </p:spPr>
-        <p:txBody>
-          <a:bodyPr wrap="square" lIns="0" tIns="0" rIns="0" bIns="0" rtlCol="0" anchor="t"/>
-          <a:lstStyle/>
-          <a:p>
-            <a:pPr indent="0" marL="0">
-              <a:buNone/>
-            </a:pPr>
-            <a:endParaRPr lang="en-US" sz="3400" dirty="0"/>
-          </a:p>
-        </p:txBody>
-      </p:sp>
-      <p:sp>
-        <p:nvSpPr>
-          <p:cNvPr id="5" name="Text 0"/>
-          <p:cNvSpPr/>
-          <p:nvPr>
-            <p:ph idx="101" type="body" hasCustomPrompt="1"/>
-          </p:nvPr>
-        </p:nvSpPr>
-        <p:spPr>
-          <a:xfrm>
-            <a:off x="548640" y="1371600"/>
-            <a:ext cx="8046720" cy="3291840"/>
-          </a:xfrm>
-          <a:prstGeom prst="rect">
-            <a:avLst/>
-          </a:prstGeom>
-          <a:noFill/>
-          <a:ln/>
-        </p:spPr>
-        <p:txBody>
-          <a:bodyPr wrap="square" lIns="0" tIns="0" rIns="0" bIns="0" rtlCol="0" anchor="t"/>
-          <a:lstStyle/>
-          <a:p>
-            <a:pPr indent="0" marL="0">
-              <a:buNone/>
-            </a:pPr>
-            <a:endParaRPr lang="en-US" sz="1800" dirty="0"/>
           </a:p>
         </p:txBody>
       </p:sp>
@@ -8265,7 +7818,7 @@
         </p:nvSpPr>
         <p:spPr>
           <a:xfrm>
-            <a:off x="731520" y="1554480"/>
+            <a:off x="690880" y="3586480"/>
             <a:ext cx="7680960" cy="731520"/>
           </a:xfrm>
           <a:prstGeom prst="rect">
@@ -8278,7 +7831,7 @@
           <a:bodyPr wrap="square" lIns="0" tIns="0" rIns="0" bIns="0" rtlCol="0" anchor="ctr"/>
           <a:lstStyle/>
           <a:p>
-            <a:pPr algn="ctr" indent="0" marL="0">
+            <a:pPr marL="0" indent="0" algn="ctr">
               <a:buNone/>
             </a:pPr>
             <a:r>
@@ -8287,7 +7840,7 @@
                   <a:srgbClr val="B9C1D0"/>
                 </a:solidFill>
               </a:rPr>
-              <a:t>Not: can a machine be wise?</a:t>
+              <a:t>Not: Can a machine be wise?</a:t>
             </a:r>
             <a:endParaRPr lang="en-US" sz="2600" dirty="0"/>
           </a:p>
@@ -8301,7 +7854,7 @@
         </p:nvSpPr>
         <p:spPr>
           <a:xfrm>
-            <a:off x="731520" y="2377440"/>
+            <a:off x="731520" y="1626870"/>
             <a:ext cx="7680960" cy="1280160"/>
           </a:xfrm>
           <a:prstGeom prst="rect">
@@ -8314,7 +7867,7 @@
           <a:bodyPr wrap="square" lIns="0" tIns="0" rIns="0" bIns="0" rtlCol="0" anchor="t"/>
           <a:lstStyle/>
           <a:p>
-            <a:pPr algn="ctr" indent="0" marL="0">
+            <a:pPr marL="0" indent="0" algn="ctr">
               <a:buNone/>
             </a:pPr>
             <a:r>
@@ -8326,66 +7879,6 @@
               <a:t>What does it take for any agent to act wisely?</a:t>
             </a:r>
             <a:endParaRPr lang="en-US" sz="3800" dirty="0"/>
-          </a:p>
-        </p:txBody>
-      </p:sp>
-      <p:sp>
-        <p:nvSpPr>
-          <p:cNvPr id="5" name="Text 0"/>
-          <p:cNvSpPr/>
-          <p:nvPr>
-            <p:ph idx="100" type="title" hasCustomPrompt="1"/>
-          </p:nvPr>
-        </p:nvSpPr>
-        <p:spPr>
-          <a:xfrm>
-            <a:off x="548640" y="457200"/>
-            <a:ext cx="8046720" cy="914400"/>
-          </a:xfrm>
-          <a:prstGeom prst="rect">
-            <a:avLst/>
-          </a:prstGeom>
-          <a:noFill/>
-          <a:ln/>
-        </p:spPr>
-        <p:txBody>
-          <a:bodyPr wrap="square" lIns="0" tIns="0" rIns="0" bIns="0" rtlCol="0" anchor="t"/>
-          <a:lstStyle/>
-          <a:p>
-            <a:pPr indent="0" marL="0">
-              <a:buNone/>
-            </a:pPr>
-            <a:endParaRPr lang="en-US" sz="3600" dirty="0"/>
-          </a:p>
-        </p:txBody>
-      </p:sp>
-      <p:sp>
-        <p:nvSpPr>
-          <p:cNvPr id="6" name="Text 0"/>
-          <p:cNvSpPr/>
-          <p:nvPr>
-            <p:ph idx="101" type="body" hasCustomPrompt="1"/>
-          </p:nvPr>
-        </p:nvSpPr>
-        <p:spPr>
-          <a:xfrm>
-            <a:off x="548640" y="1554480"/>
-            <a:ext cx="8046720" cy="3108960"/>
-          </a:xfrm>
-          <a:prstGeom prst="rect">
-            <a:avLst/>
-          </a:prstGeom>
-          <a:noFill/>
-          <a:ln/>
-        </p:spPr>
-        <p:txBody>
-          <a:bodyPr wrap="square" lIns="0" tIns="0" rIns="0" bIns="0" rtlCol="0" anchor="t"/>
-          <a:lstStyle/>
-          <a:p>
-            <a:pPr indent="0" marL="0">
-              <a:buNone/>
-            </a:pPr>
-            <a:endParaRPr lang="en-US" sz="1800" dirty="0"/>
           </a:p>
         </p:txBody>
       </p:sp>
@@ -8416,14 +7909,14 @@
       </p:grpSpPr>
       <p:pic>
         <p:nvPicPr>
-          <p:cNvPr id="2" name="pyramids photo" descr="/home/claude/slides/tmp/maat.jpg">    </p:cNvPr>
+          <p:cNvPr id="2" name="pyramids photo" descr="/home/claude/slides/tmp/maat.jpg"/>
           <p:cNvPicPr>
             <a:picLocks noChangeAspect="1"/>
           </p:cNvPicPr>
           <p:nvPr/>
         </p:nvPicPr>
         <p:blipFill>
-          <a:blip r:embed="rId1">
+          <a:blip r:embed="rId3">
             <a:alphaModFix amt="45000"/>
           </a:blip>
           <a:stretch>
@@ -8468,6 +7961,13 @@
             <a:prstDash val="solid"/>
           </a:ln>
         </p:spPr>
+        <p:txBody>
+          <a:bodyPr/>
+          <a:lstStyle/>
+          <a:p>
+            <a:endParaRPr lang="en-US"/>
+          </a:p>
+        </p:txBody>
       </p:sp>
       <p:sp>
         <p:nvSpPr>
@@ -8490,7 +7990,7 @@
           <a:bodyPr wrap="square" lIns="0" tIns="0" rIns="0" bIns="0" rtlCol="0" anchor="ctr"/>
           <a:lstStyle/>
           <a:p>
-            <a:pPr indent="0" marL="0">
+            <a:pPr marL="0" indent="0">
               <a:buNone/>
             </a:pPr>
             <a:r>
@@ -8526,7 +8026,7 @@
           <a:bodyPr wrap="square" lIns="0" tIns="0" rIns="0" bIns="0" rtlCol="0" anchor="ctr"/>
           <a:lstStyle/>
           <a:p>
-            <a:pPr indent="0" marL="0">
+            <a:pPr marL="0" indent="0">
               <a:buNone/>
             </a:pPr>
             <a:r>
@@ -8562,7 +8062,7 @@
           <a:bodyPr wrap="square" lIns="0" tIns="0" rIns="0" bIns="0" rtlCol="0" anchor="ctr"/>
           <a:lstStyle/>
           <a:p>
-            <a:pPr indent="0" marL="0">
+            <a:pPr marL="0" indent="0">
               <a:buNone/>
             </a:pPr>
             <a:r>
@@ -8878,4 +8378,319 @@
     </a:ext>
   </a:extLst>
 </a:theme>
+</file>
+
+<file path=ppt/theme/theme2.xml><?xml version="1.0" encoding="utf-8"?>
+<a:theme xmlns:a="http://schemas.openxmlformats.org/drawingml/2006/main" name="Office Theme">
+  <a:themeElements>
+    <a:clrScheme name="Office">
+      <a:dk1>
+        <a:sysClr val="windowText" lastClr="000000"/>
+      </a:dk1>
+      <a:lt1>
+        <a:sysClr val="window" lastClr="FFFFFF"/>
+      </a:lt1>
+      <a:dk2>
+        <a:srgbClr val="0E2841"/>
+      </a:dk2>
+      <a:lt2>
+        <a:srgbClr val="E8E8E8"/>
+      </a:lt2>
+      <a:accent1>
+        <a:srgbClr val="156082"/>
+      </a:accent1>
+      <a:accent2>
+        <a:srgbClr val="E97132"/>
+      </a:accent2>
+      <a:accent3>
+        <a:srgbClr val="196B24"/>
+      </a:accent3>
+      <a:accent4>
+        <a:srgbClr val="0F9ED5"/>
+      </a:accent4>
+      <a:accent5>
+        <a:srgbClr val="A02B93"/>
+      </a:accent5>
+      <a:accent6>
+        <a:srgbClr val="4EA72E"/>
+      </a:accent6>
+      <a:hlink>
+        <a:srgbClr val="467886"/>
+      </a:hlink>
+      <a:folHlink>
+        <a:srgbClr val="96607D"/>
+      </a:folHlink>
+    </a:clrScheme>
+    <a:fontScheme name="Office">
+      <a:majorFont>
+        <a:latin typeface="Aptos Display" panose="02110004020202020204"/>
+        <a:ea typeface=""/>
+        <a:cs typeface=""/>
+        <a:font script="Jpan" typeface="游ゴシック Light"/>
+        <a:font script="Hang" typeface="맑은 고딕"/>
+        <a:font script="Hans" typeface="等线 Light"/>
+        <a:font script="Hant" typeface="新細明體"/>
+        <a:font script="Arab" typeface="Times New Roman"/>
+        <a:font script="Hebr" typeface="Times New Roman"/>
+        <a:font script="Thai" typeface="Angsana New"/>
+        <a:font script="Ethi" typeface="Nyala"/>
+        <a:font script="Beng" typeface="Vrinda"/>
+        <a:font script="Gujr" typeface="Shruti"/>
+        <a:font script="Khmr" typeface="MoolBoran"/>
+        <a:font script="Knda" typeface="Tunga"/>
+        <a:font script="Guru" typeface="Raavi"/>
+        <a:font script="Cans" typeface="Euphemia"/>
+        <a:font script="Cher" typeface="Plantagenet Cherokee"/>
+        <a:font script="Yiii" typeface="Microsoft Yi Baiti"/>
+        <a:font script="Tibt" typeface="Microsoft Himalaya"/>
+        <a:font script="Thaa" typeface="MV Boli"/>
+        <a:font script="Deva" typeface="Mangal"/>
+        <a:font script="Telu" typeface="Gautami"/>
+        <a:font script="Taml" typeface="Latha"/>
+        <a:font script="Syrc" typeface="Estrangelo Edessa"/>
+        <a:font script="Orya" typeface="Kalinga"/>
+        <a:font script="Mlym" typeface="Kartika"/>
+        <a:font script="Laoo" typeface="DokChampa"/>
+        <a:font script="Sinh" typeface="Iskoola Pota"/>
+        <a:font script="Mong" typeface="Mongolian Baiti"/>
+        <a:font script="Viet" typeface="Times New Roman"/>
+        <a:font script="Uigh" typeface="Microsoft Uighur"/>
+        <a:font script="Geor" typeface="Sylfaen"/>
+        <a:font script="Armn" typeface="Arial"/>
+        <a:font script="Bugi" typeface="Leelawadee UI"/>
+        <a:font script="Bopo" typeface="Microsoft JhengHei"/>
+        <a:font script="Java" typeface="Javanese Text"/>
+        <a:font script="Lisu" typeface="Segoe UI"/>
+        <a:font script="Mymr" typeface="Myanmar Text"/>
+        <a:font script="Nkoo" typeface="Ebrima"/>
+        <a:font script="Olck" typeface="Nirmala UI"/>
+        <a:font script="Osma" typeface="Ebrima"/>
+        <a:font script="Phag" typeface="Phagspa"/>
+        <a:font script="Syrn" typeface="Estrangelo Edessa"/>
+        <a:font script="Syrj" typeface="Estrangelo Edessa"/>
+        <a:font script="Syre" typeface="Estrangelo Edessa"/>
+        <a:font script="Sora" typeface="Nirmala UI"/>
+        <a:font script="Tale" typeface="Microsoft Tai Le"/>
+        <a:font script="Talu" typeface="Microsoft New Tai Lue"/>
+        <a:font script="Tfng" typeface="Ebrima"/>
+      </a:majorFont>
+      <a:minorFont>
+        <a:latin typeface="Aptos" panose="02110004020202020204"/>
+        <a:ea typeface=""/>
+        <a:cs typeface=""/>
+        <a:font script="Jpan" typeface="游ゴシック"/>
+        <a:font script="Hang" typeface="맑은 고딕"/>
+        <a:font script="Hans" typeface="等线"/>
+        <a:font script="Hant" typeface="新細明體"/>
+        <a:font script="Arab" typeface="Arial"/>
+        <a:font script="Hebr" typeface="Arial"/>
+        <a:font script="Thai" typeface="Cordia New"/>
+        <a:font script="Ethi" typeface="Nyala"/>
+        <a:font script="Beng" typeface="Vrinda"/>
+        <a:font script="Gujr" typeface="Shruti"/>
+        <a:font script="Khmr" typeface="DaunPenh"/>
+        <a:font script="Knda" typeface="Tunga"/>
+        <a:font script="Guru" typeface="Raavi"/>
+        <a:font script="Cans" typeface="Euphemia"/>
+        <a:font script="Cher" typeface="Plantagenet Cherokee"/>
+        <a:font script="Yiii" typeface="Microsoft Yi Baiti"/>
+        <a:font script="Tibt" typeface="Microsoft Himalaya"/>
+        <a:font script="Thaa" typeface="MV Boli"/>
+        <a:font script="Deva" typeface="Mangal"/>
+        <a:font script="Telu" typeface="Gautami"/>
+        <a:font script="Taml" typeface="Latha"/>
+        <a:font script="Syrc" typeface="Estrangelo Edessa"/>
+        <a:font script="Orya" typeface="Kalinga"/>
+        <a:font script="Mlym" typeface="Kartika"/>
+        <a:font script="Laoo" typeface="DokChampa"/>
+        <a:font script="Sinh" typeface="Iskoola Pota"/>
+        <a:font script="Mong" typeface="Mongolian Baiti"/>
+        <a:font script="Viet" typeface="Arial"/>
+        <a:font script="Uigh" typeface="Microsoft Uighur"/>
+        <a:font script="Geor" typeface="Sylfaen"/>
+        <a:font script="Armn" typeface="Arial"/>
+        <a:font script="Bugi" typeface="Leelawadee UI"/>
+        <a:font script="Bopo" typeface="Microsoft JhengHei"/>
+        <a:font script="Java" typeface="Javanese Text"/>
+        <a:font script="Lisu" typeface="Segoe UI"/>
+        <a:font script="Mymr" typeface="Myanmar Text"/>
+        <a:font script="Nkoo" typeface="Ebrima"/>
+        <a:font script="Olck" typeface="Nirmala UI"/>
+        <a:font script="Osma" typeface="Ebrima"/>
+        <a:font script="Phag" typeface="Phagspa"/>
+        <a:font script="Syrn" typeface="Estrangelo Edessa"/>
+        <a:font script="Syrj" typeface="Estrangelo Edessa"/>
+        <a:font script="Syre" typeface="Estrangelo Edessa"/>
+        <a:font script="Sora" typeface="Nirmala UI"/>
+        <a:font script="Tale" typeface="Microsoft Tai Le"/>
+        <a:font script="Talu" typeface="Microsoft New Tai Lue"/>
+        <a:font script="Tfng" typeface="Ebrima"/>
+      </a:minorFont>
+    </a:fontScheme>
+    <a:fmtScheme name="Office">
+      <a:fillStyleLst>
+        <a:solidFill>
+          <a:schemeClr val="phClr"/>
+        </a:solidFill>
+        <a:gradFill rotWithShape="1">
+          <a:gsLst>
+            <a:gs pos="0">
+              <a:schemeClr val="phClr">
+                <a:lumMod val="110000"/>
+                <a:satMod val="105000"/>
+                <a:tint val="67000"/>
+              </a:schemeClr>
+            </a:gs>
+            <a:gs pos="50000">
+              <a:schemeClr val="phClr">
+                <a:lumMod val="105000"/>
+                <a:satMod val="103000"/>
+                <a:tint val="73000"/>
+              </a:schemeClr>
+            </a:gs>
+            <a:gs pos="100000">
+              <a:schemeClr val="phClr">
+                <a:lumMod val="105000"/>
+                <a:satMod val="109000"/>
+                <a:tint val="81000"/>
+              </a:schemeClr>
+            </a:gs>
+          </a:gsLst>
+          <a:lin ang="5400000" scaled="0"/>
+        </a:gradFill>
+        <a:gradFill rotWithShape="1">
+          <a:gsLst>
+            <a:gs pos="0">
+              <a:schemeClr val="phClr">
+                <a:satMod val="103000"/>
+                <a:lumMod val="102000"/>
+                <a:tint val="94000"/>
+              </a:schemeClr>
+            </a:gs>
+            <a:gs pos="50000">
+              <a:schemeClr val="phClr">
+                <a:satMod val="110000"/>
+                <a:lumMod val="100000"/>
+                <a:shade val="100000"/>
+              </a:schemeClr>
+            </a:gs>
+            <a:gs pos="100000">
+              <a:schemeClr val="phClr">
+                <a:lumMod val="99000"/>
+                <a:satMod val="120000"/>
+                <a:shade val="78000"/>
+              </a:schemeClr>
+            </a:gs>
+          </a:gsLst>
+          <a:lin ang="5400000" scaled="0"/>
+        </a:gradFill>
+      </a:fillStyleLst>
+      <a:lnStyleLst>
+        <a:ln w="12700" cap="flat" cmpd="sng" algn="ctr">
+          <a:solidFill>
+            <a:schemeClr val="phClr"/>
+          </a:solidFill>
+          <a:prstDash val="solid"/>
+          <a:miter lim="800000"/>
+        </a:ln>
+        <a:ln w="19050" cap="flat" cmpd="sng" algn="ctr">
+          <a:solidFill>
+            <a:schemeClr val="phClr"/>
+          </a:solidFill>
+          <a:prstDash val="solid"/>
+          <a:miter lim="800000"/>
+        </a:ln>
+        <a:ln w="25400" cap="flat" cmpd="sng" algn="ctr">
+          <a:solidFill>
+            <a:schemeClr val="phClr"/>
+          </a:solidFill>
+          <a:prstDash val="solid"/>
+          <a:miter lim="800000"/>
+        </a:ln>
+      </a:lnStyleLst>
+      <a:effectStyleLst>
+        <a:effectStyle>
+          <a:effectLst/>
+        </a:effectStyle>
+        <a:effectStyle>
+          <a:effectLst/>
+        </a:effectStyle>
+        <a:effectStyle>
+          <a:effectLst>
+            <a:outerShdw blurRad="57150" dist="19050" dir="5400000" algn="ctr" rotWithShape="0">
+              <a:srgbClr val="000000">
+                <a:alpha val="63000"/>
+              </a:srgbClr>
+            </a:outerShdw>
+          </a:effectLst>
+        </a:effectStyle>
+      </a:effectStyleLst>
+      <a:bgFillStyleLst>
+        <a:solidFill>
+          <a:schemeClr val="phClr"/>
+        </a:solidFill>
+        <a:solidFill>
+          <a:schemeClr val="phClr">
+            <a:tint val="95000"/>
+            <a:satMod val="170000"/>
+          </a:schemeClr>
+        </a:solidFill>
+        <a:gradFill rotWithShape="1">
+          <a:gsLst>
+            <a:gs pos="0">
+              <a:schemeClr val="phClr">
+                <a:tint val="93000"/>
+                <a:satMod val="150000"/>
+                <a:shade val="98000"/>
+                <a:lumMod val="102000"/>
+              </a:schemeClr>
+            </a:gs>
+            <a:gs pos="50000">
+              <a:schemeClr val="phClr">
+                <a:tint val="98000"/>
+                <a:satMod val="130000"/>
+                <a:shade val="90000"/>
+                <a:lumMod val="103000"/>
+              </a:schemeClr>
+            </a:gs>
+            <a:gs pos="100000">
+              <a:schemeClr val="phClr">
+                <a:shade val="63000"/>
+                <a:satMod val="120000"/>
+              </a:schemeClr>
+            </a:gs>
+          </a:gsLst>
+          <a:lin ang="5400000" scaled="0"/>
+        </a:gradFill>
+      </a:bgFillStyleLst>
+    </a:fmtScheme>
+  </a:themeElements>
+  <a:objectDefaults>
+    <a:lnDef>
+      <a:spPr/>
+      <a:bodyPr/>
+      <a:lstStyle/>
+      <a:style>
+        <a:lnRef idx="2">
+          <a:schemeClr val="accent1"/>
+        </a:lnRef>
+        <a:fillRef idx="0">
+          <a:schemeClr val="accent1"/>
+        </a:fillRef>
+        <a:effectRef idx="1">
+          <a:schemeClr val="accent1"/>
+        </a:effectRef>
+        <a:fontRef idx="minor">
+          <a:schemeClr val="tx1"/>
+        </a:fontRef>
+      </a:style>
+    </a:lnDef>
+  </a:objectDefaults>
+  <a:extraClrSchemeLst/>
+  <a:extLst>
+    <a:ext uri="{05A4C25C-085E-4340-85A3-A5531E510DB2}">
+      <thm15:themeFamily xmlns:thm15="http://schemas.microsoft.com/office/thememl/2012/main" name="Office Theme" id="{2E142A2C-CD16-42D6-873A-C26D2A0506FA}" vid="{1BDDFF52-6CD6-40A5-AB3C-68EB2F1E4D0A}"/>
+    </a:ext>
+  </a:extLst>
+</a:theme>
 </file>